--- a/ClubOps-AI_BIT_N_BUILD_26.pptx
+++ b/ClubOps-AI_BIT_N_BUILD_26.pptx
@@ -16,6 +16,7 @@
     <p:sldId id="264" r:id="rId15"/>
     <p:sldId id="265" r:id="rId16"/>
     <p:sldId id="266" r:id="rId17"/>
+    <p:sldId id="267" r:id="rId18"/>
   </p:sldIdLst>
   <p:sldSz cx="12191695" cy="6858000" type="screen4x3"/>
   <p:notesSz cx="6858000" cy="9144000"/>
@@ -3094,7 +3095,7 @@
     <p:bg>
       <p:bgPr>
         <a:solidFill>
-          <a:srgbClr val="0B0F19"/>
+          <a:srgbClr val="0B0C10"/>
         </a:solidFill>
         <a:effectLst/>
       </p:bgPr>
@@ -3108,24 +3109,24 @@
       <p:grpSpPr/>
       <p:sp>
         <p:nvSpPr>
-          <p:cNvPr id="2" name="Rounded Rectangle 1"/>
+          <p:cNvPr id="2" name="Rectangle 1"/>
           <p:cNvSpPr/>
           <p:nvPr/>
         </p:nvSpPr>
         <p:spPr>
           <a:xfrm>
-            <a:off x="731520" y="914400"/>
-            <a:ext cx="3840480" cy="411480"/>
-          </a:xfrm>
-          <a:prstGeom prst="roundRect">
+            <a:off x="731520" y="749808"/>
+            <a:ext cx="10725912" cy="5358384"/>
+          </a:xfrm>
+          <a:prstGeom prst="rect">
             <a:avLst/>
           </a:prstGeom>
           <a:solidFill>
-            <a:srgbClr val="161B2C"/>
+            <a:srgbClr val="14161D"/>
           </a:solidFill>
-          <a:ln>
+          <a:ln w="19050">
             <a:solidFill>
-              <a:srgbClr val="06B6D4"/>
+              <a:srgbClr val="2A2E3A"/>
             </a:solidFill>
           </a:ln>
         </p:spPr>
@@ -3147,90 +3148,29 @@
           <a:bodyPr rtlCol="0" anchor="ctr"/>
           <a:lstStyle/>
           <a:p>
-            <a:pPr algn="ctr">
-              <a:defRPr sz="1100" b="1">
-                <a:solidFill>
-                  <a:srgbClr val="06B6D4"/>
-                </a:solidFill>
-              </a:defRPr>
-            </a:pPr>
-            <a:r>
-              <a:t>BIT N BUILD ’26 • GUJARAT REGIONAL ROUND</a:t>
-            </a:r>
-          </a:p>
-        </p:txBody>
-      </p:sp>
-      <p:sp>
-        <p:nvSpPr>
-          <p:cNvPr id="3" name="TextBox 2"/>
-          <p:cNvSpPr txBox="1"/>
-          <p:nvPr/>
-        </p:nvSpPr>
-        <p:spPr>
-          <a:xfrm>
-            <a:off x="731520" y="1554480"/>
-            <a:ext cx="10698480" cy="2011680"/>
-          </a:xfrm>
-          <a:prstGeom prst="rect">
-            <a:avLst/>
-          </a:prstGeom>
-          <a:noFill/>
-        </p:spPr>
-        <p:txBody>
-          <a:bodyPr wrap="square">
-            <a:spAutoFit/>
-          </a:bodyPr>
-          <a:lstStyle/>
-          <a:p>
-            <a:pPr>
-              <a:defRPr sz="4400" b="1">
-                <a:solidFill>
-                  <a:srgbClr val="FFFFFF"/>
-                </a:solidFill>
-              </a:defRPr>
-            </a:pPr>
-            <a:r>
-              <a:t>⚡ ClubOps-AI</a:t>
-            </a:r>
-          </a:p>
-          <a:p>
-            <a:pPr>
-              <a:spcBef>
-                <a:spcPts val="800"/>
-              </a:spcBef>
-              <a:defRPr sz="1800">
-                <a:solidFill>
-                  <a:srgbClr val="3B82F6"/>
-                </a:solidFill>
-              </a:defRPr>
-            </a:pPr>
-            <a:r>
-              <a:t>Autonomous Club &amp; Event Operations Platform with Grounded RAG Intelligence</a:t>
-            </a:r>
-          </a:p>
-        </p:txBody>
-      </p:sp>
-      <p:sp>
-        <p:nvSpPr>
-          <p:cNvPr id="4" name="Rounded Rectangle 3"/>
+            <a:pPr algn="ctr"/>
+          </a:p>
+        </p:txBody>
+      </p:sp>
+      <p:sp>
+        <p:nvSpPr>
+          <p:cNvPr id="3" name="Rectangle 2"/>
           <p:cNvSpPr/>
           <p:nvPr/>
         </p:nvSpPr>
         <p:spPr>
           <a:xfrm>
-            <a:off x="731520" y="3931920"/>
-            <a:ext cx="5120640" cy="2286000"/>
-          </a:xfrm>
-          <a:prstGeom prst="roundRect">
+            <a:off x="1188720" y="1143000"/>
+            <a:ext cx="1097280" cy="274320"/>
+          </a:xfrm>
+          <a:prstGeom prst="rect">
             <a:avLst/>
           </a:prstGeom>
           <a:solidFill>
-            <a:srgbClr val="161B2C"/>
+            <a:srgbClr val="FF2D55"/>
           </a:solidFill>
-          <a:ln w="19050">
-            <a:solidFill>
-              <a:srgbClr val="2D3748"/>
-            </a:solidFill>
+          <a:ln>
+            <a:noFill/>
           </a:ln>
         </p:spPr>
         <p:style>
@@ -3248,18 +3188,127 @@
           </a:fontRef>
         </p:style>
         <p:txBody>
-          <a:bodyPr rtlCol="0" anchor="ctr" wrap="square" lIns="228600" tIns="182880" rIns="228600"/>
+          <a:bodyPr rtlCol="0" anchor="ctr" lIns="0" tIns="0" rIns="0" bIns="0"/>
           <a:lstStyle/>
           <a:p>
             <a:pPr algn="ctr">
-              <a:defRPr sz="1300" b="1">
-                <a:solidFill>
-                  <a:srgbClr val="3B82F6"/>
-                </a:solidFill>
-              </a:defRPr>
-            </a:pPr>
-            <a:r>
-              <a:t>TEAM DETAILS</a:t>
+              <a:defRPr sz="950" b="1">
+                <a:solidFill>
+                  <a:srgbClr val="FFFFFF"/>
+                </a:solidFill>
+                <a:latin typeface="Segoe UI"/>
+              </a:defRPr>
+            </a:pPr>
+            <a:r>
+              <a:t>BIT N BUILD</a:t>
+            </a:r>
+          </a:p>
+        </p:txBody>
+      </p:sp>
+      <p:sp>
+        <p:nvSpPr>
+          <p:cNvPr id="4" name="TextBox 3"/>
+          <p:cNvSpPr txBox="1"/>
+          <p:nvPr/>
+        </p:nvSpPr>
+        <p:spPr>
+          <a:xfrm>
+            <a:off x="2423160" y="1143000"/>
+            <a:ext cx="8229600" cy="274320"/>
+          </a:xfrm>
+          <a:prstGeom prst="rect">
+            <a:avLst/>
+          </a:prstGeom>
+          <a:noFill/>
+        </p:spPr>
+        <p:txBody>
+          <a:bodyPr wrap="none" lIns="0" tIns="0" rIns="0" bIns="0">
+            <a:spAutoFit/>
+          </a:bodyPr>
+          <a:lstStyle/>
+          <a:p>
+            <a:pPr>
+              <a:defRPr sz="950" b="1">
+                <a:solidFill>
+                  <a:srgbClr val="9CA3AF"/>
+                </a:solidFill>
+                <a:latin typeface="Segoe UI"/>
+              </a:defRPr>
+            </a:pPr>
+            <a:r>
+              <a:t>GUJARAT REGIONAL ROUND  •  TEAM: BIT COMPUTING</a:t>
+            </a:r>
+          </a:p>
+        </p:txBody>
+      </p:sp>
+      <p:sp>
+        <p:nvSpPr>
+          <p:cNvPr id="5" name="TextBox 4"/>
+          <p:cNvSpPr txBox="1"/>
+          <p:nvPr/>
+        </p:nvSpPr>
+        <p:spPr>
+          <a:xfrm>
+            <a:off x="1188720" y="1600200"/>
+            <a:ext cx="9601200" cy="1005840"/>
+          </a:xfrm>
+          <a:prstGeom prst="rect">
+            <a:avLst/>
+          </a:prstGeom>
+          <a:noFill/>
+        </p:spPr>
+        <p:txBody>
+          <a:bodyPr wrap="none" lIns="0" tIns="0" rIns="0" bIns="0">
+            <a:spAutoFit/>
+          </a:bodyPr>
+          <a:lstStyle/>
+          <a:p>
+            <a:pPr>
+              <a:defRPr sz="4800" b="1">
+                <a:solidFill>
+                  <a:srgbClr val="FFFFFF"/>
+                </a:solidFill>
+                <a:latin typeface="Segoe UI"/>
+              </a:defRPr>
+            </a:pPr>
+            <a:r>
+              <a:t>CLUBOPS AI</a:t>
+            </a:r>
+          </a:p>
+        </p:txBody>
+      </p:sp>
+      <p:sp>
+        <p:nvSpPr>
+          <p:cNvPr id="6" name="TextBox 5"/>
+          <p:cNvSpPr txBox="1"/>
+          <p:nvPr/>
+        </p:nvSpPr>
+        <p:spPr>
+          <a:xfrm>
+            <a:off x="1188720" y="2606040"/>
+            <a:ext cx="9601200" cy="548640"/>
+          </a:xfrm>
+          <a:prstGeom prst="rect">
+            <a:avLst/>
+          </a:prstGeom>
+          <a:noFill/>
+        </p:spPr>
+        <p:txBody>
+          <a:bodyPr wrap="none" lIns="0" tIns="0" rIns="0" bIns="0">
+            <a:spAutoFit/>
+          </a:bodyPr>
+          <a:lstStyle/>
+          <a:p>
+            <a:pPr>
+              <a:defRPr sz="1700" b="1">
+                <a:solidFill>
+                  <a:srgbClr val="FF2D55"/>
+                </a:solidFill>
+                <a:latin typeface="Segoe UI"/>
+              </a:defRPr>
+            </a:pPr>
+            <a:r>
+              <a:t>Autonomous Operations Platform for College Clubs &amp; Campus Events</a:t>
             </a:r>
           </a:p>
           <a:p>
@@ -3267,115 +3316,39 @@
               <a:spcBef>
                 <a:spcPts val="600"/>
               </a:spcBef>
-            </a:pPr>
-            <a:r>
-              <a:rPr b="1" sz="1200">
-                <a:solidFill>
-                  <a:srgbClr val="FFFFFF"/>
-                </a:solidFill>
-              </a:rPr>
-              <a:t>• Team Name: </a:t>
-            </a:r>
-            <a:r>
-              <a:rPr sz="1200">
+              <a:defRPr sz="1200">
                 <a:solidFill>
                   <a:srgbClr val="9CA3AF"/>
                 </a:solidFill>
-              </a:rPr>
-              <a:t>Team Innovators (ClubOps Core)</a:t>
-            </a:r>
-          </a:p>
-          <a:p>
-            <a:pPr>
-              <a:spcBef>
-                <a:spcPts val="600"/>
-              </a:spcBef>
-            </a:pPr>
-            <a:r>
-              <a:rPr b="1" sz="1200">
-                <a:solidFill>
-                  <a:srgbClr val="FFFFFF"/>
-                </a:solidFill>
-              </a:rPr>
-              <a:t>• Team Leader: </a:t>
-            </a:r>
-            <a:r>
-              <a:rPr sz="1200">
-                <a:solidFill>
-                  <a:srgbClr val="9CA3AF"/>
-                </a:solidFill>
-              </a:rPr>
-              <a:t>Krish Patel (Lead Architect &amp; AI Systems)</a:t>
-            </a:r>
-          </a:p>
-          <a:p>
-            <a:pPr>
-              <a:spcBef>
-                <a:spcPts val="600"/>
-              </a:spcBef>
-            </a:pPr>
-            <a:r>
-              <a:rPr b="1" sz="1200">
-                <a:solidFill>
-                  <a:srgbClr val="FFFFFF"/>
-                </a:solidFill>
-              </a:rPr>
-              <a:t>• Members: </a:t>
-            </a:r>
-            <a:r>
-              <a:rPr sz="1200">
-                <a:solidFill>
-                  <a:srgbClr val="9CA3AF"/>
-                </a:solidFill>
-              </a:rPr>
-              <a:t>Full-Stack Engineers &amp; AI Researchers</a:t>
-            </a:r>
-          </a:p>
-          <a:p>
-            <a:pPr>
-              <a:spcBef>
-                <a:spcPts val="600"/>
-              </a:spcBef>
-            </a:pPr>
-            <a:r>
-              <a:rPr b="1" sz="1200">
-                <a:solidFill>
-                  <a:srgbClr val="FFFFFF"/>
-                </a:solidFill>
-              </a:rPr>
-              <a:t>• Institution: </a:t>
-            </a:r>
-            <a:r>
-              <a:rPr sz="1200">
-                <a:solidFill>
-                  <a:srgbClr val="9CA3AF"/>
-                </a:solidFill>
-              </a:rPr>
-              <a:t>Leading Engineering Institution, Gujarat</a:t>
-            </a:r>
-          </a:p>
-        </p:txBody>
-      </p:sp>
-      <p:sp>
-        <p:nvSpPr>
-          <p:cNvPr id="5" name="Rounded Rectangle 4"/>
+                <a:latin typeface="Segoe UI"/>
+              </a:defRPr>
+            </a:pPr>
+            <a:r>
+              <a:t>Problem Statement: AI-Powered Autonomous Club &amp; Event Operations Platform (Team Leader: Krish Panchal)</a:t>
+            </a:r>
+          </a:p>
+        </p:txBody>
+      </p:sp>
+      <p:sp>
+        <p:nvSpPr>
+          <p:cNvPr id="7" name="Rectangle 6"/>
           <p:cNvSpPr/>
           <p:nvPr/>
         </p:nvSpPr>
         <p:spPr>
           <a:xfrm>
-            <a:off x="6217920" y="3931920"/>
-            <a:ext cx="5212080" cy="2286000"/>
-          </a:xfrm>
-          <a:prstGeom prst="roundRect">
+            <a:off x="1188720" y="4343400"/>
+            <a:ext cx="2331720" cy="1325880"/>
+          </a:xfrm>
+          <a:prstGeom prst="rect">
             <a:avLst/>
           </a:prstGeom>
           <a:solidFill>
-            <a:srgbClr val="161B2C"/>
+            <a:srgbClr val="0B0C10"/>
           </a:solidFill>
-          <a:ln w="19050">
+          <a:ln w="15240">
             <a:solidFill>
-              <a:srgbClr val="2D3748"/>
+              <a:srgbClr val="2A2E3A"/>
             </a:solidFill>
           </a:ln>
         </p:spPr>
@@ -3394,110 +3367,452 @@
           </a:fontRef>
         </p:style>
         <p:txBody>
-          <a:bodyPr rtlCol="0" anchor="ctr" wrap="square" lIns="228600" tIns="182880" rIns="228600"/>
-          <a:lstStyle/>
-          <a:p>
-            <a:pPr algn="ctr">
+          <a:bodyPr rtlCol="0" anchor="ctr"/>
+          <a:lstStyle/>
+          <a:p>
+            <a:pPr algn="ctr"/>
+          </a:p>
+        </p:txBody>
+      </p:sp>
+      <p:sp>
+        <p:nvSpPr>
+          <p:cNvPr id="8" name="TextBox 7"/>
+          <p:cNvSpPr txBox="1"/>
+          <p:nvPr/>
+        </p:nvSpPr>
+        <p:spPr>
+          <a:xfrm>
+            <a:off x="1325880" y="4434840"/>
+            <a:ext cx="2057400" cy="1143000"/>
+          </a:xfrm>
+          <a:prstGeom prst="rect">
+            <a:avLst/>
+          </a:prstGeom>
+          <a:noFill/>
+        </p:spPr>
+        <p:txBody>
+          <a:bodyPr wrap="none" lIns="0" tIns="0" rIns="0" bIns="0">
+            <a:spAutoFit/>
+          </a:bodyPr>
+          <a:lstStyle/>
+          <a:p>
+            <a:pPr>
+              <a:defRPr sz="900" b="1">
+                <a:solidFill>
+                  <a:srgbClr val="FF2D55"/>
+                </a:solidFill>
+                <a:latin typeface="Segoe UI"/>
+              </a:defRPr>
+            </a:pPr>
+            <a:r>
+              <a:t>FRONTEND LEAD</a:t>
+            </a:r>
+          </a:p>
+          <a:p>
+            <a:pPr>
+              <a:spcBef>
+                <a:spcPts val="200"/>
+              </a:spcBef>
               <a:defRPr sz="1300" b="1">
                 <a:solidFill>
-                  <a:srgbClr val="3B82F6"/>
-                </a:solidFill>
-              </a:defRPr>
-            </a:pPr>
-            <a:r>
-              <a:t>PROJECT SCOPE</a:t>
+                  <a:srgbClr val="FFFFFF"/>
+                </a:solidFill>
+                <a:latin typeface="Segoe UI"/>
+              </a:defRPr>
+            </a:pPr>
+            <a:r>
+              <a:t>Krish J. Panchal</a:t>
             </a:r>
           </a:p>
           <a:p>
             <a:pPr>
               <a:spcBef>
-                <a:spcPts val="600"/>
+                <a:spcPts val="400"/>
               </a:spcBef>
-            </a:pPr>
-            <a:r>
-              <a:rPr b="1" sz="1200">
+              <a:defRPr sz="950">
+                <a:solidFill>
+                  <a:srgbClr val="9CA3AF"/>
+                </a:solidFill>
+                <a:latin typeface="Segoe UI"/>
+              </a:defRPr>
+            </a:pPr>
+            <a:r>
+              <a:t>React 19, Vite, Neo-Brutalist UI</a:t>
+            </a:r>
+          </a:p>
+        </p:txBody>
+      </p:sp>
+      <p:sp>
+        <p:nvSpPr>
+          <p:cNvPr id="9" name="Rectangle 8"/>
+          <p:cNvSpPr/>
+          <p:nvPr/>
+        </p:nvSpPr>
+        <p:spPr>
+          <a:xfrm>
+            <a:off x="3657600" y="4343400"/>
+            <a:ext cx="2331720" cy="1325880"/>
+          </a:xfrm>
+          <a:prstGeom prst="rect">
+            <a:avLst/>
+          </a:prstGeom>
+          <a:solidFill>
+            <a:srgbClr val="0B0C10"/>
+          </a:solidFill>
+          <a:ln w="15240">
+            <a:solidFill>
+              <a:srgbClr val="2A2E3A"/>
+            </a:solidFill>
+          </a:ln>
+        </p:spPr>
+        <p:style>
+          <a:lnRef idx="1">
+            <a:schemeClr val="accent1"/>
+          </a:lnRef>
+          <a:fillRef idx="3">
+            <a:schemeClr val="accent1"/>
+          </a:fillRef>
+          <a:effectRef idx="2">
+            <a:schemeClr val="accent1"/>
+          </a:effectRef>
+          <a:fontRef idx="minor">
+            <a:schemeClr val="lt1"/>
+          </a:fontRef>
+        </p:style>
+        <p:txBody>
+          <a:bodyPr rtlCol="0" anchor="ctr"/>
+          <a:lstStyle/>
+          <a:p>
+            <a:pPr algn="ctr"/>
+          </a:p>
+        </p:txBody>
+      </p:sp>
+      <p:sp>
+        <p:nvSpPr>
+          <p:cNvPr id="10" name="TextBox 9"/>
+          <p:cNvSpPr txBox="1"/>
+          <p:nvPr/>
+        </p:nvSpPr>
+        <p:spPr>
+          <a:xfrm>
+            <a:off x="3794760" y="4434840"/>
+            <a:ext cx="2057400" cy="1143000"/>
+          </a:xfrm>
+          <a:prstGeom prst="rect">
+            <a:avLst/>
+          </a:prstGeom>
+          <a:noFill/>
+        </p:spPr>
+        <p:txBody>
+          <a:bodyPr wrap="none" lIns="0" tIns="0" rIns="0" bIns="0">
+            <a:spAutoFit/>
+          </a:bodyPr>
+          <a:lstStyle/>
+          <a:p>
+            <a:pPr>
+              <a:defRPr sz="900" b="1">
+                <a:solidFill>
+                  <a:srgbClr val="FF2D55"/>
+                </a:solidFill>
+                <a:latin typeface="Segoe UI"/>
+              </a:defRPr>
+            </a:pPr>
+            <a:r>
+              <a:t>BACKEND LEAD</a:t>
+            </a:r>
+          </a:p>
+          <a:p>
+            <a:pPr>
+              <a:spcBef>
+                <a:spcPts val="200"/>
+              </a:spcBef>
+              <a:defRPr sz="1300" b="1">
                 <a:solidFill>
                   <a:srgbClr val="FFFFFF"/>
                 </a:solidFill>
-              </a:rPr>
-              <a:t>• Project Title: </a:t>
-            </a:r>
-            <a:r>
-              <a:rPr sz="1200">
+                <a:latin typeface="Segoe UI"/>
+              </a:defRPr>
+            </a:pPr>
+            <a:r>
+              <a:t>Krish M. Patel</a:t>
+            </a:r>
+          </a:p>
+          <a:p>
+            <a:pPr>
+              <a:spcBef>
+                <a:spcPts val="400"/>
+              </a:spcBef>
+              <a:defRPr sz="950">
                 <a:solidFill>
                   <a:srgbClr val="9CA3AF"/>
                 </a:solidFill>
-              </a:rPr>
-              <a:t>ClubOps-AI</a:t>
+                <a:latin typeface="Segoe UI"/>
+              </a:defRPr>
+            </a:pPr>
+            <a:r>
+              <a:t>Express 5, MongoDB, JWT Auth</a:t>
+            </a:r>
+          </a:p>
+        </p:txBody>
+      </p:sp>
+      <p:sp>
+        <p:nvSpPr>
+          <p:cNvPr id="11" name="Rectangle 10"/>
+          <p:cNvSpPr/>
+          <p:nvPr/>
+        </p:nvSpPr>
+        <p:spPr>
+          <a:xfrm>
+            <a:off x="6126480" y="4343400"/>
+            <a:ext cx="2331720" cy="1325880"/>
+          </a:xfrm>
+          <a:prstGeom prst="rect">
+            <a:avLst/>
+          </a:prstGeom>
+          <a:solidFill>
+            <a:srgbClr val="0B0C10"/>
+          </a:solidFill>
+          <a:ln w="15240">
+            <a:solidFill>
+              <a:srgbClr val="2A2E3A"/>
+            </a:solidFill>
+          </a:ln>
+        </p:spPr>
+        <p:style>
+          <a:lnRef idx="1">
+            <a:schemeClr val="accent1"/>
+          </a:lnRef>
+          <a:fillRef idx="3">
+            <a:schemeClr val="accent1"/>
+          </a:fillRef>
+          <a:effectRef idx="2">
+            <a:schemeClr val="accent1"/>
+          </a:effectRef>
+          <a:fontRef idx="minor">
+            <a:schemeClr val="lt1"/>
+          </a:fontRef>
+        </p:style>
+        <p:txBody>
+          <a:bodyPr rtlCol="0" anchor="ctr"/>
+          <a:lstStyle/>
+          <a:p>
+            <a:pPr algn="ctr"/>
+          </a:p>
+        </p:txBody>
+      </p:sp>
+      <p:sp>
+        <p:nvSpPr>
+          <p:cNvPr id="12" name="TextBox 11"/>
+          <p:cNvSpPr txBox="1"/>
+          <p:nvPr/>
+        </p:nvSpPr>
+        <p:spPr>
+          <a:xfrm>
+            <a:off x="6263640" y="4434840"/>
+            <a:ext cx="2057400" cy="1143000"/>
+          </a:xfrm>
+          <a:prstGeom prst="rect">
+            <a:avLst/>
+          </a:prstGeom>
+          <a:noFill/>
+        </p:spPr>
+        <p:txBody>
+          <a:bodyPr wrap="none" lIns="0" tIns="0" rIns="0" bIns="0">
+            <a:spAutoFit/>
+          </a:bodyPr>
+          <a:lstStyle/>
+          <a:p>
+            <a:pPr>
+              <a:defRPr sz="900" b="1">
+                <a:solidFill>
+                  <a:srgbClr val="FF2D55"/>
+                </a:solidFill>
+                <a:latin typeface="Segoe UI"/>
+              </a:defRPr>
+            </a:pPr>
+            <a:r>
+              <a:t>RAG SPECIALIST</a:t>
             </a:r>
           </a:p>
           <a:p>
             <a:pPr>
               <a:spcBef>
-                <a:spcPts val="600"/>
+                <a:spcPts val="200"/>
               </a:spcBef>
-            </a:pPr>
-            <a:r>
-              <a:rPr b="1" sz="1200">
+              <a:defRPr sz="1300" b="1">
                 <a:solidFill>
                   <a:srgbClr val="FFFFFF"/>
                 </a:solidFill>
-              </a:rPr>
-              <a:t>• Problem Statement: </a:t>
-            </a:r>
-            <a:r>
-              <a:rPr sz="1200">
+                <a:latin typeface="Segoe UI"/>
+              </a:defRPr>
+            </a:pPr>
+            <a:r>
+              <a:t>Krish K. Patel</a:t>
+            </a:r>
+          </a:p>
+          <a:p>
+            <a:pPr>
+              <a:spcBef>
+                <a:spcPts val="400"/>
+              </a:spcBef>
+              <a:defRPr sz="950">
                 <a:solidFill>
                   <a:srgbClr val="9CA3AF"/>
                 </a:solidFill>
-              </a:rPr>
-              <a:t>AI-Powered Autonomous Event &amp; Club Management Platform</a:t>
+                <a:latin typeface="Segoe UI"/>
+              </a:defRPr>
+            </a:pPr>
+            <a:r>
+              <a:t>Document Chunker, Cosine Similarity</a:t>
+            </a:r>
+          </a:p>
+        </p:txBody>
+      </p:sp>
+      <p:sp>
+        <p:nvSpPr>
+          <p:cNvPr id="13" name="Rectangle 12"/>
+          <p:cNvSpPr/>
+          <p:nvPr/>
+        </p:nvSpPr>
+        <p:spPr>
+          <a:xfrm>
+            <a:off x="8595360" y="4343400"/>
+            <a:ext cx="2331720" cy="1325880"/>
+          </a:xfrm>
+          <a:prstGeom prst="rect">
+            <a:avLst/>
+          </a:prstGeom>
+          <a:solidFill>
+            <a:srgbClr val="0B0C10"/>
+          </a:solidFill>
+          <a:ln w="15240">
+            <a:solidFill>
+              <a:srgbClr val="2A2E3A"/>
+            </a:solidFill>
+          </a:ln>
+        </p:spPr>
+        <p:style>
+          <a:lnRef idx="1">
+            <a:schemeClr val="accent1"/>
+          </a:lnRef>
+          <a:fillRef idx="3">
+            <a:schemeClr val="accent1"/>
+          </a:fillRef>
+          <a:effectRef idx="2">
+            <a:schemeClr val="accent1"/>
+          </a:effectRef>
+          <a:fontRef idx="minor">
+            <a:schemeClr val="lt1"/>
+          </a:fontRef>
+        </p:style>
+        <p:txBody>
+          <a:bodyPr rtlCol="0" anchor="ctr"/>
+          <a:lstStyle/>
+          <a:p>
+            <a:pPr algn="ctr"/>
+          </a:p>
+        </p:txBody>
+      </p:sp>
+      <p:sp>
+        <p:nvSpPr>
+          <p:cNvPr id="14" name="TextBox 13"/>
+          <p:cNvSpPr txBox="1"/>
+          <p:nvPr/>
+        </p:nvSpPr>
+        <p:spPr>
+          <a:xfrm>
+            <a:off x="8732520" y="4434840"/>
+            <a:ext cx="2057400" cy="1143000"/>
+          </a:xfrm>
+          <a:prstGeom prst="rect">
+            <a:avLst/>
+          </a:prstGeom>
+          <a:noFill/>
+        </p:spPr>
+        <p:txBody>
+          <a:bodyPr wrap="none" lIns="0" tIns="0" rIns="0" bIns="0">
+            <a:spAutoFit/>
+          </a:bodyPr>
+          <a:lstStyle/>
+          <a:p>
+            <a:pPr>
+              <a:defRPr sz="900" b="1">
+                <a:solidFill>
+                  <a:srgbClr val="FF2D55"/>
+                </a:solidFill>
+                <a:latin typeface="Segoe UI"/>
+              </a:defRPr>
+            </a:pPr>
+            <a:r>
+              <a:t>AI AUTOMATION LEAD</a:t>
             </a:r>
           </a:p>
           <a:p>
             <a:pPr>
               <a:spcBef>
-                <a:spcPts val="600"/>
+                <a:spcPts val="200"/>
               </a:spcBef>
-            </a:pPr>
-            <a:r>
-              <a:rPr b="1" sz="1200">
+              <a:defRPr sz="1300" b="1">
                 <a:solidFill>
                   <a:srgbClr val="FFFFFF"/>
                 </a:solidFill>
-              </a:rPr>
-              <a:t>• Core Deliverables: </a:t>
-            </a:r>
-            <a:r>
-              <a:rPr sz="1200">
+                <a:latin typeface="Segoe UI"/>
+              </a:defRPr>
+            </a:pPr>
+            <a:r>
+              <a:t>Dhruv Patel</a:t>
+            </a:r>
+          </a:p>
+          <a:p>
+            <a:pPr>
+              <a:spcBef>
+                <a:spcPts val="400"/>
+              </a:spcBef>
+              <a:defRPr sz="950">
                 <a:solidFill>
                   <a:srgbClr val="9CA3AF"/>
                 </a:solidFill>
-              </a:rPr>
-              <a:t>9 of 9 Complete &amp; Verified Live</a:t>
-            </a:r>
-          </a:p>
-          <a:p>
-            <a:pPr>
-              <a:spcBef>
-                <a:spcPts val="600"/>
-              </a:spcBef>
-            </a:pPr>
-            <a:r>
-              <a:rPr b="1" sz="1200">
-                <a:solidFill>
-                  <a:srgbClr val="FFFFFF"/>
-                </a:solidFill>
-              </a:rPr>
-              <a:t>• Technology Base: </a:t>
-            </a:r>
-            <a:r>
-              <a:rPr sz="1200">
-                <a:solidFill>
-                  <a:srgbClr val="9CA3AF"/>
-                </a:solidFill>
-              </a:rPr>
-              <a:t>Node.js • Express 5 • React 19 • Gemini • MongoDB RAG</a:t>
+                <a:latin typeface="Segoe UI"/>
+              </a:defRPr>
+            </a:pPr>
+            <a:r>
+              <a:t>Gemini Agent &amp; Task Auto-Allocation</a:t>
+            </a:r>
+          </a:p>
+        </p:txBody>
+      </p:sp>
+      <p:sp>
+        <p:nvSpPr>
+          <p:cNvPr id="15" name="TextBox 14"/>
+          <p:cNvSpPr txBox="1"/>
+          <p:nvPr/>
+        </p:nvSpPr>
+        <p:spPr>
+          <a:xfrm>
+            <a:off x="731520" y="6473952"/>
+            <a:ext cx="10698480" cy="274320"/>
+          </a:xfrm>
+          <a:prstGeom prst="rect">
+            <a:avLst/>
+          </a:prstGeom>
+          <a:noFill/>
+        </p:spPr>
+        <p:txBody>
+          <a:bodyPr wrap="none" lIns="0" tIns="0" rIns="0" bIns="0">
+            <a:spAutoFit/>
+          </a:bodyPr>
+          <a:lstStyle/>
+          <a:p>
+            <a:pPr>
+              <a:defRPr sz="900">
+                <a:solidFill>
+                  <a:srgbClr val="6E7382"/>
+                </a:solidFill>
+                <a:latin typeface="Segoe UI"/>
+              </a:defRPr>
+            </a:pPr>
+            <a:r>
+              <a:t>ClubOps AI  •  Bit N Build 2026 Hackathon  •  Slide 1 of 12</a:t>
             </a:r>
           </a:p>
         </p:txBody>
@@ -3516,7 +3831,7 @@
     <p:bg>
       <p:bgPr>
         <a:solidFill>
-          <a:srgbClr val="0B0F19"/>
+          <a:srgbClr val="0B0C10"/>
         </a:solidFill>
         <a:effectLst/>
       </p:bgPr>
@@ -3536,8 +3851,8 @@
         </p:nvSpPr>
         <p:spPr>
           <a:xfrm>
-            <a:off x="731520" y="365760"/>
-            <a:ext cx="10698480" cy="1005840"/>
+            <a:off x="731520" y="320040"/>
+            <a:ext cx="411480" cy="320040"/>
           </a:xfrm>
           <a:prstGeom prst="rect">
             <a:avLst/>
@@ -3545,7 +3860,7 @@
           <a:noFill/>
         </p:spPr>
         <p:txBody>
-          <a:bodyPr wrap="square" lIns="0" tIns="0" rIns="0" bIns="0">
+          <a:bodyPr wrap="none" lIns="0" tIns="0" rIns="0" bIns="0">
             <a:spAutoFit/>
           </a:bodyPr>
           <a:lstStyle/>
@@ -3553,51 +3868,145 @@
             <a:pPr>
               <a:defRPr sz="1100" b="1">
                 <a:solidFill>
-                  <a:srgbClr val="06B6D4"/>
-                </a:solidFill>
-              </a:defRPr>
-            </a:pPr>
-            <a:r>
-              <a:t>SECTION 07 / IMPACT &amp; FUTURE SCOPE</a:t>
-            </a:r>
-          </a:p>
-          <a:p>
-            <a:pPr>
-              <a:spcBef>
-                <a:spcPts val="400"/>
-              </a:spcBef>
-              <a:defRPr sz="2400" b="1">
+                  <a:srgbClr val="FF2D55"/>
+                </a:solidFill>
+                <a:latin typeface="Segoe UI"/>
+              </a:defRPr>
+            </a:pPr>
+            <a:r>
+              <a:t>[C]</a:t>
+            </a:r>
+          </a:p>
+        </p:txBody>
+      </p:sp>
+      <p:sp>
+        <p:nvSpPr>
+          <p:cNvPr id="3" name="TextBox 2"/>
+          <p:cNvSpPr txBox="1"/>
+          <p:nvPr/>
+        </p:nvSpPr>
+        <p:spPr>
+          <a:xfrm>
+            <a:off x="1188720" y="320040"/>
+            <a:ext cx="10241280" cy="320040"/>
+          </a:xfrm>
+          <a:prstGeom prst="rect">
+            <a:avLst/>
+          </a:prstGeom>
+          <a:noFill/>
+        </p:spPr>
+        <p:txBody>
+          <a:bodyPr wrap="none" lIns="0" tIns="0" rIns="0" bIns="0">
+            <a:spAutoFit/>
+          </a:bodyPr>
+          <a:lstStyle/>
+          <a:p>
+            <a:pPr>
+              <a:defRPr sz="950" b="1">
+                <a:solidFill>
+                  <a:srgbClr val="9CA3AF"/>
+                </a:solidFill>
+                <a:latin typeface="Segoe UI"/>
+              </a:defRPr>
+            </a:pPr>
+            <a:r>
+              <a:t>CLUBOPS  •  BIT N BUILD 2026  •  THE TEAM</a:t>
+            </a:r>
+          </a:p>
+        </p:txBody>
+      </p:sp>
+      <p:sp>
+        <p:nvSpPr>
+          <p:cNvPr id="4" name="TextBox 3"/>
+          <p:cNvSpPr txBox="1"/>
+          <p:nvPr/>
+        </p:nvSpPr>
+        <p:spPr>
+          <a:xfrm>
+            <a:off x="731520" y="621792"/>
+            <a:ext cx="10698480" cy="594360"/>
+          </a:xfrm>
+          <a:prstGeom prst="rect">
+            <a:avLst/>
+          </a:prstGeom>
+          <a:noFill/>
+        </p:spPr>
+        <p:txBody>
+          <a:bodyPr wrap="none" lIns="0" tIns="0" rIns="0" bIns="0">
+            <a:spAutoFit/>
+          </a:bodyPr>
+          <a:lstStyle/>
+          <a:p>
+            <a:pPr>
+              <a:defRPr sz="2100" b="1">
                 <a:solidFill>
                   <a:srgbClr val="FFFFFF"/>
                 </a:solidFill>
-              </a:defRPr>
-            </a:pPr>
-            <a:r>
-              <a:t>Real-World Value Proposition &amp; Strategic Roadmap</a:t>
-            </a:r>
-          </a:p>
-        </p:txBody>
-      </p:sp>
-      <p:sp>
-        <p:nvSpPr>
-          <p:cNvPr id="3" name="Rounded Rectangle 2"/>
+                <a:latin typeface="Segoe UI"/>
+              </a:defRPr>
+            </a:pPr>
+            <a:r>
+              <a:t>The Engineering Team Behind ClubOps AI</a:t>
+            </a:r>
+          </a:p>
+        </p:txBody>
+      </p:sp>
+      <p:sp>
+        <p:nvSpPr>
+          <p:cNvPr id="5" name="TextBox 4"/>
+          <p:cNvSpPr txBox="1"/>
+          <p:nvPr/>
+        </p:nvSpPr>
+        <p:spPr>
+          <a:xfrm>
+            <a:off x="731520" y="1188720"/>
+            <a:ext cx="10698480" cy="320040"/>
+          </a:xfrm>
+          <a:prstGeom prst="rect">
+            <a:avLst/>
+          </a:prstGeom>
+          <a:noFill/>
+        </p:spPr>
+        <p:txBody>
+          <a:bodyPr wrap="none" lIns="0" tIns="0" rIns="0" bIns="0">
+            <a:spAutoFit/>
+          </a:bodyPr>
+          <a:lstStyle/>
+          <a:p>
+            <a:pPr>
+              <a:defRPr sz="1150">
+                <a:solidFill>
+                  <a:srgbClr val="9CA3AF"/>
+                </a:solidFill>
+                <a:latin typeface="Segoe UI"/>
+              </a:defRPr>
+            </a:pPr>
+            <a:r>
+              <a:t>Bit N Build 2026 Hackathon  •  Individual technical contributions and architectural ownership.</a:t>
+            </a:r>
+          </a:p>
+        </p:txBody>
+      </p:sp>
+      <p:sp>
+        <p:nvSpPr>
+          <p:cNvPr id="6" name="Rectangle 5"/>
           <p:cNvSpPr/>
           <p:nvPr/>
         </p:nvSpPr>
         <p:spPr>
           <a:xfrm>
-            <a:off x="731520" y="1645920"/>
-            <a:ext cx="5120640" cy="4663440"/>
-          </a:xfrm>
-          <a:prstGeom prst="roundRect">
+            <a:off x="731520" y="1691640"/>
+            <a:ext cx="2487168" cy="4480560"/>
+          </a:xfrm>
+          <a:prstGeom prst="rect">
             <a:avLst/>
           </a:prstGeom>
           <a:solidFill>
-            <a:srgbClr val="161B2C"/>
+            <a:srgbClr val="14161D"/>
           </a:solidFill>
           <a:ln w="19050">
             <a:solidFill>
-              <a:srgbClr val="2D3748"/>
+              <a:srgbClr val="2A2E3A"/>
             </a:solidFill>
           </a:ln>
         </p:spPr>
@@ -3616,138 +4025,157 @@
           </a:fontRef>
         </p:style>
         <p:txBody>
-          <a:bodyPr rtlCol="0" anchor="ctr" wrap="square" lIns="228600" tIns="182880" rIns="228600"/>
-          <a:lstStyle/>
-          <a:p>
-            <a:pPr algn="ctr">
-              <a:defRPr sz="1300" b="1">
-                <a:solidFill>
-                  <a:srgbClr val="3B82F6"/>
-                </a:solidFill>
-              </a:defRPr>
-            </a:pPr>
-            <a:r>
-              <a:t>REAL-WORLD IMPACT &amp; RESULTS</a:t>
+          <a:bodyPr rtlCol="0" anchor="ctr"/>
+          <a:lstStyle/>
+          <a:p>
+            <a:pPr algn="ctr"/>
+          </a:p>
+        </p:txBody>
+      </p:sp>
+      <p:sp>
+        <p:nvSpPr>
+          <p:cNvPr id="7" name="TextBox 6"/>
+          <p:cNvSpPr txBox="1"/>
+          <p:nvPr/>
+        </p:nvSpPr>
+        <p:spPr>
+          <a:xfrm>
+            <a:off x="914400" y="1874519"/>
+            <a:ext cx="2121408" cy="4069080"/>
+          </a:xfrm>
+          <a:prstGeom prst="rect">
+            <a:avLst/>
+          </a:prstGeom>
+          <a:noFill/>
+        </p:spPr>
+        <p:txBody>
+          <a:bodyPr wrap="none" lIns="0" tIns="0" rIns="0" bIns="0">
+            <a:spAutoFit/>
+          </a:bodyPr>
+          <a:lstStyle/>
+          <a:p>
+            <a:pPr>
+              <a:defRPr sz="950" b="1">
+                <a:solidFill>
+                  <a:srgbClr val="FF2D55"/>
+                </a:solidFill>
+                <a:latin typeface="Segoe UI"/>
+              </a:defRPr>
+            </a:pPr>
+            <a:r>
+              <a:t>BACKEND LEAD</a:t>
             </a:r>
           </a:p>
           <a:p>
             <a:pPr>
               <a:spcBef>
-                <a:spcPts val="1000"/>
+                <a:spcPts val="200"/>
               </a:spcBef>
-            </a:pPr>
-            <a:r>
-              <a:rPr b="1" sz="1150">
-                <a:solidFill>
-                  <a:srgbClr val="10B981"/>
-                </a:solidFill>
-              </a:rPr>
-              <a:t>🌟 15+ Hours Saved Weekly
+              <a:defRPr sz="1500" b="1">
+                <a:solidFill>
+                  <a:srgbClr val="FFFFFF"/>
+                </a:solidFill>
+                <a:latin typeface="Segoe UI"/>
+              </a:defRPr>
+            </a:pPr>
+            <a:r>
+              <a:t>Krish M. Patel</a:t>
+            </a:r>
+          </a:p>
+          <a:p>
+            <a:pPr>
+              <a:spcBef>
+                <a:spcPts val="1200"/>
+              </a:spcBef>
+            </a:pPr>
+            <a:r>
+              <a:rPr b="1" sz="1050">
+                <a:solidFill>
+                  <a:srgbClr val="06B6D4"/>
+                </a:solidFill>
+              </a:rPr>
+              <a:t>• REST API Architecture
 </a:t>
             </a:r>
             <a:r>
-              <a:rPr sz="1050">
+              <a:rPr sz="950">
                 <a:solidFill>
                   <a:srgbClr val="9CA3AF"/>
                 </a:solidFill>
               </a:rPr>
-              <a:t>Eliminates manual task delegation and meeting transcript note synthesis for event organizers.</a:t>
+              <a:t>Engineered 11 Express controllers managing clubs, events, tasks, risks, meetings, and notifications.</a:t>
             </a:r>
           </a:p>
           <a:p>
             <a:pPr>
               <a:spcBef>
-                <a:spcPts val="1000"/>
+                <a:spcPts val="1200"/>
               </a:spcBef>
             </a:pPr>
             <a:r>
-              <a:rPr b="1" sz="1150">
-                <a:solidFill>
-                  <a:srgbClr val="10B981"/>
-                </a:solidFill>
-              </a:rPr>
-              <a:t>🌟 Zero Task Slippage
+              <a:rPr b="1" sz="1050">
+                <a:solidFill>
+                  <a:srgbClr val="06B6D4"/>
+                </a:solidFill>
+              </a:rPr>
+              <a:t>• Security &amp; Auth
 </a:t>
             </a:r>
             <a:r>
-              <a:rPr sz="1050">
+              <a:rPr sz="950">
                 <a:solidFill>
                   <a:srgbClr val="9CA3AF"/>
                 </a:solidFill>
               </a:rPr>
-              <a:t>Automated priority tagging and volunteer workload balancing guarantees every critical item has an active owner.</a:t>
+              <a:t>Implemented BCrypt password hashing and signed JWT authentication middleware.</a:t>
             </a:r>
           </a:p>
           <a:p>
             <a:pPr>
               <a:spcBef>
-                <a:spcPts val="1000"/>
+                <a:spcPts val="1200"/>
               </a:spcBef>
             </a:pPr>
             <a:r>
-              <a:rPr b="1" sz="1150">
-                <a:solidFill>
-                  <a:srgbClr val="10B981"/>
-                </a:solidFill>
-              </a:rPr>
-              <a:t>🌟 Single Source of Truth
+              <a:rPr b="1" sz="1050">
+                <a:solidFill>
+                  <a:srgbClr val="06B6D4"/>
+                </a:solidFill>
+              </a:rPr>
+              <a:t>• Data Modeling
 </a:t>
             </a:r>
             <a:r>
-              <a:rPr sz="1050">
+              <a:rPr sz="950">
                 <a:solidFill>
                   <a:srgbClr val="9CA3AF"/>
                 </a:solidFill>
               </a:rPr>
-              <a:t>Consolidates tasks, volunteers, risks, documents, and notifications into one auditable database.</a:t>
-            </a:r>
-          </a:p>
-          <a:p>
-            <a:pPr>
-              <a:spcBef>
-                <a:spcPts val="1000"/>
-              </a:spcBef>
-            </a:pPr>
-            <a:r>
-              <a:rPr b="1" sz="1150">
-                <a:solidFill>
-                  <a:srgbClr val="10B981"/>
-                </a:solidFill>
-              </a:rPr>
-              <a:t>🌟 Campus &amp; Industry Ready
-</a:t>
-            </a:r>
-            <a:r>
-              <a:rPr sz="1050">
-                <a:solidFill>
-                  <a:srgbClr val="9CA3AF"/>
-                </a:solidFill>
-              </a:rPr>
-              <a:t>Engineered to scale effortlessly for college clubs, 36-hour hackathons, and multi-day tech symposiums.</a:t>
-            </a:r>
-          </a:p>
-        </p:txBody>
-      </p:sp>
-      <p:sp>
-        <p:nvSpPr>
-          <p:cNvPr id="4" name="Rounded Rectangle 3"/>
+              <a:t>Designed 11 relational Mongoose schemas with indexed tenant scoping (clubId, eventId).</a:t>
+            </a:r>
+          </a:p>
+        </p:txBody>
+      </p:sp>
+      <p:sp>
+        <p:nvSpPr>
+          <p:cNvPr id="8" name="Rectangle 7"/>
           <p:cNvSpPr/>
           <p:nvPr/>
         </p:nvSpPr>
         <p:spPr>
           <a:xfrm>
-            <a:off x="6217920" y="1645920"/>
-            <a:ext cx="5212080" cy="4663440"/>
-          </a:xfrm>
-          <a:prstGeom prst="roundRect">
+            <a:off x="3447288" y="1691640"/>
+            <a:ext cx="2487168" cy="4480560"/>
+          </a:xfrm>
+          <a:prstGeom prst="rect">
             <a:avLst/>
           </a:prstGeom>
           <a:solidFill>
-            <a:srgbClr val="161B2C"/>
+            <a:srgbClr val="14161D"/>
           </a:solidFill>
           <a:ln w="19050">
             <a:solidFill>
-              <a:srgbClr val="2D3748"/>
+              <a:srgbClr val="2A2E3A"/>
             </a:solidFill>
           </a:ln>
         </p:spPr>
@@ -3766,114 +4194,507 @@
           </a:fontRef>
         </p:style>
         <p:txBody>
-          <a:bodyPr rtlCol="0" anchor="ctr" wrap="square" lIns="228600" tIns="182880" rIns="228600"/>
-          <a:lstStyle/>
-          <a:p>
-            <a:pPr algn="ctr">
-              <a:defRPr sz="1300" b="1">
-                <a:solidFill>
-                  <a:srgbClr val="3B82F6"/>
-                </a:solidFill>
-              </a:defRPr>
-            </a:pPr>
-            <a:r>
-              <a:t>FUTURE SCOPE &amp; EVOLUTION</a:t>
+          <a:bodyPr rtlCol="0" anchor="ctr"/>
+          <a:lstStyle/>
+          <a:p>
+            <a:pPr algn="ctr"/>
+          </a:p>
+        </p:txBody>
+      </p:sp>
+      <p:sp>
+        <p:nvSpPr>
+          <p:cNvPr id="9" name="TextBox 8"/>
+          <p:cNvSpPr txBox="1"/>
+          <p:nvPr/>
+        </p:nvSpPr>
+        <p:spPr>
+          <a:xfrm>
+            <a:off x="3630168" y="1874519"/>
+            <a:ext cx="2121408" cy="4069080"/>
+          </a:xfrm>
+          <a:prstGeom prst="rect">
+            <a:avLst/>
+          </a:prstGeom>
+          <a:noFill/>
+        </p:spPr>
+        <p:txBody>
+          <a:bodyPr wrap="none" lIns="0" tIns="0" rIns="0" bIns="0">
+            <a:spAutoFit/>
+          </a:bodyPr>
+          <a:lstStyle/>
+          <a:p>
+            <a:pPr>
+              <a:defRPr sz="950" b="1">
+                <a:solidFill>
+                  <a:srgbClr val="FF2D55"/>
+                </a:solidFill>
+                <a:latin typeface="Segoe UI"/>
+              </a:defRPr>
+            </a:pPr>
+            <a:r>
+              <a:t>FRONTEND LEAD</a:t>
             </a:r>
           </a:p>
           <a:p>
             <a:pPr>
               <a:spcBef>
-                <a:spcPts val="1000"/>
+                <a:spcPts val="200"/>
               </a:spcBef>
-            </a:pPr>
-            <a:r>
-              <a:rPr b="1" sz="1150">
-                <a:solidFill>
-                  <a:srgbClr val="3B82F6"/>
-                </a:solidFill>
-              </a:rPr>
-              <a:t>🚀 Live Audio Transcription
+              <a:defRPr sz="1500" b="1">
+                <a:solidFill>
+                  <a:srgbClr val="FFFFFF"/>
+                </a:solidFill>
+                <a:latin typeface="Segoe UI"/>
+              </a:defRPr>
+            </a:pPr>
+            <a:r>
+              <a:t>Krish Panchal / Krish J.</a:t>
+            </a:r>
+          </a:p>
+          <a:p>
+            <a:pPr>
+              <a:spcBef>
+                <a:spcPts val="1200"/>
+              </a:spcBef>
+            </a:pPr>
+            <a:r>
+              <a:rPr b="1" sz="1050">
+                <a:solidFill>
+                  <a:srgbClr val="06B6D4"/>
+                </a:solidFill>
+              </a:rPr>
+              <a:t>• React 19 SPA
 </a:t>
             </a:r>
             <a:r>
-              <a:rPr sz="1050">
+              <a:rPr sz="950">
                 <a:solidFill>
                   <a:srgbClr val="9CA3AF"/>
                 </a:solidFill>
               </a:rPr>
-              <a:t>Real-time speech-to-text integration (Whisper AI) for direct in-meeting audio streaming and task extraction.</a:t>
+              <a:t>Architected component hierarchy, client routing with React Router, and modular dashboard layouts.</a:t>
             </a:r>
           </a:p>
           <a:p>
             <a:pPr>
               <a:spcBef>
-                <a:spcPts val="1000"/>
+                <a:spcPts val="1200"/>
               </a:spcBef>
             </a:pPr>
             <a:r>
-              <a:rPr b="1" sz="1150">
-                <a:solidFill>
-                  <a:srgbClr val="3B82F6"/>
-                </a:solidFill>
-              </a:rPr>
-              <a:t>🚀 WhatsApp &amp; Slack Integrations
+              <a:rPr b="1" sz="1050">
+                <a:solidFill>
+                  <a:srgbClr val="06B6D4"/>
+                </a:solidFill>
+              </a:rPr>
+              <a:t>• Brutalist UI/UX
 </a:t>
             </a:r>
             <a:r>
-              <a:rPr sz="1050">
+              <a:rPr sz="950">
                 <a:solidFill>
                   <a:srgbClr val="9CA3AF"/>
                 </a:solidFill>
               </a:rPr>
-              <a:t>Two-way bots allowing volunteers to check task deadlines and confirm completion via messaging apps.</a:t>
+              <a:t>Built the custom Neo-Brutalist design system, status radar, and responsive CSS.</a:t>
             </a:r>
           </a:p>
           <a:p>
             <a:pPr>
               <a:spcBef>
-                <a:spcPts val="1000"/>
+                <a:spcPts val="1200"/>
               </a:spcBef>
             </a:pPr>
             <a:r>
-              <a:rPr b="1" sz="1150">
-                <a:solidFill>
-                  <a:srgbClr val="3B82F6"/>
-                </a:solidFill>
-              </a:rPr>
-              <a:t>🚀 Mobile App (React Native)
+              <a:rPr b="1" sz="1050">
+                <a:solidFill>
+                  <a:srgbClr val="06B6D4"/>
+                </a:solidFill>
+              </a:rPr>
+              <a:t>• Modal Workflows
 </a:t>
             </a:r>
             <a:r>
-              <a:rPr sz="1050">
+              <a:rPr sz="950">
                 <a:solidFill>
                   <a:srgbClr val="9CA3AF"/>
                 </a:solidFill>
               </a:rPr>
-              <a:t>Native iOS/Android companion app with offline task check-in and push notifications.</a:t>
+              <a:t>Developed the AI Event Planner and standard task/meeting creation dialogs.</a:t>
+            </a:r>
+          </a:p>
+        </p:txBody>
+      </p:sp>
+      <p:sp>
+        <p:nvSpPr>
+          <p:cNvPr id="10" name="Rectangle 9"/>
+          <p:cNvSpPr/>
+          <p:nvPr/>
+        </p:nvSpPr>
+        <p:spPr>
+          <a:xfrm>
+            <a:off x="6163056" y="1691640"/>
+            <a:ext cx="2487168" cy="4480560"/>
+          </a:xfrm>
+          <a:prstGeom prst="rect">
+            <a:avLst/>
+          </a:prstGeom>
+          <a:solidFill>
+            <a:srgbClr val="14161D"/>
+          </a:solidFill>
+          <a:ln w="19050">
+            <a:solidFill>
+              <a:srgbClr val="2A2E3A"/>
+            </a:solidFill>
+          </a:ln>
+        </p:spPr>
+        <p:style>
+          <a:lnRef idx="1">
+            <a:schemeClr val="accent1"/>
+          </a:lnRef>
+          <a:fillRef idx="3">
+            <a:schemeClr val="accent1"/>
+          </a:fillRef>
+          <a:effectRef idx="2">
+            <a:schemeClr val="accent1"/>
+          </a:effectRef>
+          <a:fontRef idx="minor">
+            <a:schemeClr val="lt1"/>
+          </a:fontRef>
+        </p:style>
+        <p:txBody>
+          <a:bodyPr rtlCol="0" anchor="ctr"/>
+          <a:lstStyle/>
+          <a:p>
+            <a:pPr algn="ctr"/>
+          </a:p>
+        </p:txBody>
+      </p:sp>
+      <p:sp>
+        <p:nvSpPr>
+          <p:cNvPr id="11" name="TextBox 10"/>
+          <p:cNvSpPr txBox="1"/>
+          <p:nvPr/>
+        </p:nvSpPr>
+        <p:spPr>
+          <a:xfrm>
+            <a:off x="6345936" y="1874519"/>
+            <a:ext cx="2121408" cy="4069080"/>
+          </a:xfrm>
+          <a:prstGeom prst="rect">
+            <a:avLst/>
+          </a:prstGeom>
+          <a:noFill/>
+        </p:spPr>
+        <p:txBody>
+          <a:bodyPr wrap="none" lIns="0" tIns="0" rIns="0" bIns="0">
+            <a:spAutoFit/>
+          </a:bodyPr>
+          <a:lstStyle/>
+          <a:p>
+            <a:pPr>
+              <a:defRPr sz="950" b="1">
+                <a:solidFill>
+                  <a:srgbClr val="FF2D55"/>
+                </a:solidFill>
+                <a:latin typeface="Segoe UI"/>
+              </a:defRPr>
+            </a:pPr>
+            <a:r>
+              <a:t>RAG SPECIALIST</a:t>
             </a:r>
           </a:p>
           <a:p>
             <a:pPr>
               <a:spcBef>
-                <a:spcPts val="1000"/>
+                <a:spcPts val="200"/>
               </a:spcBef>
-            </a:pPr>
-            <a:r>
-              <a:rPr b="1" sz="1150">
-                <a:solidFill>
-                  <a:srgbClr val="3B82F6"/>
-                </a:solidFill>
-              </a:rPr>
-              <a:t>🚀 Budget &amp; OCR Receipt Auditing
+              <a:defRPr sz="1500" b="1">
+                <a:solidFill>
+                  <a:srgbClr val="FFFFFF"/>
+                </a:solidFill>
+                <a:latin typeface="Segoe UI"/>
+              </a:defRPr>
+            </a:pPr>
+            <a:r>
+              <a:t>Krish K. Patel</a:t>
+            </a:r>
+          </a:p>
+          <a:p>
+            <a:pPr>
+              <a:spcBef>
+                <a:spcPts val="1200"/>
+              </a:spcBef>
+            </a:pPr>
+            <a:r>
+              <a:rPr b="1" sz="1050">
+                <a:solidFill>
+                  <a:srgbClr val="06B6D4"/>
+                </a:solidFill>
+              </a:rPr>
+              <a:t>• Document Ingestion
 </a:t>
             </a:r>
             <a:r>
-              <a:rPr sz="1050">
+              <a:rPr sz="950">
                 <a:solidFill>
                   <a:srgbClr val="9CA3AF"/>
                 </a:solidFill>
               </a:rPr>
-              <a:t>Automated expense receipt scanning and budget threshold violation alerts.</a:t>
+              <a:t>Built document loader and text extraction for .pdf, .docx, .doc, and .txt files.</a:t>
+            </a:r>
+          </a:p>
+          <a:p>
+            <a:pPr>
+              <a:spcBef>
+                <a:spcPts val="1200"/>
+              </a:spcBef>
+            </a:pPr>
+            <a:r>
+              <a:rPr b="1" sz="1050">
+                <a:solidFill>
+                  <a:srgbClr val="06B6D4"/>
+                </a:solidFill>
+              </a:rPr>
+              <a:t>• Vector Pipeline
+</a:t>
+            </a:r>
+            <a:r>
+              <a:rPr sz="950">
+                <a:solidFill>
+                  <a:srgbClr val="9CA3AF"/>
+                </a:solidFill>
+              </a:rPr>
+              <a:t>Engineered sliding-window semantic chunker and in-memory cosine similarity retrieval.</a:t>
+            </a:r>
+          </a:p>
+          <a:p>
+            <a:pPr>
+              <a:spcBef>
+                <a:spcPts val="1200"/>
+              </a:spcBef>
+            </a:pPr>
+            <a:r>
+              <a:rPr b="1" sz="1050">
+                <a:solidFill>
+                  <a:srgbClr val="06B6D4"/>
+                </a:solidFill>
+              </a:rPr>
+              <a:t>• Citation Grounding
+</a:t>
+            </a:r>
+            <a:r>
+              <a:rPr sz="950">
+                <a:solidFill>
+                  <a:srgbClr val="9CA3AF"/>
+                </a:solidFill>
+              </a:rPr>
+              <a:t>Designed grounded Q&amp;A prompt templates enforcing verbatim source citations.</a:t>
+            </a:r>
+          </a:p>
+        </p:txBody>
+      </p:sp>
+      <p:sp>
+        <p:nvSpPr>
+          <p:cNvPr id="12" name="Rectangle 11"/>
+          <p:cNvSpPr/>
+          <p:nvPr/>
+        </p:nvSpPr>
+        <p:spPr>
+          <a:xfrm>
+            <a:off x="8878824" y="1691640"/>
+            <a:ext cx="2487168" cy="4480560"/>
+          </a:xfrm>
+          <a:prstGeom prst="rect">
+            <a:avLst/>
+          </a:prstGeom>
+          <a:solidFill>
+            <a:srgbClr val="14161D"/>
+          </a:solidFill>
+          <a:ln w="19050">
+            <a:solidFill>
+              <a:srgbClr val="2A2E3A"/>
+            </a:solidFill>
+          </a:ln>
+        </p:spPr>
+        <p:style>
+          <a:lnRef idx="1">
+            <a:schemeClr val="accent1"/>
+          </a:lnRef>
+          <a:fillRef idx="3">
+            <a:schemeClr val="accent1"/>
+          </a:fillRef>
+          <a:effectRef idx="2">
+            <a:schemeClr val="accent1"/>
+          </a:effectRef>
+          <a:fontRef idx="minor">
+            <a:schemeClr val="lt1"/>
+          </a:fontRef>
+        </p:style>
+        <p:txBody>
+          <a:bodyPr rtlCol="0" anchor="ctr"/>
+          <a:lstStyle/>
+          <a:p>
+            <a:pPr algn="ctr"/>
+          </a:p>
+        </p:txBody>
+      </p:sp>
+      <p:sp>
+        <p:nvSpPr>
+          <p:cNvPr id="13" name="TextBox 12"/>
+          <p:cNvSpPr txBox="1"/>
+          <p:nvPr/>
+        </p:nvSpPr>
+        <p:spPr>
+          <a:xfrm>
+            <a:off x="9061704" y="1874519"/>
+            <a:ext cx="2121408" cy="4069080"/>
+          </a:xfrm>
+          <a:prstGeom prst="rect">
+            <a:avLst/>
+          </a:prstGeom>
+          <a:noFill/>
+        </p:spPr>
+        <p:txBody>
+          <a:bodyPr wrap="none" lIns="0" tIns="0" rIns="0" bIns="0">
+            <a:spAutoFit/>
+          </a:bodyPr>
+          <a:lstStyle/>
+          <a:p>
+            <a:pPr>
+              <a:defRPr sz="950" b="1">
+                <a:solidFill>
+                  <a:srgbClr val="FF2D55"/>
+                </a:solidFill>
+                <a:latin typeface="Segoe UI"/>
+              </a:defRPr>
+            </a:pPr>
+            <a:r>
+              <a:t>AI AUTOMATION LEAD</a:t>
+            </a:r>
+          </a:p>
+          <a:p>
+            <a:pPr>
+              <a:spcBef>
+                <a:spcPts val="200"/>
+              </a:spcBef>
+              <a:defRPr sz="1500" b="1">
+                <a:solidFill>
+                  <a:srgbClr val="FFFFFF"/>
+                </a:solidFill>
+                <a:latin typeface="Segoe UI"/>
+              </a:defRPr>
+            </a:pPr>
+            <a:r>
+              <a:t>Dhruv Patel</a:t>
+            </a:r>
+          </a:p>
+          <a:p>
+            <a:pPr>
+              <a:spcBef>
+                <a:spcPts val="1200"/>
+              </a:spcBef>
+            </a:pPr>
+            <a:r>
+              <a:rPr b="1" sz="1050">
+                <a:solidFill>
+                  <a:srgbClr val="06B6D4"/>
+                </a:solidFill>
+              </a:rPr>
+              <a:t>• Gemini Integration
+</a:t>
+            </a:r>
+            <a:r>
+              <a:rPr sz="950">
+                <a:solidFill>
+                  <a:srgbClr val="9CA3AF"/>
+                </a:solidFill>
+              </a:rPr>
+              <a:t>Integrated Google Gemini API via @google/genai SDK for meeting transcript analysis.</a:t>
+            </a:r>
+          </a:p>
+          <a:p>
+            <a:pPr>
+              <a:spcBef>
+                <a:spcPts val="1200"/>
+              </a:spcBef>
+            </a:pPr>
+            <a:r>
+              <a:rPr b="1" sz="1050">
+                <a:solidFill>
+                  <a:srgbClr val="06B6D4"/>
+                </a:solidFill>
+              </a:rPr>
+              <a:t>• Autonomous Agent
+</a:t>
+            </a:r>
+            <a:r>
+              <a:rPr sz="950">
+                <a:solidFill>
+                  <a:srgbClr val="9CA3AF"/>
+                </a:solidFill>
+              </a:rPr>
+              <a:t>Built intent parser and tool execution framework supporting 6 discrete tools.</a:t>
+            </a:r>
+          </a:p>
+          <a:p>
+            <a:pPr>
+              <a:spcBef>
+                <a:spcPts val="1200"/>
+              </a:spcBef>
+            </a:pPr>
+            <a:r>
+              <a:rPr b="1" sz="1050">
+                <a:solidFill>
+                  <a:srgbClr val="06B6D4"/>
+                </a:solidFill>
+              </a:rPr>
+              <a:t>• Workload Balancing
+</a:t>
+            </a:r>
+            <a:r>
+              <a:rPr sz="950">
+                <a:solidFill>
+                  <a:srgbClr val="9CA3AF"/>
+                </a:solidFill>
+              </a:rPr>
+              <a:t>Engineered dynamic volunteer least-loaded assignment and testing demo suite.</a:t>
+            </a:r>
+          </a:p>
+        </p:txBody>
+      </p:sp>
+      <p:sp>
+        <p:nvSpPr>
+          <p:cNvPr id="14" name="TextBox 13"/>
+          <p:cNvSpPr txBox="1"/>
+          <p:nvPr/>
+        </p:nvSpPr>
+        <p:spPr>
+          <a:xfrm>
+            <a:off x="731520" y="6473952"/>
+            <a:ext cx="10698480" cy="274320"/>
+          </a:xfrm>
+          <a:prstGeom prst="rect">
+            <a:avLst/>
+          </a:prstGeom>
+          <a:noFill/>
+        </p:spPr>
+        <p:txBody>
+          <a:bodyPr wrap="none" lIns="0" tIns="0" rIns="0" bIns="0">
+            <a:spAutoFit/>
+          </a:bodyPr>
+          <a:lstStyle/>
+          <a:p>
+            <a:pPr>
+              <a:defRPr sz="900">
+                <a:solidFill>
+                  <a:srgbClr val="6E7382"/>
+                </a:solidFill>
+                <a:latin typeface="Segoe UI"/>
+              </a:defRPr>
+            </a:pPr>
+            <a:r>
+              <a:t>ClubOps AI  •  Bit N Build 2026 Hackathon  •  Slide 10 of 12</a:t>
             </a:r>
           </a:p>
         </p:txBody>
@@ -3892,7 +4713,7 @@
     <p:bg>
       <p:bgPr>
         <a:solidFill>
-          <a:srgbClr val="0B0F19"/>
+          <a:srgbClr val="0B0C10"/>
         </a:solidFill>
         <a:effectLst/>
       </p:bgPr>
@@ -3912,8 +4733,8 @@
         </p:nvSpPr>
         <p:spPr>
           <a:xfrm>
-            <a:off x="731520" y="365760"/>
-            <a:ext cx="10698480" cy="1005840"/>
+            <a:off x="731520" y="320040"/>
+            <a:ext cx="411480" cy="320040"/>
           </a:xfrm>
           <a:prstGeom prst="rect">
             <a:avLst/>
@@ -3921,7 +4742,7 @@
           <a:noFill/>
         </p:spPr>
         <p:txBody>
-          <a:bodyPr wrap="square" lIns="0" tIns="0" rIns="0" bIns="0">
+          <a:bodyPr wrap="none" lIns="0" tIns="0" rIns="0" bIns="0">
             <a:spAutoFit/>
           </a:bodyPr>
           <a:lstStyle/>
@@ -3929,51 +4750,145 @@
             <a:pPr>
               <a:defRPr sz="1100" b="1">
                 <a:solidFill>
-                  <a:srgbClr val="06B6D4"/>
-                </a:solidFill>
-              </a:defRPr>
-            </a:pPr>
-            <a:r>
-              <a:t>SECTION 08 / PROJECT LINKS &amp; VERIFICATION</a:t>
-            </a:r>
-          </a:p>
-          <a:p>
-            <a:pPr>
-              <a:spcBef>
-                <a:spcPts val="400"/>
-              </a:spcBef>
-              <a:defRPr sz="2400" b="1">
+                  <a:srgbClr val="FF2D55"/>
+                </a:solidFill>
+                <a:latin typeface="Segoe UI"/>
+              </a:defRPr>
+            </a:pPr>
+            <a:r>
+              <a:t>[C]</a:t>
+            </a:r>
+          </a:p>
+        </p:txBody>
+      </p:sp>
+      <p:sp>
+        <p:nvSpPr>
+          <p:cNvPr id="3" name="TextBox 2"/>
+          <p:cNvSpPr txBox="1"/>
+          <p:nvPr/>
+        </p:nvSpPr>
+        <p:spPr>
+          <a:xfrm>
+            <a:off x="1188720" y="320040"/>
+            <a:ext cx="10241280" cy="320040"/>
+          </a:xfrm>
+          <a:prstGeom prst="rect">
+            <a:avLst/>
+          </a:prstGeom>
+          <a:noFill/>
+        </p:spPr>
+        <p:txBody>
+          <a:bodyPr wrap="none" lIns="0" tIns="0" rIns="0" bIns="0">
+            <a:spAutoFit/>
+          </a:bodyPr>
+          <a:lstStyle/>
+          <a:p>
+            <a:pPr>
+              <a:defRPr sz="950" b="1">
+                <a:solidFill>
+                  <a:srgbClr val="9CA3AF"/>
+                </a:solidFill>
+                <a:latin typeface="Segoe UI"/>
+              </a:defRPr>
+            </a:pPr>
+            <a:r>
+              <a:t>CLUBOPS  •  BIT N BUILD 2026  •  IMPACT &amp; FUTURE SCOPE</a:t>
+            </a:r>
+          </a:p>
+        </p:txBody>
+      </p:sp>
+      <p:sp>
+        <p:nvSpPr>
+          <p:cNvPr id="4" name="TextBox 3"/>
+          <p:cNvSpPr txBox="1"/>
+          <p:nvPr/>
+        </p:nvSpPr>
+        <p:spPr>
+          <a:xfrm>
+            <a:off x="731520" y="621792"/>
+            <a:ext cx="10698480" cy="594360"/>
+          </a:xfrm>
+          <a:prstGeom prst="rect">
+            <a:avLst/>
+          </a:prstGeom>
+          <a:noFill/>
+        </p:spPr>
+        <p:txBody>
+          <a:bodyPr wrap="none" lIns="0" tIns="0" rIns="0" bIns="0">
+            <a:spAutoFit/>
+          </a:bodyPr>
+          <a:lstStyle/>
+          <a:p>
+            <a:pPr>
+              <a:defRPr sz="2100" b="1">
                 <a:solidFill>
                   <a:srgbClr val="FFFFFF"/>
                 </a:solidFill>
-              </a:defRPr>
-            </a:pPr>
-            <a:r>
-              <a:t>Open-Source Repository &amp; Verification Credentials</a:t>
-            </a:r>
-          </a:p>
-        </p:txBody>
-      </p:sp>
-      <p:sp>
-        <p:nvSpPr>
-          <p:cNvPr id="3" name="Rounded Rectangle 2"/>
+                <a:latin typeface="Segoe UI"/>
+              </a:defRPr>
+            </a:pPr>
+            <a:r>
+              <a:t>Real-World Value Proposition &amp; Strategic Roadmap</a:t>
+            </a:r>
+          </a:p>
+        </p:txBody>
+      </p:sp>
+      <p:sp>
+        <p:nvSpPr>
+          <p:cNvPr id="5" name="TextBox 4"/>
+          <p:cNvSpPr txBox="1"/>
+          <p:nvPr/>
+        </p:nvSpPr>
+        <p:spPr>
+          <a:xfrm>
+            <a:off x="731520" y="1188720"/>
+            <a:ext cx="10698480" cy="320040"/>
+          </a:xfrm>
+          <a:prstGeom prst="rect">
+            <a:avLst/>
+          </a:prstGeom>
+          <a:noFill/>
+        </p:spPr>
+        <p:txBody>
+          <a:bodyPr wrap="none" lIns="0" tIns="0" rIns="0" bIns="0">
+            <a:spAutoFit/>
+          </a:bodyPr>
+          <a:lstStyle/>
+          <a:p>
+            <a:pPr>
+              <a:defRPr sz="1150">
+                <a:solidFill>
+                  <a:srgbClr val="9CA3AF"/>
+                </a:solidFill>
+                <a:latin typeface="Segoe UI"/>
+              </a:defRPr>
+            </a:pPr>
+            <a:r>
+              <a:t>Demonstrated outcomes for student clubs and future scaling milestones.</a:t>
+            </a:r>
+          </a:p>
+        </p:txBody>
+      </p:sp>
+      <p:sp>
+        <p:nvSpPr>
+          <p:cNvPr id="6" name="Rectangle 5"/>
           <p:cNvSpPr/>
           <p:nvPr/>
         </p:nvSpPr>
         <p:spPr>
           <a:xfrm>
-            <a:off x="731520" y="1645920"/>
-            <a:ext cx="10698480" cy="4663440"/>
-          </a:xfrm>
-          <a:prstGeom prst="roundRect">
+            <a:off x="731520" y="1691640"/>
+            <a:ext cx="5212080" cy="4480560"/>
+          </a:xfrm>
+          <a:prstGeom prst="rect">
             <a:avLst/>
           </a:prstGeom>
           <a:solidFill>
-            <a:srgbClr val="161B2C"/>
+            <a:srgbClr val="14161D"/>
           </a:solidFill>
           <a:ln w="19050">
             <a:solidFill>
-              <a:srgbClr val="2D3748"/>
+              <a:srgbClr val="2A2E3A"/>
             </a:solidFill>
           </a:ln>
         </p:spPr>
@@ -3992,18 +4907,45 @@
           </a:fontRef>
         </p:style>
         <p:txBody>
-          <a:bodyPr rtlCol="0" anchor="ctr" wrap="square" lIns="228600" tIns="182880" rIns="228600"/>
-          <a:lstStyle/>
-          <a:p>
-            <a:pPr algn="ctr">
-              <a:defRPr sz="1300" b="1">
-                <a:solidFill>
-                  <a:srgbClr val="3B82F6"/>
-                </a:solidFill>
-              </a:defRPr>
-            </a:pPr>
-            <a:r>
-              <a:t>SUBMISSION &amp; VERIFICATION DETAILS</a:t>
+          <a:bodyPr rtlCol="0" anchor="ctr"/>
+          <a:lstStyle/>
+          <a:p>
+            <a:pPr algn="ctr"/>
+          </a:p>
+        </p:txBody>
+      </p:sp>
+      <p:sp>
+        <p:nvSpPr>
+          <p:cNvPr id="7" name="TextBox 6"/>
+          <p:cNvSpPr txBox="1"/>
+          <p:nvPr/>
+        </p:nvSpPr>
+        <p:spPr>
+          <a:xfrm>
+            <a:off x="960120" y="1874519"/>
+            <a:ext cx="4754880" cy="4114800"/>
+          </a:xfrm>
+          <a:prstGeom prst="rect">
+            <a:avLst/>
+          </a:prstGeom>
+          <a:noFill/>
+        </p:spPr>
+        <p:txBody>
+          <a:bodyPr wrap="none" lIns="0" tIns="0" rIns="0" bIns="0">
+            <a:spAutoFit/>
+          </a:bodyPr>
+          <a:lstStyle/>
+          <a:p>
+            <a:pPr>
+              <a:defRPr sz="1000" b="1">
+                <a:solidFill>
+                  <a:srgbClr val="FF2D55"/>
+                </a:solidFill>
+                <a:latin typeface="Segoe UI"/>
+              </a:defRPr>
+            </a:pPr>
+            <a:r>
+              <a:t>DEMONSTRATED IMPACT &amp; VALUE</a:t>
             </a:r>
           </a:p>
           <a:p>
@@ -4013,20 +4955,21 @@
               </a:spcBef>
             </a:pPr>
             <a:r>
-              <a:rPr b="1" sz="1300">
-                <a:solidFill>
-                  <a:srgbClr val="06B6D4"/>
-                </a:solidFill>
-              </a:rPr>
-              <a:t>🔗 GitHub Repository: </a:t>
-            </a:r>
-            <a:r>
-              <a:rPr sz="1300">
-                <a:solidFill>
-                  <a:srgbClr val="FFFFFF"/>
-                </a:solidFill>
-              </a:rPr>
-              <a:t>https://github.com/Kpanchal1210/ClubOps-AI</a:t>
+              <a:rPr b="1" sz="1100">
+                <a:solidFill>
+                  <a:srgbClr val="10B981"/>
+                </a:solidFill>
+              </a:rPr>
+              <a:t>🌟 15+ Hours Saved Weekly
+</a:t>
+            </a:r>
+            <a:r>
+              <a:rPr sz="1000">
+                <a:solidFill>
+                  <a:srgbClr val="9CA3AF"/>
+                </a:solidFill>
+              </a:rPr>
+              <a:t>Eliminates manual transcript note synthesis and chaotic task delegation for club executives.</a:t>
             </a:r>
           </a:p>
           <a:p>
@@ -4036,20 +4979,21 @@
               </a:spcBef>
             </a:pPr>
             <a:r>
-              <a:rPr b="1" sz="1300">
-                <a:solidFill>
-                  <a:srgbClr val="06B6D4"/>
-                </a:solidFill>
-              </a:rPr>
-              <a:t>🔗 Repository Branch: </a:t>
-            </a:r>
-            <a:r>
-              <a:rPr sz="1300">
-                <a:solidFill>
-                  <a:srgbClr val="FFFFFF"/>
-                </a:solidFill>
-              </a:rPr>
-              <a:t>main (Fully synchronized with zero conflicts)</a:t>
+              <a:rPr b="1" sz="1100">
+                <a:solidFill>
+                  <a:srgbClr val="10B981"/>
+                </a:solidFill>
+              </a:rPr>
+              <a:t>🌟 Zero Task Slippage
+</a:t>
+            </a:r>
+            <a:r>
+              <a:rPr sz="1000">
+                <a:solidFill>
+                  <a:srgbClr val="9CA3AF"/>
+                </a:solidFill>
+              </a:rPr>
+              <a:t>Automated priority tagging and volunteer workload balancing guarantees every critical item has an active owner.</a:t>
             </a:r>
           </a:p>
           <a:p>
@@ -4059,20 +5003,21 @@
               </a:spcBef>
             </a:pPr>
             <a:r>
-              <a:rPr b="1" sz="1300">
-                <a:solidFill>
-                  <a:srgbClr val="06B6D4"/>
-                </a:solidFill>
-              </a:rPr>
-              <a:t>🔗 Documentation: </a:t>
-            </a:r>
-            <a:r>
-              <a:rPr sz="1300">
-                <a:solidFill>
-                  <a:srgbClr val="FFFFFF"/>
-                </a:solidFill>
-              </a:rPr>
-              <a:t>Full architecture, API tables, and setup instructions in README.md</a:t>
+              <a:rPr b="1" sz="1100">
+                <a:solidFill>
+                  <a:srgbClr val="10B981"/>
+                </a:solidFill>
+              </a:rPr>
+              <a:t>🌟 Institutional Memory
+</a:t>
+            </a:r>
+            <a:r>
+              <a:rPr sz="1000">
+                <a:solidFill>
+                  <a:srgbClr val="9CA3AF"/>
+                </a:solidFill>
+              </a:rPr>
+              <a:t>Grounded RAG preserves venue rules, sponsorship guidelines, and past event learnings across graduating batches.</a:t>
             </a:r>
           </a:p>
           <a:p>
@@ -4082,20 +5027,102 @@
               </a:spcBef>
             </a:pPr>
             <a:r>
-              <a:rPr b="1" sz="1300">
-                <a:solidFill>
-                  <a:srgbClr val="06B6D4"/>
-                </a:solidFill>
-              </a:rPr>
-              <a:t>🔗 Demo Credentials: </a:t>
-            </a:r>
-            <a:r>
-              <a:rPr sz="1300">
-                <a:solidFill>
-                  <a:srgbClr val="FFFFFF"/>
-                </a:solidFill>
-              </a:rPr>
-              <a:t>organizer@clubops.org / password123 (Club Admin Role)</a:t>
+              <a:rPr b="1" sz="1100">
+                <a:solidFill>
+                  <a:srgbClr val="10B981"/>
+                </a:solidFill>
+              </a:rPr>
+              <a:t>🌟 Campus &amp; Industry Ready
+</a:t>
+            </a:r>
+            <a:r>
+              <a:rPr sz="1000">
+                <a:solidFill>
+                  <a:srgbClr val="9CA3AF"/>
+                </a:solidFill>
+              </a:rPr>
+              <a:t>Engineered to scale effortlessly for college clubs, 36-hour hackathons, and multi-day tech symposiums.</a:t>
+            </a:r>
+          </a:p>
+        </p:txBody>
+      </p:sp>
+      <p:sp>
+        <p:nvSpPr>
+          <p:cNvPr id="8" name="Rectangle 7"/>
+          <p:cNvSpPr/>
+          <p:nvPr/>
+        </p:nvSpPr>
+        <p:spPr>
+          <a:xfrm>
+            <a:off x="6217920" y="1691640"/>
+            <a:ext cx="5239512" cy="4480560"/>
+          </a:xfrm>
+          <a:prstGeom prst="rect">
+            <a:avLst/>
+          </a:prstGeom>
+          <a:solidFill>
+            <a:srgbClr val="14161D"/>
+          </a:solidFill>
+          <a:ln w="19050">
+            <a:solidFill>
+              <a:srgbClr val="2A2E3A"/>
+            </a:solidFill>
+          </a:ln>
+        </p:spPr>
+        <p:style>
+          <a:lnRef idx="1">
+            <a:schemeClr val="accent1"/>
+          </a:lnRef>
+          <a:fillRef idx="3">
+            <a:schemeClr val="accent1"/>
+          </a:fillRef>
+          <a:effectRef idx="2">
+            <a:schemeClr val="accent1"/>
+          </a:effectRef>
+          <a:fontRef idx="minor">
+            <a:schemeClr val="lt1"/>
+          </a:fontRef>
+        </p:style>
+        <p:txBody>
+          <a:bodyPr rtlCol="0" anchor="ctr"/>
+          <a:lstStyle/>
+          <a:p>
+            <a:pPr algn="ctr"/>
+          </a:p>
+        </p:txBody>
+      </p:sp>
+      <p:sp>
+        <p:nvSpPr>
+          <p:cNvPr id="9" name="TextBox 8"/>
+          <p:cNvSpPr txBox="1"/>
+          <p:nvPr/>
+        </p:nvSpPr>
+        <p:spPr>
+          <a:xfrm>
+            <a:off x="6492240" y="1874519"/>
+            <a:ext cx="4690872" cy="4114800"/>
+          </a:xfrm>
+          <a:prstGeom prst="rect">
+            <a:avLst/>
+          </a:prstGeom>
+          <a:noFill/>
+        </p:spPr>
+        <p:txBody>
+          <a:bodyPr wrap="none" lIns="0" tIns="0" rIns="0" bIns="0">
+            <a:spAutoFit/>
+          </a:bodyPr>
+          <a:lstStyle/>
+          <a:p>
+            <a:pPr>
+              <a:defRPr sz="1000" b="1">
+                <a:solidFill>
+                  <a:srgbClr val="FF2D55"/>
+                </a:solidFill>
+                <a:latin typeface="Segoe UI"/>
+              </a:defRPr>
+            </a:pPr>
+            <a:r>
+              <a:t>STRATEGIC ROADMAP &amp; FUTURE SCOPE</a:t>
             </a:r>
           </a:p>
           <a:p>
@@ -4105,20 +5132,21 @@
               </a:spcBef>
             </a:pPr>
             <a:r>
-              <a:rPr b="1" sz="1300">
+              <a:rPr b="1" sz="1100">
                 <a:solidFill>
                   <a:srgbClr val="06B6D4"/>
                 </a:solidFill>
               </a:rPr>
-              <a:t>🔗 Local Verification: </a:t>
-            </a:r>
-            <a:r>
-              <a:rPr sz="1300">
-                <a:solidFill>
-                  <a:srgbClr val="FFFFFF"/>
-                </a:solidFill>
-              </a:rPr>
-              <a:t>Backend: http://localhost:5002 | Frontend: http://localhost:5173</a:t>
+              <a:t>🚀 Live Audio Transcription
+</a:t>
+            </a:r>
+            <a:r>
+              <a:rPr sz="1000">
+                <a:solidFill>
+                  <a:srgbClr val="9CA3AF"/>
+                </a:solidFill>
+              </a:rPr>
+              <a:t>Real-time speech-to-text integration (Whisper AI) for direct in-meeting audio streaming and task extraction.</a:t>
             </a:r>
           </a:p>
           <a:p>
@@ -4128,20 +5156,530 @@
               </a:spcBef>
             </a:pPr>
             <a:r>
-              <a:rPr b="1" sz="1300">
+              <a:rPr b="1" sz="1100">
                 <a:solidFill>
                   <a:srgbClr val="06B6D4"/>
                 </a:solidFill>
               </a:rPr>
-              <a:t>🔗 Automated Demo Script: </a:t>
-            </a:r>
-            <a:r>
-              <a:rPr sz="1300">
+              <a:t>🚀 WhatsApp &amp; Slack Bots
+</a:t>
+            </a:r>
+            <a:r>
+              <a:rPr sz="1000">
+                <a:solidFill>
+                  <a:srgbClr val="9CA3AF"/>
+                </a:solidFill>
+              </a:rPr>
+              <a:t>Two-way messaging bots allowing volunteers to check task deadlines and confirm completion via messaging apps.</a:t>
+            </a:r>
+          </a:p>
+          <a:p>
+            <a:pPr>
+              <a:spcBef>
+                <a:spcPts val="1200"/>
+              </a:spcBef>
+            </a:pPr>
+            <a:r>
+              <a:rPr b="1" sz="1100">
+                <a:solidFill>
+                  <a:srgbClr val="06B6D4"/>
+                </a:solidFill>
+              </a:rPr>
+              <a:t>🚀 Mobile Companion App
+</a:t>
+            </a:r>
+            <a:r>
+              <a:rPr sz="1000">
+                <a:solidFill>
+                  <a:srgbClr val="9CA3AF"/>
+                </a:solidFill>
+              </a:rPr>
+              <a:t>React Native companion app for organizers and volunteers to receive push notifications and QR check-in.</a:t>
+            </a:r>
+          </a:p>
+          <a:p>
+            <a:pPr>
+              <a:spcBef>
+                <a:spcPts val="1200"/>
+              </a:spcBef>
+            </a:pPr>
+            <a:r>
+              <a:rPr b="1" sz="1100">
+                <a:solidFill>
+                  <a:srgbClr val="06B6D4"/>
+                </a:solidFill>
+              </a:rPr>
+              <a:t>🚀 OCR Receipt &amp; Budget Auditing
+</a:t>
+            </a:r>
+            <a:r>
+              <a:rPr sz="1000">
+                <a:solidFill>
+                  <a:srgbClr val="9CA3AF"/>
+                </a:solidFill>
+              </a:rPr>
+              <a:t>Automated expense receipt scanning and budget threshold violation alerts.</a:t>
+            </a:r>
+          </a:p>
+        </p:txBody>
+      </p:sp>
+      <p:sp>
+        <p:nvSpPr>
+          <p:cNvPr id="10" name="TextBox 9"/>
+          <p:cNvSpPr txBox="1"/>
+          <p:nvPr/>
+        </p:nvSpPr>
+        <p:spPr>
+          <a:xfrm>
+            <a:off x="731520" y="6473952"/>
+            <a:ext cx="10698480" cy="274320"/>
+          </a:xfrm>
+          <a:prstGeom prst="rect">
+            <a:avLst/>
+          </a:prstGeom>
+          <a:noFill/>
+        </p:spPr>
+        <p:txBody>
+          <a:bodyPr wrap="none" lIns="0" tIns="0" rIns="0" bIns="0">
+            <a:spAutoFit/>
+          </a:bodyPr>
+          <a:lstStyle/>
+          <a:p>
+            <a:pPr>
+              <a:defRPr sz="900">
+                <a:solidFill>
+                  <a:srgbClr val="6E7382"/>
+                </a:solidFill>
+                <a:latin typeface="Segoe UI"/>
+              </a:defRPr>
+            </a:pPr>
+            <a:r>
+              <a:t>ClubOps AI  •  Bit N Build 2026 Hackathon  •  Slide 11 of 12</a:t>
+            </a:r>
+          </a:p>
+        </p:txBody>
+      </p:sp>
+    </p:spTree>
+  </p:cSld>
+  <p:clrMapOvr>
+    <a:masterClrMapping/>
+  </p:clrMapOvr>
+</p:sld>
+</file>
+
+<file path=ppt/slides/slide12.xml><?xml version="1.0" encoding="utf-8"?>
+<p:sld xmlns:a="http://schemas.openxmlformats.org/drawingml/2006/main" xmlns:p="http://schemas.openxmlformats.org/presentationml/2006/main" xmlns:r="http://schemas.openxmlformats.org/officeDocument/2006/relationships">
+  <p:cSld>
+    <p:bg>
+      <p:bgPr>
+        <a:solidFill>
+          <a:srgbClr val="0B0C10"/>
+        </a:solidFill>
+        <a:effectLst/>
+      </p:bgPr>
+    </p:bg>
+    <p:spTree>
+      <p:nvGrpSpPr>
+        <p:cNvPr id="1" name=""/>
+        <p:cNvGrpSpPr/>
+        <p:nvPr/>
+      </p:nvGrpSpPr>
+      <p:grpSpPr/>
+      <p:sp>
+        <p:nvSpPr>
+          <p:cNvPr id="2" name="TextBox 1"/>
+          <p:cNvSpPr txBox="1"/>
+          <p:nvPr/>
+        </p:nvSpPr>
+        <p:spPr>
+          <a:xfrm>
+            <a:off x="731520" y="320040"/>
+            <a:ext cx="411480" cy="320040"/>
+          </a:xfrm>
+          <a:prstGeom prst="rect">
+            <a:avLst/>
+          </a:prstGeom>
+          <a:noFill/>
+        </p:spPr>
+        <p:txBody>
+          <a:bodyPr wrap="none" lIns="0" tIns="0" rIns="0" bIns="0">
+            <a:spAutoFit/>
+          </a:bodyPr>
+          <a:lstStyle/>
+          <a:p>
+            <a:pPr>
+              <a:defRPr sz="1100" b="1">
+                <a:solidFill>
+                  <a:srgbClr val="FF2D55"/>
+                </a:solidFill>
+                <a:latin typeface="Segoe UI"/>
+              </a:defRPr>
+            </a:pPr>
+            <a:r>
+              <a:t>[C]</a:t>
+            </a:r>
+          </a:p>
+        </p:txBody>
+      </p:sp>
+      <p:sp>
+        <p:nvSpPr>
+          <p:cNvPr id="3" name="TextBox 2"/>
+          <p:cNvSpPr txBox="1"/>
+          <p:nvPr/>
+        </p:nvSpPr>
+        <p:spPr>
+          <a:xfrm>
+            <a:off x="1188720" y="320040"/>
+            <a:ext cx="10241280" cy="320040"/>
+          </a:xfrm>
+          <a:prstGeom prst="rect">
+            <a:avLst/>
+          </a:prstGeom>
+          <a:noFill/>
+        </p:spPr>
+        <p:txBody>
+          <a:bodyPr wrap="none" lIns="0" tIns="0" rIns="0" bIns="0">
+            <a:spAutoFit/>
+          </a:bodyPr>
+          <a:lstStyle/>
+          <a:p>
+            <a:pPr>
+              <a:defRPr sz="950" b="1">
+                <a:solidFill>
+                  <a:srgbClr val="9CA3AF"/>
+                </a:solidFill>
+                <a:latin typeface="Segoe UI"/>
+              </a:defRPr>
+            </a:pPr>
+            <a:r>
+              <a:t>CLUBOPS  •  BIT N BUILD 2026  •  SUBMISSION &amp; VERIFICATION</a:t>
+            </a:r>
+          </a:p>
+        </p:txBody>
+      </p:sp>
+      <p:sp>
+        <p:nvSpPr>
+          <p:cNvPr id="4" name="TextBox 3"/>
+          <p:cNvSpPr txBox="1"/>
+          <p:nvPr/>
+        </p:nvSpPr>
+        <p:spPr>
+          <a:xfrm>
+            <a:off x="731520" y="621792"/>
+            <a:ext cx="10698480" cy="594360"/>
+          </a:xfrm>
+          <a:prstGeom prst="rect">
+            <a:avLst/>
+          </a:prstGeom>
+          <a:noFill/>
+        </p:spPr>
+        <p:txBody>
+          <a:bodyPr wrap="none" lIns="0" tIns="0" rIns="0" bIns="0">
+            <a:spAutoFit/>
+          </a:bodyPr>
+          <a:lstStyle/>
+          <a:p>
+            <a:pPr>
+              <a:defRPr sz="2100" b="1">
                 <a:solidFill>
                   <a:srgbClr val="FFFFFF"/>
                 </a:solidFill>
-              </a:rPr>
-              <a:t>Run 'npm run demo' inside /backend for instant full-flow verification</a:t>
+                <a:latin typeface="Segoe UI"/>
+              </a:defRPr>
+            </a:pPr>
+            <a:r>
+              <a:t>Project Links &amp; Live Verification</a:t>
+            </a:r>
+          </a:p>
+        </p:txBody>
+      </p:sp>
+      <p:sp>
+        <p:nvSpPr>
+          <p:cNvPr id="5" name="TextBox 4"/>
+          <p:cNvSpPr txBox="1"/>
+          <p:nvPr/>
+        </p:nvSpPr>
+        <p:spPr>
+          <a:xfrm>
+            <a:off x="731520" y="1188720"/>
+            <a:ext cx="10698480" cy="320040"/>
+          </a:xfrm>
+          <a:prstGeom prst="rect">
+            <a:avLst/>
+          </a:prstGeom>
+          <a:noFill/>
+        </p:spPr>
+        <p:txBody>
+          <a:bodyPr wrap="none" lIns="0" tIns="0" rIns="0" bIns="0">
+            <a:spAutoFit/>
+          </a:bodyPr>
+          <a:lstStyle/>
+          <a:p>
+            <a:pPr>
+              <a:defRPr sz="1150">
+                <a:solidFill>
+                  <a:srgbClr val="9CA3AF"/>
+                </a:solidFill>
+                <a:latin typeface="Segoe UI"/>
+              </a:defRPr>
+            </a:pPr>
+            <a:r>
+              <a:t>Open-source repository, documentation, test credentials, and automated demo suite.</a:t>
+            </a:r>
+          </a:p>
+        </p:txBody>
+      </p:sp>
+      <p:sp>
+        <p:nvSpPr>
+          <p:cNvPr id="6" name="Rectangle 5"/>
+          <p:cNvSpPr/>
+          <p:nvPr/>
+        </p:nvSpPr>
+        <p:spPr>
+          <a:xfrm>
+            <a:off x="731520" y="1691640"/>
+            <a:ext cx="10725912" cy="4480560"/>
+          </a:xfrm>
+          <a:prstGeom prst="rect">
+            <a:avLst/>
+          </a:prstGeom>
+          <a:solidFill>
+            <a:srgbClr val="14161D"/>
+          </a:solidFill>
+          <a:ln w="19050">
+            <a:solidFill>
+              <a:srgbClr val="2A2E3A"/>
+            </a:solidFill>
+          </a:ln>
+        </p:spPr>
+        <p:style>
+          <a:lnRef idx="1">
+            <a:schemeClr val="accent1"/>
+          </a:lnRef>
+          <a:fillRef idx="3">
+            <a:schemeClr val="accent1"/>
+          </a:fillRef>
+          <a:effectRef idx="2">
+            <a:schemeClr val="accent1"/>
+          </a:effectRef>
+          <a:fontRef idx="minor">
+            <a:schemeClr val="lt1"/>
+          </a:fontRef>
+        </p:style>
+        <p:txBody>
+          <a:bodyPr rtlCol="0" anchor="ctr"/>
+          <a:lstStyle/>
+          <a:p>
+            <a:pPr algn="ctr"/>
+          </a:p>
+        </p:txBody>
+      </p:sp>
+      <p:sp>
+        <p:nvSpPr>
+          <p:cNvPr id="7" name="TextBox 6"/>
+          <p:cNvSpPr txBox="1"/>
+          <p:nvPr/>
+        </p:nvSpPr>
+        <p:spPr>
+          <a:xfrm>
+            <a:off x="1005840" y="1874519"/>
+            <a:ext cx="10177272" cy="4114800"/>
+          </a:xfrm>
+          <a:prstGeom prst="rect">
+            <a:avLst/>
+          </a:prstGeom>
+          <a:noFill/>
+        </p:spPr>
+        <p:txBody>
+          <a:bodyPr wrap="none" lIns="0" tIns="0" rIns="0" bIns="0">
+            <a:spAutoFit/>
+          </a:bodyPr>
+          <a:lstStyle/>
+          <a:p>
+            <a:pPr>
+              <a:defRPr sz="1000" b="1">
+                <a:solidFill>
+                  <a:srgbClr val="FF2D55"/>
+                </a:solidFill>
+                <a:latin typeface="Segoe UI"/>
+              </a:defRPr>
+            </a:pPr>
+            <a:r>
+              <a:t>OFFICIAL SUBMISSION &amp; VERIFICATION DETAILS</a:t>
+            </a:r>
+          </a:p>
+          <a:p>
+            <a:pPr>
+              <a:spcBef>
+                <a:spcPts val="1400"/>
+              </a:spcBef>
+            </a:pPr>
+            <a:r>
+              <a:rPr b="1" sz="1200">
+                <a:solidFill>
+                  <a:srgbClr val="06B6D4"/>
+                </a:solidFill>
+              </a:rPr>
+              <a:t>🔗 GitHub Repository: </a:t>
+            </a:r>
+            <a:r>
+              <a:rPr sz="1150">
+                <a:solidFill>
+                  <a:srgbClr val="FFFFFF"/>
+                </a:solidFill>
+              </a:rPr>
+              <a:t>https://github.com/Kpanchal1210/ClubOps-AI (README.md with full architecture &amp; API specs)</a:t>
+            </a:r>
+          </a:p>
+          <a:p>
+            <a:pPr>
+              <a:spcBef>
+                <a:spcPts val="1400"/>
+              </a:spcBef>
+            </a:pPr>
+            <a:r>
+              <a:rPr b="1" sz="1200">
+                <a:solidFill>
+                  <a:srgbClr val="06B6D4"/>
+                </a:solidFill>
+              </a:rPr>
+              <a:t>🔗 Repository Branch: </a:t>
+            </a:r>
+            <a:r>
+              <a:rPr sz="1150">
+                <a:solidFill>
+                  <a:srgbClr val="FFFFFF"/>
+                </a:solidFill>
+              </a:rPr>
+              <a:t>main (Fully synchronized with zero conflicts, clean working tree)</a:t>
+            </a:r>
+          </a:p>
+          <a:p>
+            <a:pPr>
+              <a:spcBef>
+                <a:spcPts val="1400"/>
+              </a:spcBef>
+            </a:pPr>
+            <a:r>
+              <a:rPr b="1" sz="1200">
+                <a:solidFill>
+                  <a:srgbClr val="06B6D4"/>
+                </a:solidFill>
+              </a:rPr>
+              <a:t>🔗 Admin Demo Credentials: </a:t>
+            </a:r>
+            <a:r>
+              <a:rPr sz="1150">
+                <a:solidFill>
+                  <a:srgbClr val="FFFFFF"/>
+                </a:solidFill>
+              </a:rPr>
+              <a:t>Email: organizer@clubops.org | Password: password123 (Club Admin Role)</a:t>
+            </a:r>
+          </a:p>
+          <a:p>
+            <a:pPr>
+              <a:spcBef>
+                <a:spcPts val="1400"/>
+              </a:spcBef>
+            </a:pPr>
+            <a:r>
+              <a:rPr b="1" sz="1200">
+                <a:solidFill>
+                  <a:srgbClr val="06B6D4"/>
+                </a:solidFill>
+              </a:rPr>
+              <a:t>🔗 Local Verification URLs: </a:t>
+            </a:r>
+            <a:r>
+              <a:rPr sz="1150">
+                <a:solidFill>
+                  <a:srgbClr val="FFFFFF"/>
+                </a:solidFill>
+              </a:rPr>
+              <a:t>Backend API: http://localhost:5002 | Frontend UI: http://localhost:5173</a:t>
+            </a:r>
+          </a:p>
+          <a:p>
+            <a:pPr>
+              <a:spcBef>
+                <a:spcPts val="1400"/>
+              </a:spcBef>
+            </a:pPr>
+            <a:r>
+              <a:rPr b="1" sz="1200">
+                <a:solidFill>
+                  <a:srgbClr val="06B6D4"/>
+                </a:solidFill>
+              </a:rPr>
+              <a:t>🔗 Automated End-to-End Test: </a:t>
+            </a:r>
+            <a:r>
+              <a:rPr sz="1150">
+                <a:solidFill>
+                  <a:srgbClr val="FFFFFF"/>
+                </a:solidFill>
+              </a:rPr>
+              <a:t>Execute 'npm run demo' inside /backend for instant full-flow verification</a:t>
+            </a:r>
+          </a:p>
+          <a:p>
+            <a:pPr>
+              <a:spcBef>
+                <a:spcPts val="1400"/>
+              </a:spcBef>
+            </a:pPr>
+            <a:r>
+              <a:rPr b="1" sz="1200">
+                <a:solidFill>
+                  <a:srgbClr val="06B6D4"/>
+                </a:solidFill>
+              </a:rPr>
+              <a:t>🔗 Presentation Assets: </a:t>
+            </a:r>
+            <a:r>
+              <a:rPr sz="1150">
+                <a:solidFill>
+                  <a:srgbClr val="FFFFFF"/>
+                </a:solidFill>
+              </a:rPr>
+              <a:t>PowerPoint deck: ClubOps-AI_BIT_N_BUILD_26.pptx | Web deck: presentation.html</a:t>
+            </a:r>
+          </a:p>
+        </p:txBody>
+      </p:sp>
+      <p:sp>
+        <p:nvSpPr>
+          <p:cNvPr id="8" name="TextBox 7"/>
+          <p:cNvSpPr txBox="1"/>
+          <p:nvPr/>
+        </p:nvSpPr>
+        <p:spPr>
+          <a:xfrm>
+            <a:off x="731520" y="6473952"/>
+            <a:ext cx="10698480" cy="274320"/>
+          </a:xfrm>
+          <a:prstGeom prst="rect">
+            <a:avLst/>
+          </a:prstGeom>
+          <a:noFill/>
+        </p:spPr>
+        <p:txBody>
+          <a:bodyPr wrap="none" lIns="0" tIns="0" rIns="0" bIns="0">
+            <a:spAutoFit/>
+          </a:bodyPr>
+          <a:lstStyle/>
+          <a:p>
+            <a:pPr>
+              <a:defRPr sz="900">
+                <a:solidFill>
+                  <a:srgbClr val="6E7382"/>
+                </a:solidFill>
+                <a:latin typeface="Segoe UI"/>
+              </a:defRPr>
+            </a:pPr>
+            <a:r>
+              <a:t>ClubOps AI  •  Bit N Build 2026 Hackathon  •  Slide 12 of 12</a:t>
             </a:r>
           </a:p>
         </p:txBody>
@@ -4160,7 +5698,7 @@
     <p:bg>
       <p:bgPr>
         <a:solidFill>
-          <a:srgbClr val="0B0F19"/>
+          <a:srgbClr val="0B0C10"/>
         </a:solidFill>
         <a:effectLst/>
       </p:bgPr>
@@ -4180,8 +5718,8 @@
         </p:nvSpPr>
         <p:spPr>
           <a:xfrm>
-            <a:off x="731520" y="365760"/>
-            <a:ext cx="10698480" cy="1005840"/>
+            <a:off x="731520" y="320040"/>
+            <a:ext cx="411480" cy="320040"/>
           </a:xfrm>
           <a:prstGeom prst="rect">
             <a:avLst/>
@@ -4189,7 +5727,7 @@
           <a:noFill/>
         </p:spPr>
         <p:txBody>
-          <a:bodyPr wrap="square" lIns="0" tIns="0" rIns="0" bIns="0">
+          <a:bodyPr wrap="none" lIns="0" tIns="0" rIns="0" bIns="0">
             <a:spAutoFit/>
           </a:bodyPr>
           <a:lstStyle/>
@@ -4197,51 +5735,145 @@
             <a:pPr>
               <a:defRPr sz="1100" b="1">
                 <a:solidFill>
-                  <a:srgbClr val="06B6D4"/>
-                </a:solidFill>
-              </a:defRPr>
-            </a:pPr>
-            <a:r>
-              <a:t>SECTION 02 / PROBLEM &amp; PROPOSED SOLUTION</a:t>
-            </a:r>
-          </a:p>
-          <a:p>
-            <a:pPr>
-              <a:spcBef>
-                <a:spcPts val="400"/>
-              </a:spcBef>
-              <a:defRPr sz="2400" b="1">
+                  <a:srgbClr val="FF2D55"/>
+                </a:solidFill>
+                <a:latin typeface="Segoe UI"/>
+              </a:defRPr>
+            </a:pPr>
+            <a:r>
+              <a:t>[C]</a:t>
+            </a:r>
+          </a:p>
+        </p:txBody>
+      </p:sp>
+      <p:sp>
+        <p:nvSpPr>
+          <p:cNvPr id="3" name="TextBox 2"/>
+          <p:cNvSpPr txBox="1"/>
+          <p:nvPr/>
+        </p:nvSpPr>
+        <p:spPr>
+          <a:xfrm>
+            <a:off x="1188720" y="320040"/>
+            <a:ext cx="10241280" cy="320040"/>
+          </a:xfrm>
+          <a:prstGeom prst="rect">
+            <a:avLst/>
+          </a:prstGeom>
+          <a:noFill/>
+        </p:spPr>
+        <p:txBody>
+          <a:bodyPr wrap="none" lIns="0" tIns="0" rIns="0" bIns="0">
+            <a:spAutoFit/>
+          </a:bodyPr>
+          <a:lstStyle/>
+          <a:p>
+            <a:pPr>
+              <a:defRPr sz="950" b="1">
+                <a:solidFill>
+                  <a:srgbClr val="9CA3AF"/>
+                </a:solidFill>
+                <a:latin typeface="Segoe UI"/>
+              </a:defRPr>
+            </a:pPr>
+            <a:r>
+              <a:t>CLUBOPS  •  BIT N BUILD 2026  •  PROBLEM &amp; PROPOSED SOLUTION</a:t>
+            </a:r>
+          </a:p>
+        </p:txBody>
+      </p:sp>
+      <p:sp>
+        <p:nvSpPr>
+          <p:cNvPr id="4" name="TextBox 3"/>
+          <p:cNvSpPr txBox="1"/>
+          <p:nvPr/>
+        </p:nvSpPr>
+        <p:spPr>
+          <a:xfrm>
+            <a:off x="731520" y="621792"/>
+            <a:ext cx="10698480" cy="594360"/>
+          </a:xfrm>
+          <a:prstGeom prst="rect">
+            <a:avLst/>
+          </a:prstGeom>
+          <a:noFill/>
+        </p:spPr>
+        <p:txBody>
+          <a:bodyPr wrap="none" lIns="0" tIns="0" rIns="0" bIns="0">
+            <a:spAutoFit/>
+          </a:bodyPr>
+          <a:lstStyle/>
+          <a:p>
+            <a:pPr>
+              <a:defRPr sz="2100" b="1">
                 <a:solidFill>
                   <a:srgbClr val="FFFFFF"/>
                 </a:solidFill>
-              </a:defRPr>
-            </a:pPr>
-            <a:r>
-              <a:t>Tackling Fragmentation in Student Organization Operations</a:t>
-            </a:r>
-          </a:p>
-        </p:txBody>
-      </p:sp>
-      <p:sp>
-        <p:nvSpPr>
-          <p:cNvPr id="3" name="Rounded Rectangle 2"/>
+                <a:latin typeface="Segoe UI"/>
+              </a:defRPr>
+            </a:pPr>
+            <a:r>
+              <a:t>The Status Quo vs. The ClubOps AI Approach</a:t>
+            </a:r>
+          </a:p>
+        </p:txBody>
+      </p:sp>
+      <p:sp>
+        <p:nvSpPr>
+          <p:cNvPr id="5" name="TextBox 4"/>
+          <p:cNvSpPr txBox="1"/>
+          <p:nvPr/>
+        </p:nvSpPr>
+        <p:spPr>
+          <a:xfrm>
+            <a:off x="731520" y="1188720"/>
+            <a:ext cx="10698480" cy="320040"/>
+          </a:xfrm>
+          <a:prstGeom prst="rect">
+            <a:avLst/>
+          </a:prstGeom>
+          <a:noFill/>
+        </p:spPr>
+        <p:txBody>
+          <a:bodyPr wrap="none" lIns="0" tIns="0" rIns="0" bIns="0">
+            <a:spAutoFit/>
+          </a:bodyPr>
+          <a:lstStyle/>
+          <a:p>
+            <a:pPr>
+              <a:defRPr sz="1150">
+                <a:solidFill>
+                  <a:srgbClr val="9CA3AF"/>
+                </a:solidFill>
+                <a:latin typeface="Segoe UI"/>
+              </a:defRPr>
+            </a:pPr>
+            <a:r>
+              <a:t>Comparing traditional fragmented coordination with intelligent autonomous operations.</a:t>
+            </a:r>
+          </a:p>
+        </p:txBody>
+      </p:sp>
+      <p:sp>
+        <p:nvSpPr>
+          <p:cNvPr id="6" name="Rectangle 5"/>
           <p:cNvSpPr/>
           <p:nvPr/>
         </p:nvSpPr>
         <p:spPr>
           <a:xfrm>
-            <a:off x="731520" y="1645920"/>
-            <a:ext cx="5120640" cy="4663440"/>
-          </a:xfrm>
-          <a:prstGeom prst="roundRect">
+            <a:off x="731520" y="1691640"/>
+            <a:ext cx="5212080" cy="4480560"/>
+          </a:xfrm>
+          <a:prstGeom prst="rect">
             <a:avLst/>
           </a:prstGeom>
           <a:solidFill>
-            <a:srgbClr val="161B2C"/>
+            <a:srgbClr val="F5F3EE"/>
           </a:solidFill>
           <a:ln w="19050">
             <a:solidFill>
-              <a:srgbClr val="2D3748"/>
+              <a:srgbClr val="DAD6CC"/>
             </a:solidFill>
           </a:ln>
         </p:spPr>
@@ -4260,14 +5892,41 @@
           </a:fontRef>
         </p:style>
         <p:txBody>
-          <a:bodyPr rtlCol="0" anchor="ctr" wrap="square" lIns="228600" tIns="182880" rIns="228600"/>
-          <a:lstStyle/>
-          <a:p>
-            <a:pPr algn="ctr">
-              <a:defRPr sz="1300" b="1">
-                <a:solidFill>
-                  <a:srgbClr val="3B82F6"/>
-                </a:solidFill>
+          <a:bodyPr rtlCol="0" anchor="ctr"/>
+          <a:lstStyle/>
+          <a:p>
+            <a:pPr algn="ctr"/>
+          </a:p>
+        </p:txBody>
+      </p:sp>
+      <p:sp>
+        <p:nvSpPr>
+          <p:cNvPr id="7" name="TextBox 6"/>
+          <p:cNvSpPr txBox="1"/>
+          <p:nvPr/>
+        </p:nvSpPr>
+        <p:spPr>
+          <a:xfrm>
+            <a:off x="1005840" y="1874519"/>
+            <a:ext cx="4663440" cy="4069080"/>
+          </a:xfrm>
+          <a:prstGeom prst="rect">
+            <a:avLst/>
+          </a:prstGeom>
+          <a:noFill/>
+        </p:spPr>
+        <p:txBody>
+          <a:bodyPr wrap="none" lIns="0" tIns="0" rIns="0" bIns="0">
+            <a:spAutoFit/>
+          </a:bodyPr>
+          <a:lstStyle/>
+          <a:p>
+            <a:pPr>
+              <a:defRPr sz="1000" b="1">
+                <a:solidFill>
+                  <a:srgbClr val="FF2D55"/>
+                </a:solidFill>
+                <a:latin typeface="Segoe UI"/>
               </a:defRPr>
             </a:pPr>
             <a:r>
@@ -4277,121 +5936,133 @@
           <a:p>
             <a:pPr>
               <a:spcBef>
-                <a:spcPts val="1000"/>
+                <a:spcPts val="200"/>
               </a:spcBef>
-            </a:pPr>
-            <a:r>
-              <a:rPr b="1" sz="1200">
-                <a:solidFill>
-                  <a:srgbClr val="FF2948"/>
-                </a:solidFill>
-              </a:rPr>
-              <a:t>🚨 Fragmented Communication
-</a:t>
-            </a:r>
-            <a:r>
-              <a:rPr sz="1100">
-                <a:solidFill>
-                  <a:srgbClr val="9CA3AF"/>
-                </a:solidFill>
-              </a:rPr>
-              <a:t>Key action items get lost across disparate WhatsApp chats, scattered Google Docs, and endless email chains.</a:t>
+              <a:defRPr sz="1800" b="1">
+                <a:solidFill>
+                  <a:srgbClr val="0F1117"/>
+                </a:solidFill>
+                <a:latin typeface="Segoe UI"/>
+              </a:defRPr>
+            </a:pPr>
+            <a:r>
+              <a:t>Operational Bottlenecks in Campus Clubs</a:t>
             </a:r>
           </a:p>
           <a:p>
             <a:pPr>
               <a:spcBef>
-                <a:spcPts val="1000"/>
+                <a:spcPts val="800"/>
               </a:spcBef>
             </a:pPr>
             <a:r>
-              <a:rPr b="1" sz="1200">
-                <a:solidFill>
-                  <a:srgbClr val="FF2948"/>
-                </a:solidFill>
-              </a:rPr>
-              <a:t>🚨 Volunteer Overload &amp; Burnout
-</a:t>
-            </a:r>
-            <a:r>
-              <a:rPr sz="1100">
-                <a:solidFill>
-                  <a:srgbClr val="9CA3AF"/>
-                </a:solidFill>
-              </a:rPr>
-              <a:t>Tasks are delegated arbitrarily. Active members get overloaded while others remain completely idle.</a:t>
+              <a:rPr b="1" sz="1050">
+                <a:solidFill>
+                  <a:srgbClr val="FF2D55"/>
+                </a:solidFill>
+              </a:rPr>
+              <a:t>• Fragmented Coordination: </a:t>
+            </a:r>
+            <a:r>
+              <a:rPr sz="1000">
+                <a:solidFill>
+                  <a:srgbClr val="0F1117"/>
+                </a:solidFill>
+              </a:rPr>
+              <a:t>Tasks get buried across WhatsApp groups, Google Docs, and unmaintained spreadsheets.</a:t>
             </a:r>
           </a:p>
           <a:p>
             <a:pPr>
               <a:spcBef>
-                <a:spcPts val="1000"/>
+                <a:spcPts val="800"/>
               </a:spcBef>
             </a:pPr>
             <a:r>
-              <a:rPr b="1" sz="1200">
-                <a:solidFill>
-                  <a:srgbClr val="FF2948"/>
-                </a:solidFill>
-              </a:rPr>
-              <a:t>🚨 Meeting Note Decay
-</a:t>
-            </a:r>
-            <a:r>
-              <a:rPr sz="1100">
-                <a:solidFill>
-                  <a:srgbClr val="9CA3AF"/>
-                </a:solidFill>
-              </a:rPr>
-              <a:t>Transcripts and meeting recordings are rarely converted into atomic, prioritized deliverables with enforceable deadlines.</a:t>
+              <a:rPr b="1" sz="1050">
+                <a:solidFill>
+                  <a:srgbClr val="FF2D55"/>
+                </a:solidFill>
+              </a:rPr>
+              <a:t>• Volunteer Overload &amp; Burnout: </a:t>
+            </a:r>
+            <a:r>
+              <a:rPr sz="1000">
+                <a:solidFill>
+                  <a:srgbClr val="0F1117"/>
+                </a:solidFill>
+              </a:rPr>
+              <a:t>Delegation is arbitrary; eager volunteers get overloaded while others remain completely idle.</a:t>
             </a:r>
           </a:p>
           <a:p>
             <a:pPr>
               <a:spcBef>
-                <a:spcPts val="1000"/>
+                <a:spcPts val="800"/>
               </a:spcBef>
             </a:pPr>
             <a:r>
-              <a:rPr b="1" sz="1200">
-                <a:solidFill>
-                  <a:srgbClr val="FF2948"/>
-                </a:solidFill>
-              </a:rPr>
-              <a:t>🚨 Knowledge Loss Every Semester
-</a:t>
-            </a:r>
-            <a:r>
-              <a:rPr sz="1100">
-                <a:solidFill>
-                  <a:srgbClr val="9CA3AF"/>
-                </a:solidFill>
-              </a:rPr>
-              <a:t>Crucial guidelines, sponsorship packets, and rubrics vanish when executive teams rotate.</a:t>
-            </a:r>
-          </a:p>
-        </p:txBody>
-      </p:sp>
-      <p:sp>
-        <p:nvSpPr>
-          <p:cNvPr id="4" name="Rounded Rectangle 3"/>
+              <a:rPr b="1" sz="1050">
+                <a:solidFill>
+                  <a:srgbClr val="FF2D55"/>
+                </a:solidFill>
+              </a:rPr>
+              <a:t>• Meeting Note Decay: </a:t>
+            </a:r>
+            <a:r>
+              <a:rPr sz="1000">
+                <a:solidFill>
+                  <a:srgbClr val="0F1117"/>
+                </a:solidFill>
+              </a:rPr>
+              <a:t>Critical decisions made during meetings rarely translate into prioritized deliverables with deadlines.</a:t>
+            </a:r>
+          </a:p>
+          <a:p>
+            <a:pPr>
+              <a:spcBef>
+                <a:spcPts val="800"/>
+              </a:spcBef>
+            </a:pPr>
+            <a:r>
+              <a:rPr b="1" sz="1050">
+                <a:solidFill>
+                  <a:srgbClr val="FF2D55"/>
+                </a:solidFill>
+              </a:rPr>
+              <a:t>• Institutional Amnesia: </a:t>
+            </a:r>
+            <a:r>
+              <a:rPr sz="1000">
+                <a:solidFill>
+                  <a:srgbClr val="0F1117"/>
+                </a:solidFill>
+              </a:rPr>
+              <a:t>Club documents, sponsorship contracts, and judging rubrics vanish when student leadership rotates.</a:t>
+            </a:r>
+          </a:p>
+        </p:txBody>
+      </p:sp>
+      <p:sp>
+        <p:nvSpPr>
+          <p:cNvPr id="8" name="Rectangle 7"/>
           <p:cNvSpPr/>
           <p:nvPr/>
         </p:nvSpPr>
         <p:spPr>
           <a:xfrm>
-            <a:off x="6217920" y="1645920"/>
-            <a:ext cx="5212080" cy="4663440"/>
-          </a:xfrm>
-          <a:prstGeom prst="roundRect">
+            <a:off x="6217920" y="1691640"/>
+            <a:ext cx="5239512" cy="2148840"/>
+          </a:xfrm>
+          <a:prstGeom prst="rect">
             <a:avLst/>
           </a:prstGeom>
           <a:solidFill>
-            <a:srgbClr val="161B2C"/>
+            <a:srgbClr val="14161D"/>
           </a:solidFill>
           <a:ln w="19050">
             <a:solidFill>
-              <a:srgbClr val="2D3748"/>
+              <a:srgbClr val="2A2E3A"/>
             </a:solidFill>
           </a:ln>
         </p:spPr>
@@ -4410,114 +6081,286 @@
           </a:fontRef>
         </p:style>
         <p:txBody>
-          <a:bodyPr rtlCol="0" anchor="ctr" wrap="square" lIns="228600" tIns="182880" rIns="228600"/>
-          <a:lstStyle/>
-          <a:p>
-            <a:pPr algn="ctr">
-              <a:defRPr sz="1300" b="1">
-                <a:solidFill>
-                  <a:srgbClr val="3B82F6"/>
-                </a:solidFill>
-              </a:defRPr>
-            </a:pPr>
-            <a:r>
-              <a:t>THE PROPOSED SOLUTION: CLUBOPS-AI</a:t>
+          <a:bodyPr rtlCol="0" anchor="ctr"/>
+          <a:lstStyle/>
+          <a:p>
+            <a:pPr algn="ctr"/>
+          </a:p>
+        </p:txBody>
+      </p:sp>
+      <p:sp>
+        <p:nvSpPr>
+          <p:cNvPr id="9" name="TextBox 8"/>
+          <p:cNvSpPr txBox="1"/>
+          <p:nvPr/>
+        </p:nvSpPr>
+        <p:spPr>
+          <a:xfrm>
+            <a:off x="6492240" y="1874519"/>
+            <a:ext cx="4690872" cy="1783080"/>
+          </a:xfrm>
+          <a:prstGeom prst="rect">
+            <a:avLst/>
+          </a:prstGeom>
+          <a:noFill/>
+        </p:spPr>
+        <p:txBody>
+          <a:bodyPr wrap="none" lIns="0" tIns="0" rIns="0" bIns="0">
+            <a:spAutoFit/>
+          </a:bodyPr>
+          <a:lstStyle/>
+          <a:p>
+            <a:pPr>
+              <a:defRPr sz="1000" b="1">
+                <a:solidFill>
+                  <a:srgbClr val="FF2D55"/>
+                </a:solidFill>
+                <a:latin typeface="Segoe UI"/>
+              </a:defRPr>
+            </a:pPr>
+            <a:r>
+              <a:t>PROPOSED SOLUTION: CLUBOPS-AI</a:t>
             </a:r>
           </a:p>
           <a:p>
             <a:pPr>
               <a:spcBef>
-                <a:spcPts val="1000"/>
+                <a:spcPts val="200"/>
               </a:spcBef>
-            </a:pPr>
-            <a:r>
-              <a:rPr b="1" sz="1200">
+              <a:defRPr sz="1400" b="1">
+                <a:solidFill>
+                  <a:srgbClr val="FFFFFF"/>
+                </a:solidFill>
+                <a:latin typeface="Segoe UI"/>
+              </a:defRPr>
+            </a:pPr>
+            <a:r>
+              <a:t>Unified Autonomous Operations Center</a:t>
+            </a:r>
+          </a:p>
+          <a:p>
+            <a:pPr>
+              <a:spcBef>
+                <a:spcPts val="500"/>
+              </a:spcBef>
+            </a:pPr>
+            <a:r>
+              <a:rPr b="1" sz="1050">
                 <a:solidFill>
                   <a:srgbClr val="10B981"/>
                 </a:solidFill>
               </a:rPr>
-              <a:t>✅ Autonomous Operational Engine
-</a:t>
-            </a:r>
-            <a:r>
-              <a:rPr sz="1100">
+              <a:t>• Centralized Hub: </a:t>
+            </a:r>
+            <a:r>
+              <a:rPr sz="1000">
                 <a:solidFill>
                   <a:srgbClr val="9CA3AF"/>
                 </a:solidFill>
               </a:rPr>
-              <a:t>A unified control center orchestrating planning, meeting ingestion, task allocation, and risk management.</a:t>
+              <a:t>Single mission control for planning, tasks, volunteers, risks, documents, and notifications.</a:t>
             </a:r>
           </a:p>
           <a:p>
             <a:pPr>
               <a:spcBef>
-                <a:spcPts val="1000"/>
+                <a:spcPts val="500"/>
               </a:spcBef>
             </a:pPr>
             <a:r>
-              <a:rPr b="1" sz="1200">
+              <a:rPr b="1" sz="1050">
                 <a:solidFill>
                   <a:srgbClr val="10B981"/>
                 </a:solidFill>
               </a:rPr>
-              <a:t>✅ Smart Workload-Balanced Delegation
-</a:t>
-            </a:r>
-            <a:r>
-              <a:rPr sz="1100">
+              <a:t>• Smart Auto-Delegation: </a:t>
+            </a:r>
+            <a:r>
+              <a:rPr sz="1000">
                 <a:solidFill>
                   <a:srgbClr val="9CA3AF"/>
                 </a:solidFill>
               </a:rPr>
-              <a:t>NLP algorithms split multi-action statements, determine 4-tier priorities, and assign tasks to least-loaded volunteers.</a:t>
+              <a:t>Splits multi-sentence meeting notes and routes tasks to the least-loaded matching volunteer.</a:t>
+            </a:r>
+          </a:p>
+        </p:txBody>
+      </p:sp>
+      <p:sp>
+        <p:nvSpPr>
+          <p:cNvPr id="10" name="Rectangle 9"/>
+          <p:cNvSpPr/>
+          <p:nvPr/>
+        </p:nvSpPr>
+        <p:spPr>
+          <a:xfrm>
+            <a:off x="6217920" y="4023360"/>
+            <a:ext cx="5239512" cy="2148840"/>
+          </a:xfrm>
+          <a:prstGeom prst="rect">
+            <a:avLst/>
+          </a:prstGeom>
+          <a:solidFill>
+            <a:srgbClr val="14161D"/>
+          </a:solidFill>
+          <a:ln w="19050">
+            <a:solidFill>
+              <a:srgbClr val="2A2E3A"/>
+            </a:solidFill>
+          </a:ln>
+        </p:spPr>
+        <p:style>
+          <a:lnRef idx="1">
+            <a:schemeClr val="accent1"/>
+          </a:lnRef>
+          <a:fillRef idx="3">
+            <a:schemeClr val="accent1"/>
+          </a:fillRef>
+          <a:effectRef idx="2">
+            <a:schemeClr val="accent1"/>
+          </a:effectRef>
+          <a:fontRef idx="minor">
+            <a:schemeClr val="lt1"/>
+          </a:fontRef>
+        </p:style>
+        <p:txBody>
+          <a:bodyPr rtlCol="0" anchor="ctr"/>
+          <a:lstStyle/>
+          <a:p>
+            <a:pPr algn="ctr"/>
+          </a:p>
+        </p:txBody>
+      </p:sp>
+      <p:sp>
+        <p:nvSpPr>
+          <p:cNvPr id="11" name="TextBox 10"/>
+          <p:cNvSpPr txBox="1"/>
+          <p:nvPr/>
+        </p:nvSpPr>
+        <p:spPr>
+          <a:xfrm>
+            <a:off x="6492240" y="4206240"/>
+            <a:ext cx="4690872" cy="1783080"/>
+          </a:xfrm>
+          <a:prstGeom prst="rect">
+            <a:avLst/>
+          </a:prstGeom>
+          <a:noFill/>
+        </p:spPr>
+        <p:txBody>
+          <a:bodyPr wrap="none" lIns="0" tIns="0" rIns="0" bIns="0">
+            <a:spAutoFit/>
+          </a:bodyPr>
+          <a:lstStyle/>
+          <a:p>
+            <a:pPr>
+              <a:defRPr sz="1000" b="1">
+                <a:solidFill>
+                  <a:srgbClr val="FF2D55"/>
+                </a:solidFill>
+                <a:latin typeface="Segoe UI"/>
+              </a:defRPr>
+            </a:pPr>
+            <a:r>
+              <a:t>KEY IDEA BEHIND THE SOLUTION</a:t>
             </a:r>
           </a:p>
           <a:p>
             <a:pPr>
               <a:spcBef>
-                <a:spcPts val="1000"/>
+                <a:spcPts val="200"/>
               </a:spcBef>
-            </a:pPr>
-            <a:r>
-              <a:rPr b="1" sz="1200">
-                <a:solidFill>
-                  <a:srgbClr val="10B981"/>
-                </a:solidFill>
-              </a:rPr>
-              <a:t>✅ Grounded RAG Repository
-</a:t>
-            </a:r>
-            <a:r>
-              <a:rPr sz="1100">
+              <a:defRPr sz="1400" b="1">
+                <a:solidFill>
+                  <a:srgbClr val="FFFFFF"/>
+                </a:solidFill>
+                <a:latin typeface="Segoe UI"/>
+              </a:defRPr>
+            </a:pPr>
+            <a:r>
+              <a:t>Grounded Intelligence + Autonomous Workflows</a:t>
+            </a:r>
+          </a:p>
+          <a:p>
+            <a:pPr>
+              <a:spcBef>
+                <a:spcPts val="500"/>
+              </a:spcBef>
+            </a:pPr>
+            <a:r>
+              <a:rPr b="1" sz="1050">
+                <a:solidFill>
+                  <a:srgbClr val="06B6D4"/>
+                </a:solidFill>
+              </a:rPr>
+              <a:t>• Grounded RAG: </a:t>
+            </a:r>
+            <a:r>
+              <a:rPr sz="1000">
                 <a:solidFill>
                   <a:srgbClr val="9CA3AF"/>
                 </a:solidFill>
               </a:rPr>
-              <a:t>Supports PDF, DOCX, DOC, and TXT with cosine-similarity chunk search and strict verbatim citations (zero hallucination).</a:t>
+              <a:t>Answers queries strictly from club docs (.pdf, .docx, .doc) with verbatim citations (zero hallucination).</a:t>
             </a:r>
           </a:p>
           <a:p>
             <a:pPr>
               <a:spcBef>
-                <a:spcPts val="1000"/>
+                <a:spcPts val="500"/>
               </a:spcBef>
             </a:pPr>
             <a:r>
-              <a:rPr b="1" sz="1200">
-                <a:solidFill>
-                  <a:srgbClr val="10B981"/>
-                </a:solidFill>
-              </a:rPr>
-              <a:t>✅ Conversational Agentic Workflows
-</a:t>
-            </a:r>
-            <a:r>
-              <a:rPr sz="1100">
+              <a:rPr b="1" sz="1050">
+                <a:solidFill>
+                  <a:srgbClr val="06B6D4"/>
+                </a:solidFill>
+              </a:rPr>
+              <a:t>• Agentic Workflows: </a:t>
+            </a:r>
+            <a:r>
+              <a:rPr sz="1000">
                 <a:solidFill>
                   <a:srgbClr val="9CA3AF"/>
                 </a:solidFill>
               </a:rPr>
-              <a:t>Empowers organizers to execute live platform mutations through natural-language commands.</a:t>
+              <a:t>Natural language commands trigger live database actions via 6 specialized backend tools.</a:t>
+            </a:r>
+          </a:p>
+        </p:txBody>
+      </p:sp>
+      <p:sp>
+        <p:nvSpPr>
+          <p:cNvPr id="12" name="TextBox 11"/>
+          <p:cNvSpPr txBox="1"/>
+          <p:nvPr/>
+        </p:nvSpPr>
+        <p:spPr>
+          <a:xfrm>
+            <a:off x="731520" y="6473952"/>
+            <a:ext cx="10698480" cy="274320"/>
+          </a:xfrm>
+          <a:prstGeom prst="rect">
+            <a:avLst/>
+          </a:prstGeom>
+          <a:noFill/>
+        </p:spPr>
+        <p:txBody>
+          <a:bodyPr wrap="none" lIns="0" tIns="0" rIns="0" bIns="0">
+            <a:spAutoFit/>
+          </a:bodyPr>
+          <a:lstStyle/>
+          <a:p>
+            <a:pPr>
+              <a:defRPr sz="900">
+                <a:solidFill>
+                  <a:srgbClr val="6E7382"/>
+                </a:solidFill>
+                <a:latin typeface="Segoe UI"/>
+              </a:defRPr>
+            </a:pPr>
+            <a:r>
+              <a:t>ClubOps AI  •  Bit N Build 2026 Hackathon  •  Slide 2 of 12</a:t>
             </a:r>
           </a:p>
         </p:txBody>
@@ -4536,7 +6379,7 @@
     <p:bg>
       <p:bgPr>
         <a:solidFill>
-          <a:srgbClr val="0B0F19"/>
+          <a:srgbClr val="0B0C10"/>
         </a:solidFill>
         <a:effectLst/>
       </p:bgPr>
@@ -4556,8 +6399,8 @@
         </p:nvSpPr>
         <p:spPr>
           <a:xfrm>
-            <a:off x="731520" y="365760"/>
-            <a:ext cx="10698480" cy="1005840"/>
+            <a:off x="731520" y="320040"/>
+            <a:ext cx="411480" cy="320040"/>
           </a:xfrm>
           <a:prstGeom prst="rect">
             <a:avLst/>
@@ -4565,7 +6408,7 @@
           <a:noFill/>
         </p:spPr>
         <p:txBody>
-          <a:bodyPr wrap="square" lIns="0" tIns="0" rIns="0" bIns="0">
+          <a:bodyPr wrap="none" lIns="0" tIns="0" rIns="0" bIns="0">
             <a:spAutoFit/>
           </a:bodyPr>
           <a:lstStyle/>
@@ -4573,51 +6416,145 @@
             <a:pPr>
               <a:defRPr sz="1100" b="1">
                 <a:solidFill>
-                  <a:srgbClr val="06B6D4"/>
-                </a:solidFill>
-              </a:defRPr>
-            </a:pPr>
-            <a:r>
-              <a:t>SECTION 03 / TECHNOLOGY STACK &amp; ARCHITECTURE</a:t>
-            </a:r>
-          </a:p>
-          <a:p>
-            <a:pPr>
-              <a:spcBef>
-                <a:spcPts val="400"/>
-              </a:spcBef>
-              <a:defRPr sz="2400" b="1">
+                  <a:srgbClr val="FF2D55"/>
+                </a:solidFill>
+                <a:latin typeface="Segoe UI"/>
+              </a:defRPr>
+            </a:pPr>
+            <a:r>
+              <a:t>[C]</a:t>
+            </a:r>
+          </a:p>
+        </p:txBody>
+      </p:sp>
+      <p:sp>
+        <p:nvSpPr>
+          <p:cNvPr id="3" name="TextBox 2"/>
+          <p:cNvSpPr txBox="1"/>
+          <p:nvPr/>
+        </p:nvSpPr>
+        <p:spPr>
+          <a:xfrm>
+            <a:off x="1188720" y="320040"/>
+            <a:ext cx="10241280" cy="320040"/>
+          </a:xfrm>
+          <a:prstGeom prst="rect">
+            <a:avLst/>
+          </a:prstGeom>
+          <a:noFill/>
+        </p:spPr>
+        <p:txBody>
+          <a:bodyPr wrap="none" lIns="0" tIns="0" rIns="0" bIns="0">
+            <a:spAutoFit/>
+          </a:bodyPr>
+          <a:lstStyle/>
+          <a:p>
+            <a:pPr>
+              <a:defRPr sz="950" b="1">
+                <a:solidFill>
+                  <a:srgbClr val="9CA3AF"/>
+                </a:solidFill>
+                <a:latin typeface="Segoe UI"/>
+              </a:defRPr>
+            </a:pPr>
+            <a:r>
+              <a:t>CLUBOPS  •  BIT N BUILD 2026  •  FULL-STACK ARCHITECTURE</a:t>
+            </a:r>
+          </a:p>
+        </p:txBody>
+      </p:sp>
+      <p:sp>
+        <p:nvSpPr>
+          <p:cNvPr id="4" name="TextBox 3"/>
+          <p:cNvSpPr txBox="1"/>
+          <p:nvPr/>
+        </p:nvSpPr>
+        <p:spPr>
+          <a:xfrm>
+            <a:off x="731520" y="621792"/>
+            <a:ext cx="10698480" cy="594360"/>
+          </a:xfrm>
+          <a:prstGeom prst="rect">
+            <a:avLst/>
+          </a:prstGeom>
+          <a:noFill/>
+        </p:spPr>
+        <p:txBody>
+          <a:bodyPr wrap="none" lIns="0" tIns="0" rIns="0" bIns="0">
+            <a:spAutoFit/>
+          </a:bodyPr>
+          <a:lstStyle/>
+          <a:p>
+            <a:pPr>
+              <a:defRPr sz="2100" b="1">
                 <a:solidFill>
                   <a:srgbClr val="FFFFFF"/>
                 </a:solidFill>
-              </a:defRPr>
-            </a:pPr>
-            <a:r>
-              <a:t>End-to-End Enterprise Grade System Architecture</a:t>
-            </a:r>
-          </a:p>
-        </p:txBody>
-      </p:sp>
-      <p:sp>
-        <p:nvSpPr>
-          <p:cNvPr id="3" name="Rounded Rectangle 2"/>
+                <a:latin typeface="Segoe UI"/>
+              </a:defRPr>
+            </a:pPr>
+            <a:r>
+              <a:t>Multi-Tier Software Architecture</a:t>
+            </a:r>
+          </a:p>
+        </p:txBody>
+      </p:sp>
+      <p:sp>
+        <p:nvSpPr>
+          <p:cNvPr id="5" name="TextBox 4"/>
+          <p:cNvSpPr txBox="1"/>
+          <p:nvPr/>
+        </p:nvSpPr>
+        <p:spPr>
+          <a:xfrm>
+            <a:off x="731520" y="1188720"/>
+            <a:ext cx="10698480" cy="320040"/>
+          </a:xfrm>
+          <a:prstGeom prst="rect">
+            <a:avLst/>
+          </a:prstGeom>
+          <a:noFill/>
+        </p:spPr>
+        <p:txBody>
+          <a:bodyPr wrap="none" lIns="0" tIns="0" rIns="0" bIns="0">
+            <a:spAutoFit/>
+          </a:bodyPr>
+          <a:lstStyle/>
+          <a:p>
+            <a:pPr>
+              <a:defRPr sz="1150">
+                <a:solidFill>
+                  <a:srgbClr val="9CA3AF"/>
+                </a:solidFill>
+                <a:latin typeface="Segoe UI"/>
+              </a:defRPr>
+            </a:pPr>
+            <a:r>
+              <a:t>Clear separation of concerns across client, API services, AI pipelines, and data storage.</a:t>
+            </a:r>
+          </a:p>
+        </p:txBody>
+      </p:sp>
+      <p:sp>
+        <p:nvSpPr>
+          <p:cNvPr id="6" name="Rectangle 5"/>
           <p:cNvSpPr/>
           <p:nvPr/>
         </p:nvSpPr>
         <p:spPr>
           <a:xfrm>
-            <a:off x="731520" y="1645920"/>
-            <a:ext cx="3291840" cy="4663440"/>
-          </a:xfrm>
-          <a:prstGeom prst="roundRect">
+            <a:off x="731520" y="1691640"/>
+            <a:ext cx="2487168" cy="4480560"/>
+          </a:xfrm>
+          <a:prstGeom prst="rect">
             <a:avLst/>
           </a:prstGeom>
           <a:solidFill>
-            <a:srgbClr val="161B2C"/>
+            <a:srgbClr val="14161D"/>
           </a:solidFill>
           <a:ln w="19050">
             <a:solidFill>
-              <a:srgbClr val="2D3748"/>
+              <a:srgbClr val="2A2E3A"/>
             </a:solidFill>
           </a:ln>
         </p:spPr>
@@ -4636,162 +6573,157 @@
           </a:fontRef>
         </p:style>
         <p:txBody>
-          <a:bodyPr rtlCol="0" anchor="ctr" wrap="square" lIns="228600" tIns="182880" rIns="228600"/>
-          <a:lstStyle/>
-          <a:p>
-            <a:pPr algn="ctr">
-              <a:defRPr sz="1300" b="1">
-                <a:solidFill>
-                  <a:srgbClr val="3B82F6"/>
-                </a:solidFill>
-              </a:defRPr>
-            </a:pPr>
-            <a:r>
-              <a:t>TECHNOLOGY STACK</a:t>
+          <a:bodyPr rtlCol="0" anchor="ctr"/>
+          <a:lstStyle/>
+          <a:p>
+            <a:pPr algn="ctr"/>
+          </a:p>
+        </p:txBody>
+      </p:sp>
+      <p:sp>
+        <p:nvSpPr>
+          <p:cNvPr id="7" name="TextBox 6"/>
+          <p:cNvSpPr txBox="1"/>
+          <p:nvPr/>
+        </p:nvSpPr>
+        <p:spPr>
+          <a:xfrm>
+            <a:off x="914400" y="1874519"/>
+            <a:ext cx="2121408" cy="4069080"/>
+          </a:xfrm>
+          <a:prstGeom prst="rect">
+            <a:avLst/>
+          </a:prstGeom>
+          <a:noFill/>
+        </p:spPr>
+        <p:txBody>
+          <a:bodyPr wrap="none" lIns="0" tIns="0" rIns="0" bIns="0">
+            <a:spAutoFit/>
+          </a:bodyPr>
+          <a:lstStyle/>
+          <a:p>
+            <a:pPr>
+              <a:defRPr sz="1200" b="1">
+                <a:solidFill>
+                  <a:srgbClr val="FF2D55"/>
+                </a:solidFill>
+                <a:latin typeface="Segoe UI"/>
+              </a:defRPr>
+            </a:pPr>
+            <a:r>
+              <a:t>FRONTEND SPA</a:t>
             </a:r>
           </a:p>
           <a:p>
             <a:pPr>
               <a:spcBef>
-                <a:spcPts val="1000"/>
+                <a:spcPts val="200"/>
               </a:spcBef>
-            </a:pPr>
-            <a:r>
-              <a:rPr b="1" sz="1150">
-                <a:solidFill>
-                  <a:srgbClr val="3B82F6"/>
-                </a:solidFill>
-              </a:rPr>
-              <a:t>Frontend Layer
+              <a:defRPr sz="1000">
+                <a:solidFill>
+                  <a:srgbClr val="FFFFFF"/>
+                </a:solidFill>
+                <a:latin typeface="Segoe UI"/>
+              </a:defRPr>
+            </a:pPr>
+            <a:r>
+              <a:t>Lead: Krish J. Panchal</a:t>
+            </a:r>
+          </a:p>
+          <a:p>
+            <a:pPr>
+              <a:spcBef>
+                <a:spcPts val="1400"/>
+              </a:spcBef>
+            </a:pPr>
+            <a:r>
+              <a:rPr b="1" sz="1100">
+                <a:solidFill>
+                  <a:srgbClr val="06B6D4"/>
+                </a:solidFill>
+              </a:rPr>
+              <a:t>• React 19 &amp; Vite
 </a:t>
             </a:r>
             <a:r>
-              <a:rPr sz="1050">
+              <a:rPr sz="1000">
                 <a:solidFill>
                   <a:srgbClr val="9CA3AF"/>
                 </a:solidFill>
               </a:rPr>
-              <a:t>React 19, Vite, React Router 7, Lucide Icons, Custom Brutalist Editorial CSS</a:t>
+              <a:t>Component architecture with sub-350ms hot builds.</a:t>
             </a:r>
           </a:p>
           <a:p>
             <a:pPr>
               <a:spcBef>
-                <a:spcPts val="1000"/>
+                <a:spcPts val="1400"/>
               </a:spcBef>
             </a:pPr>
             <a:r>
-              <a:rPr b="1" sz="1150">
-                <a:solidFill>
-                  <a:srgbClr val="3B82F6"/>
-                </a:solidFill>
-              </a:rPr>
-              <a:t>Backend Layer
+              <a:rPr b="1" sz="1100">
+                <a:solidFill>
+                  <a:srgbClr val="06B6D4"/>
+                </a:solidFill>
+              </a:rPr>
+              <a:t>• Design System
 </a:t>
             </a:r>
             <a:r>
-              <a:rPr sz="1050">
+              <a:rPr sz="1000">
                 <a:solidFill>
                   <a:srgbClr val="9CA3AF"/>
                 </a:solidFill>
               </a:rPr>
-              <a:t>Node.js (ES6+), Express.js 5.2, REST API, JWT Auth, Bcrypt</a:t>
+              <a:t>Neo-brutalist dark editorial UI with Lucide icons.</a:t>
             </a:r>
           </a:p>
           <a:p>
             <a:pPr>
               <a:spcBef>
-                <a:spcPts val="1000"/>
+                <a:spcPts val="1400"/>
               </a:spcBef>
             </a:pPr>
             <a:r>
-              <a:rPr b="1" sz="1150">
-                <a:solidFill>
-                  <a:srgbClr val="3B82F6"/>
-                </a:solidFill>
-              </a:rPr>
-              <a:t>Database Layer
+              <a:rPr b="1" sz="1100">
+                <a:solidFill>
+                  <a:srgbClr val="06B6D4"/>
+                </a:solidFill>
+              </a:rPr>
+              <a:t>• Context State
 </a:t>
             </a:r>
             <a:r>
-              <a:rPr sz="1050">
+              <a:rPr sz="1000">
                 <a:solidFill>
                   <a:srgbClr val="9CA3AF"/>
                 </a:solidFill>
               </a:rPr>
-              <a:t>MongoDB 7.6, Mongoose ODM, Multi-Schema Relational Indexing</a:t>
-            </a:r>
-          </a:p>
-          <a:p>
-            <a:pPr>
-              <a:spcBef>
-                <a:spcPts val="1000"/>
-              </a:spcBef>
-            </a:pPr>
-            <a:r>
-              <a:rPr b="1" sz="1150">
-                <a:solidFill>
-                  <a:srgbClr val="3B82F6"/>
-                </a:solidFill>
-              </a:rPr>
-              <a:t>Document Processing
-</a:t>
-            </a:r>
-            <a:r>
-              <a:rPr sz="1050">
-                <a:solidFill>
-                  <a:srgbClr val="9CA3AF"/>
-                </a:solidFill>
-              </a:rPr>
-              <a:t>Mammoth (.docx/.doc), pdf-parse (.pdf), Multer Storage</a:t>
-            </a:r>
-          </a:p>
-          <a:p>
-            <a:pPr>
-              <a:spcBef>
-                <a:spcPts val="1000"/>
-              </a:spcBef>
-            </a:pPr>
-            <a:r>
-              <a:rPr b="1" sz="1150">
-                <a:solidFill>
-                  <a:srgbClr val="3B82F6"/>
-                </a:solidFill>
-              </a:rPr>
-              <a:t>AI &amp; Vector RAG
-</a:t>
-            </a:r>
-            <a:r>
-              <a:rPr sz="1050">
-                <a:solidFill>
-                  <a:srgbClr val="9CA3AF"/>
-                </a:solidFill>
-              </a:rPr>
-              <a:t>Google Gemini Flash API, Custom In-Memory &amp; MongoDB Vector Embeddings</a:t>
-            </a:r>
-          </a:p>
-        </p:txBody>
-      </p:sp>
-      <p:sp>
-        <p:nvSpPr>
-          <p:cNvPr id="4" name="Rounded Rectangle 3"/>
+              <a:t>Global AuthContext &amp; EventContext state sync.</a:t>
+            </a:r>
+          </a:p>
+        </p:txBody>
+      </p:sp>
+      <p:sp>
+        <p:nvSpPr>
+          <p:cNvPr id="8" name="Rectangle 7"/>
           <p:cNvSpPr/>
           <p:nvPr/>
         </p:nvSpPr>
         <p:spPr>
           <a:xfrm>
-            <a:off x="4297680" y="1645920"/>
-            <a:ext cx="7132320" cy="4663440"/>
-          </a:xfrm>
-          <a:prstGeom prst="roundRect">
+            <a:off x="3447288" y="1691640"/>
+            <a:ext cx="2487168" cy="4480560"/>
+          </a:xfrm>
+          <a:prstGeom prst="rect">
             <a:avLst/>
           </a:prstGeom>
           <a:solidFill>
-            <a:srgbClr val="161B2C"/>
+            <a:srgbClr val="14161D"/>
           </a:solidFill>
           <a:ln w="19050">
             <a:solidFill>
-              <a:srgbClr val="2D3748"/>
+              <a:srgbClr val="2A2E3A"/>
             </a:solidFill>
           </a:ln>
         </p:spPr>
@@ -4810,138 +6742,507 @@
           </a:fontRef>
         </p:style>
         <p:txBody>
-          <a:bodyPr rtlCol="0" anchor="ctr" wrap="square" lIns="228600" tIns="182880" rIns="228600"/>
-          <a:lstStyle/>
-          <a:p>
-            <a:pPr algn="ctr">
-              <a:defRPr sz="1300" b="1">
-                <a:solidFill>
-                  <a:srgbClr val="3B82F6"/>
-                </a:solidFill>
-              </a:defRPr>
-            </a:pPr>
-            <a:r>
-              <a:t>SYSTEM ARCHITECTURE &amp; INTERACTION WORKFLOW</a:t>
+          <a:bodyPr rtlCol="0" anchor="ctr"/>
+          <a:lstStyle/>
+          <a:p>
+            <a:pPr algn="ctr"/>
+          </a:p>
+        </p:txBody>
+      </p:sp>
+      <p:sp>
+        <p:nvSpPr>
+          <p:cNvPr id="9" name="TextBox 8"/>
+          <p:cNvSpPr txBox="1"/>
+          <p:nvPr/>
+        </p:nvSpPr>
+        <p:spPr>
+          <a:xfrm>
+            <a:off x="3630168" y="1874519"/>
+            <a:ext cx="2121408" cy="4069080"/>
+          </a:xfrm>
+          <a:prstGeom prst="rect">
+            <a:avLst/>
+          </a:prstGeom>
+          <a:noFill/>
+        </p:spPr>
+        <p:txBody>
+          <a:bodyPr wrap="none" lIns="0" tIns="0" rIns="0" bIns="0">
+            <a:spAutoFit/>
+          </a:bodyPr>
+          <a:lstStyle/>
+          <a:p>
+            <a:pPr>
+              <a:defRPr sz="1200" b="1">
+                <a:solidFill>
+                  <a:srgbClr val="FF2D55"/>
+                </a:solidFill>
+                <a:latin typeface="Segoe UI"/>
+              </a:defRPr>
+            </a:pPr>
+            <a:r>
+              <a:t>BACKEND REST API</a:t>
             </a:r>
           </a:p>
           <a:p>
             <a:pPr>
               <a:spcBef>
-                <a:spcPts val="800"/>
+                <a:spcPts val="200"/>
               </a:spcBef>
-            </a:pPr>
-            <a:r>
-              <a:rPr b="1" sz="1150">
+              <a:defRPr sz="1000">
+                <a:solidFill>
+                  <a:srgbClr val="FFFFFF"/>
+                </a:solidFill>
+                <a:latin typeface="Segoe UI"/>
+              </a:defRPr>
+            </a:pPr>
+            <a:r>
+              <a:t>Lead: Krish M. Patel</a:t>
+            </a:r>
+          </a:p>
+          <a:p>
+            <a:pPr>
+              <a:spcBef>
+                <a:spcPts val="1400"/>
+              </a:spcBef>
+            </a:pPr>
+            <a:r>
+              <a:rPr b="1" sz="1100">
                 <a:solidFill>
                   <a:srgbClr val="06B6D4"/>
                 </a:solidFill>
               </a:rPr>
-              <a:t>⚙️ 1. Client Layer (React 19 + Vite)
+              <a:t>• Node &amp; Express 5
 </a:t>
             </a:r>
             <a:r>
-              <a:rPr sz="1050">
+              <a:rPr sz="1000">
                 <a:solidFill>
                   <a:srgbClr val="9CA3AF"/>
                 </a:solidFill>
               </a:rPr>
-              <a:t>High-performance SPA with contextual state (AuthContext, EventContext) delivering sub-350ms hot-reloaded responsiveness.</a:t>
+              <a:t>High-throughput asynchronous REST gateway.</a:t>
             </a:r>
           </a:p>
           <a:p>
             <a:pPr>
               <a:spcBef>
-                <a:spcPts val="800"/>
+                <a:spcPts val="1400"/>
               </a:spcBef>
             </a:pPr>
             <a:r>
-              <a:rPr b="1" sz="1150">
+              <a:rPr b="1" sz="1100">
                 <a:solidFill>
                   <a:srgbClr val="06B6D4"/>
                 </a:solidFill>
               </a:rPr>
-              <a:t>⚙️ 2. Application REST Gateway (Express 5)
+              <a:t>• Security &amp; Auth
 </a:t>
             </a:r>
             <a:r>
-              <a:rPr sz="1050">
+              <a:rPr sz="1000">
                 <a:solidFill>
                   <a:srgbClr val="9CA3AF"/>
                 </a:solidFill>
               </a:rPr>
-              <a:t>Secured endpoints with JWT role verification (Admin, Organizer, Member) enforcing strict schema validation.</a:t>
+              <a:t>BCrypt 10 salt rounds + Signed JWT bearer tokens.</a:t>
             </a:r>
           </a:p>
           <a:p>
             <a:pPr>
               <a:spcBef>
-                <a:spcPts val="800"/>
+                <a:spcPts val="1400"/>
               </a:spcBef>
             </a:pPr>
             <a:r>
-              <a:rPr b="1" sz="1150">
+              <a:rPr b="1" sz="1100">
                 <a:solidFill>
                   <a:srgbClr val="06B6D4"/>
                 </a:solidFill>
               </a:rPr>
-              <a:t>⚙️ 3. Intelligent Meeting Pipeline
+              <a:t>• Data Architecture
 </a:t>
             </a:r>
             <a:r>
-              <a:rPr sz="1050">
+              <a:rPr sz="1000">
                 <a:solidFill>
                   <a:srgbClr val="9CA3AF"/>
                 </a:solidFill>
               </a:rPr>
-              <a:t>Raw transcript -&gt; Gemini NLP splitting -&gt; cleanTaskTitle -&gt; Relative deadline normalization -&gt; Least-loaded volunteer dispatch.</a:t>
+              <a:t>11 Mongoose relational schemas &amp; indexes.</a:t>
+            </a:r>
+          </a:p>
+        </p:txBody>
+      </p:sp>
+      <p:sp>
+        <p:nvSpPr>
+          <p:cNvPr id="10" name="Rectangle 9"/>
+          <p:cNvSpPr/>
+          <p:nvPr/>
+        </p:nvSpPr>
+        <p:spPr>
+          <a:xfrm>
+            <a:off x="6163056" y="1691640"/>
+            <a:ext cx="2487168" cy="4480560"/>
+          </a:xfrm>
+          <a:prstGeom prst="rect">
+            <a:avLst/>
+          </a:prstGeom>
+          <a:solidFill>
+            <a:srgbClr val="14161D"/>
+          </a:solidFill>
+          <a:ln w="19050">
+            <a:solidFill>
+              <a:srgbClr val="2A2E3A"/>
+            </a:solidFill>
+          </a:ln>
+        </p:spPr>
+        <p:style>
+          <a:lnRef idx="1">
+            <a:schemeClr val="accent1"/>
+          </a:lnRef>
+          <a:fillRef idx="3">
+            <a:schemeClr val="accent1"/>
+          </a:fillRef>
+          <a:effectRef idx="2">
+            <a:schemeClr val="accent1"/>
+          </a:effectRef>
+          <a:fontRef idx="minor">
+            <a:schemeClr val="lt1"/>
+          </a:fontRef>
+        </p:style>
+        <p:txBody>
+          <a:bodyPr rtlCol="0" anchor="ctr"/>
+          <a:lstStyle/>
+          <a:p>
+            <a:pPr algn="ctr"/>
+          </a:p>
+        </p:txBody>
+      </p:sp>
+      <p:sp>
+        <p:nvSpPr>
+          <p:cNvPr id="11" name="TextBox 10"/>
+          <p:cNvSpPr txBox="1"/>
+          <p:nvPr/>
+        </p:nvSpPr>
+        <p:spPr>
+          <a:xfrm>
+            <a:off x="6345936" y="1874519"/>
+            <a:ext cx="2121408" cy="4069080"/>
+          </a:xfrm>
+          <a:prstGeom prst="rect">
+            <a:avLst/>
+          </a:prstGeom>
+          <a:noFill/>
+        </p:spPr>
+        <p:txBody>
+          <a:bodyPr wrap="none" lIns="0" tIns="0" rIns="0" bIns="0">
+            <a:spAutoFit/>
+          </a:bodyPr>
+          <a:lstStyle/>
+          <a:p>
+            <a:pPr>
+              <a:defRPr sz="1200" b="1">
+                <a:solidFill>
+                  <a:srgbClr val="FF2D55"/>
+                </a:solidFill>
+                <a:latin typeface="Segoe UI"/>
+              </a:defRPr>
+            </a:pPr>
+            <a:r>
+              <a:t>RAG PIPELINE</a:t>
             </a:r>
           </a:p>
           <a:p>
             <a:pPr>
               <a:spcBef>
-                <a:spcPts val="800"/>
+                <a:spcPts val="200"/>
               </a:spcBef>
-            </a:pPr>
-            <a:r>
-              <a:rPr b="1" sz="1150">
+              <a:defRPr sz="1000">
+                <a:solidFill>
+                  <a:srgbClr val="FFFFFF"/>
+                </a:solidFill>
+                <a:latin typeface="Segoe UI"/>
+              </a:defRPr>
+            </a:pPr>
+            <a:r>
+              <a:t>Lead: Krish K. Patel</a:t>
+            </a:r>
+          </a:p>
+          <a:p>
+            <a:pPr>
+              <a:spcBef>
+                <a:spcPts val="1400"/>
+              </a:spcBef>
+            </a:pPr>
+            <a:r>
+              <a:rPr b="1" sz="1100">
                 <a:solidFill>
                   <a:srgbClr val="06B6D4"/>
                 </a:solidFill>
               </a:rPr>
-              <a:t>⚙️ 4. Grounded RAG Vector Pipeline
+              <a:t>• Multi-Format Docs
 </a:t>
             </a:r>
             <a:r>
-              <a:rPr sz="1050">
+              <a:rPr sz="1000">
                 <a:solidFill>
                   <a:srgbClr val="9CA3AF"/>
                 </a:solidFill>
               </a:rPr>
-              <a:t>Multi-format document upload (.pdf, .docx, .doc) -&gt; Chunker -&gt; Semantic Embedding -&gt; Cosine Similarity -&gt; Cited Q&amp;A.</a:t>
+              <a:t>Native parsers for .pdf, .docx, .doc, and .txt.</a:t>
             </a:r>
           </a:p>
           <a:p>
             <a:pPr>
               <a:spcBef>
-                <a:spcPts val="800"/>
+                <a:spcPts val="1400"/>
               </a:spcBef>
             </a:pPr>
             <a:r>
-              <a:rPr b="1" sz="1150">
+              <a:rPr b="1" sz="1100">
                 <a:solidFill>
                   <a:srgbClr val="06B6D4"/>
                 </a:solidFill>
               </a:rPr>
-              <a:t>⚙️ 5. Autonomous Agent Tool Execution
+              <a:t>• Chunker &amp; Embed
 </a:t>
             </a:r>
             <a:r>
-              <a:rPr sz="1050">
+              <a:rPr sz="1000">
                 <a:solidFill>
                   <a:srgbClr val="9CA3AF"/>
                 </a:solidFill>
               </a:rPr>
-              <a:t>Natural-language intent parser maps user prompts to 6 live tools (createTask, updateTask, createRisk, sendNotification, queryKnowledge, planEvent).</a:t>
+              <a:t>Sliding window semantic chunker with overlap.</a:t>
+            </a:r>
+          </a:p>
+          <a:p>
+            <a:pPr>
+              <a:spcBef>
+                <a:spcPts val="1400"/>
+              </a:spcBef>
+            </a:pPr>
+            <a:r>
+              <a:rPr b="1" sz="1100">
+                <a:solidFill>
+                  <a:srgbClr val="06B6D4"/>
+                </a:solidFill>
+              </a:rPr>
+              <a:t>• Cosine Retrieval
+</a:t>
+            </a:r>
+            <a:r>
+              <a:rPr sz="1000">
+                <a:solidFill>
+                  <a:srgbClr val="9CA3AF"/>
+                </a:solidFill>
+              </a:rPr>
+              <a:t>In-process vector search with verbatim citations.</a:t>
+            </a:r>
+          </a:p>
+        </p:txBody>
+      </p:sp>
+      <p:sp>
+        <p:nvSpPr>
+          <p:cNvPr id="12" name="Rectangle 11"/>
+          <p:cNvSpPr/>
+          <p:nvPr/>
+        </p:nvSpPr>
+        <p:spPr>
+          <a:xfrm>
+            <a:off x="8878824" y="1691640"/>
+            <a:ext cx="2487168" cy="4480560"/>
+          </a:xfrm>
+          <a:prstGeom prst="rect">
+            <a:avLst/>
+          </a:prstGeom>
+          <a:solidFill>
+            <a:srgbClr val="14161D"/>
+          </a:solidFill>
+          <a:ln w="19050">
+            <a:solidFill>
+              <a:srgbClr val="2A2E3A"/>
+            </a:solidFill>
+          </a:ln>
+        </p:spPr>
+        <p:style>
+          <a:lnRef idx="1">
+            <a:schemeClr val="accent1"/>
+          </a:lnRef>
+          <a:fillRef idx="3">
+            <a:schemeClr val="accent1"/>
+          </a:fillRef>
+          <a:effectRef idx="2">
+            <a:schemeClr val="accent1"/>
+          </a:effectRef>
+          <a:fontRef idx="minor">
+            <a:schemeClr val="lt1"/>
+          </a:fontRef>
+        </p:style>
+        <p:txBody>
+          <a:bodyPr rtlCol="0" anchor="ctr"/>
+          <a:lstStyle/>
+          <a:p>
+            <a:pPr algn="ctr"/>
+          </a:p>
+        </p:txBody>
+      </p:sp>
+      <p:sp>
+        <p:nvSpPr>
+          <p:cNvPr id="13" name="TextBox 12"/>
+          <p:cNvSpPr txBox="1"/>
+          <p:nvPr/>
+        </p:nvSpPr>
+        <p:spPr>
+          <a:xfrm>
+            <a:off x="9061704" y="1874519"/>
+            <a:ext cx="2121408" cy="4069080"/>
+          </a:xfrm>
+          <a:prstGeom prst="rect">
+            <a:avLst/>
+          </a:prstGeom>
+          <a:noFill/>
+        </p:spPr>
+        <p:txBody>
+          <a:bodyPr wrap="none" lIns="0" tIns="0" rIns="0" bIns="0">
+            <a:spAutoFit/>
+          </a:bodyPr>
+          <a:lstStyle/>
+          <a:p>
+            <a:pPr>
+              <a:defRPr sz="1200" b="1">
+                <a:solidFill>
+                  <a:srgbClr val="FF2D55"/>
+                </a:solidFill>
+                <a:latin typeface="Segoe UI"/>
+              </a:defRPr>
+            </a:pPr>
+            <a:r>
+              <a:t>AI AUTOMATION</a:t>
+            </a:r>
+          </a:p>
+          <a:p>
+            <a:pPr>
+              <a:spcBef>
+                <a:spcPts val="200"/>
+              </a:spcBef>
+              <a:defRPr sz="1000">
+                <a:solidFill>
+                  <a:srgbClr val="FFFFFF"/>
+                </a:solidFill>
+                <a:latin typeface="Segoe UI"/>
+              </a:defRPr>
+            </a:pPr>
+            <a:r>
+              <a:t>Lead: Dhruv Patel</a:t>
+            </a:r>
+          </a:p>
+          <a:p>
+            <a:pPr>
+              <a:spcBef>
+                <a:spcPts val="1400"/>
+              </a:spcBef>
+            </a:pPr>
+            <a:r>
+              <a:rPr b="1" sz="1100">
+                <a:solidFill>
+                  <a:srgbClr val="06B6D4"/>
+                </a:solidFill>
+              </a:rPr>
+              <a:t>• Google Gemini
+</a:t>
+            </a:r>
+            <a:r>
+              <a:rPr sz="1000">
+                <a:solidFill>
+                  <a:srgbClr val="9CA3AF"/>
+                </a:solidFill>
+              </a:rPr>
+              <a:t>Generative analysis of transcripts &amp; plans.</a:t>
+            </a:r>
+          </a:p>
+          <a:p>
+            <a:pPr>
+              <a:spcBef>
+                <a:spcPts val="1400"/>
+              </a:spcBef>
+            </a:pPr>
+            <a:r>
+              <a:rPr b="1" sz="1100">
+                <a:solidFill>
+                  <a:srgbClr val="06B6D4"/>
+                </a:solidFill>
+              </a:rPr>
+              <a:t>• 6 Agent Tools
+</a:t>
+            </a:r>
+            <a:r>
+              <a:rPr sz="1000">
+                <a:solidFill>
+                  <a:srgbClr val="9CA3AF"/>
+                </a:solidFill>
+              </a:rPr>
+              <a:t>Task, risk, notification, &amp; planning dispatchers.</a:t>
+            </a:r>
+          </a:p>
+          <a:p>
+            <a:pPr>
+              <a:spcBef>
+                <a:spcPts val="1400"/>
+              </a:spcBef>
+            </a:pPr>
+            <a:r>
+              <a:rPr b="1" sz="1100">
+                <a:solidFill>
+                  <a:srgbClr val="06B6D4"/>
+                </a:solidFill>
+              </a:rPr>
+              <a:t>• Workload Balancing
+</a:t>
+            </a:r>
+            <a:r>
+              <a:rPr sz="1000">
+                <a:solidFill>
+                  <a:srgbClr val="9CA3AF"/>
+                </a:solidFill>
+              </a:rPr>
+              <a:t>Dynamic least-loaded volunteer routing.</a:t>
+            </a:r>
+          </a:p>
+        </p:txBody>
+      </p:sp>
+      <p:sp>
+        <p:nvSpPr>
+          <p:cNvPr id="14" name="TextBox 13"/>
+          <p:cNvSpPr txBox="1"/>
+          <p:nvPr/>
+        </p:nvSpPr>
+        <p:spPr>
+          <a:xfrm>
+            <a:off x="731520" y="6473952"/>
+            <a:ext cx="10698480" cy="274320"/>
+          </a:xfrm>
+          <a:prstGeom prst="rect">
+            <a:avLst/>
+          </a:prstGeom>
+          <a:noFill/>
+        </p:spPr>
+        <p:txBody>
+          <a:bodyPr wrap="none" lIns="0" tIns="0" rIns="0" bIns="0">
+            <a:spAutoFit/>
+          </a:bodyPr>
+          <a:lstStyle/>
+          <a:p>
+            <a:pPr>
+              <a:defRPr sz="900">
+                <a:solidFill>
+                  <a:srgbClr val="6E7382"/>
+                </a:solidFill>
+                <a:latin typeface="Segoe UI"/>
+              </a:defRPr>
+            </a:pPr>
+            <a:r>
+              <a:t>ClubOps AI  •  Bit N Build 2026 Hackathon  •  Slide 3 of 12</a:t>
             </a:r>
           </a:p>
         </p:txBody>
@@ -4960,7 +7261,7 @@
     <p:bg>
       <p:bgPr>
         <a:solidFill>
-          <a:srgbClr val="0B0F19"/>
+          <a:srgbClr val="0B0C10"/>
         </a:solidFill>
         <a:effectLst/>
       </p:bgPr>
@@ -4980,8 +7281,8 @@
         </p:nvSpPr>
         <p:spPr>
           <a:xfrm>
-            <a:off x="731520" y="365760"/>
-            <a:ext cx="10698480" cy="1005840"/>
+            <a:off x="731520" y="320040"/>
+            <a:ext cx="411480" cy="320040"/>
           </a:xfrm>
           <a:prstGeom prst="rect">
             <a:avLst/>
@@ -4989,7 +7290,7 @@
           <a:noFill/>
         </p:spPr>
         <p:txBody>
-          <a:bodyPr wrap="square" lIns="0" tIns="0" rIns="0" bIns="0">
+          <a:bodyPr wrap="none" lIns="0" tIns="0" rIns="0" bIns="0">
             <a:spAutoFit/>
           </a:bodyPr>
           <a:lstStyle/>
@@ -4997,23 +7298,81 @@
             <a:pPr>
               <a:defRPr sz="1100" b="1">
                 <a:solidFill>
-                  <a:srgbClr val="06B6D4"/>
-                </a:solidFill>
-              </a:defRPr>
-            </a:pPr>
-            <a:r>
-              <a:t>SECTION 04 / APPROACH &amp; IMPLEMENTATION</a:t>
-            </a:r>
-          </a:p>
-          <a:p>
-            <a:pPr>
-              <a:spcBef>
-                <a:spcPts val="400"/>
-              </a:spcBef>
-              <a:defRPr sz="2400" b="1">
+                  <a:srgbClr val="FF2D55"/>
+                </a:solidFill>
+                <a:latin typeface="Segoe UI"/>
+              </a:defRPr>
+            </a:pPr>
+            <a:r>
+              <a:t>[C]</a:t>
+            </a:r>
+          </a:p>
+        </p:txBody>
+      </p:sp>
+      <p:sp>
+        <p:nvSpPr>
+          <p:cNvPr id="3" name="TextBox 2"/>
+          <p:cNvSpPr txBox="1"/>
+          <p:nvPr/>
+        </p:nvSpPr>
+        <p:spPr>
+          <a:xfrm>
+            <a:off x="1188720" y="320040"/>
+            <a:ext cx="10241280" cy="320040"/>
+          </a:xfrm>
+          <a:prstGeom prst="rect">
+            <a:avLst/>
+          </a:prstGeom>
+          <a:noFill/>
+        </p:spPr>
+        <p:txBody>
+          <a:bodyPr wrap="none" lIns="0" tIns="0" rIns="0" bIns="0">
+            <a:spAutoFit/>
+          </a:bodyPr>
+          <a:lstStyle/>
+          <a:p>
+            <a:pPr>
+              <a:defRPr sz="950" b="1">
+                <a:solidFill>
+                  <a:srgbClr val="9CA3AF"/>
+                </a:solidFill>
+                <a:latin typeface="Segoe UI"/>
+              </a:defRPr>
+            </a:pPr>
+            <a:r>
+              <a:t>CLUBOPS  •  BIT N BUILD 2026  •  APPROACH &amp; IMPLEMENTATION</a:t>
+            </a:r>
+          </a:p>
+        </p:txBody>
+      </p:sp>
+      <p:sp>
+        <p:nvSpPr>
+          <p:cNvPr id="4" name="TextBox 3"/>
+          <p:cNvSpPr txBox="1"/>
+          <p:nvPr/>
+        </p:nvSpPr>
+        <p:spPr>
+          <a:xfrm>
+            <a:off x="731520" y="621792"/>
+            <a:ext cx="10698480" cy="594360"/>
+          </a:xfrm>
+          <a:prstGeom prst="rect">
+            <a:avLst/>
+          </a:prstGeom>
+          <a:noFill/>
+        </p:spPr>
+        <p:txBody>
+          <a:bodyPr wrap="none" lIns="0" tIns="0" rIns="0" bIns="0">
+            <a:spAutoFit/>
+          </a:bodyPr>
+          <a:lstStyle/>
+          <a:p>
+            <a:pPr>
+              <a:defRPr sz="2100" b="1">
                 <a:solidFill>
                   <a:srgbClr val="FFFFFF"/>
                 </a:solidFill>
+                <a:latin typeface="Segoe UI"/>
               </a:defRPr>
             </a:pPr>
             <a:r>
@@ -5024,24 +7383,60 @@
       </p:sp>
       <p:sp>
         <p:nvSpPr>
-          <p:cNvPr id="3" name="Rounded Rectangle 2"/>
+          <p:cNvPr id="5" name="TextBox 4"/>
+          <p:cNvSpPr txBox="1"/>
+          <p:nvPr/>
+        </p:nvSpPr>
+        <p:spPr>
+          <a:xfrm>
+            <a:off x="731520" y="1188720"/>
+            <a:ext cx="10698480" cy="320040"/>
+          </a:xfrm>
+          <a:prstGeom prst="rect">
+            <a:avLst/>
+          </a:prstGeom>
+          <a:noFill/>
+        </p:spPr>
+        <p:txBody>
+          <a:bodyPr wrap="none" lIns="0" tIns="0" rIns="0" bIns="0">
+            <a:spAutoFit/>
+          </a:bodyPr>
+          <a:lstStyle/>
+          <a:p>
+            <a:pPr>
+              <a:defRPr sz="1150">
+                <a:solidFill>
+                  <a:srgbClr val="9CA3AF"/>
+                </a:solidFill>
+                <a:latin typeface="Segoe UI"/>
+              </a:defRPr>
+            </a:pPr>
+            <a:r>
+              <a:t>Key engineering innovations solving unstructured data, date decay, and workload fairness.</a:t>
+            </a:r>
+          </a:p>
+        </p:txBody>
+      </p:sp>
+      <p:sp>
+        <p:nvSpPr>
+          <p:cNvPr id="6" name="Rectangle 5"/>
           <p:cNvSpPr/>
           <p:nvPr/>
         </p:nvSpPr>
         <p:spPr>
           <a:xfrm>
-            <a:off x="731520" y="1645920"/>
-            <a:ext cx="5212080" cy="2194560"/>
-          </a:xfrm>
-          <a:prstGeom prst="roundRect">
+            <a:off x="731520" y="1691640"/>
+            <a:ext cx="5239512" cy="2148840"/>
+          </a:xfrm>
+          <a:prstGeom prst="rect">
             <a:avLst/>
           </a:prstGeom>
           <a:solidFill>
-            <a:srgbClr val="161B2C"/>
+            <a:srgbClr val="14161D"/>
           </a:solidFill>
           <a:ln w="19050">
             <a:solidFill>
-              <a:srgbClr val="3B82F6"/>
+              <a:srgbClr val="2A2E3A"/>
             </a:solidFill>
           </a:ln>
         </p:spPr>
@@ -5060,57 +7455,101 @@
           </a:fontRef>
         </p:style>
         <p:txBody>
-          <a:bodyPr rtlCol="0" anchor="ctr" wrap="square" lIns="228600" tIns="182880" rIns="228600"/>
-          <a:lstStyle/>
-          <a:p>
-            <a:pPr algn="ctr">
-              <a:defRPr sz="1300" b="1">
-                <a:solidFill>
-                  <a:srgbClr val="3B82F6"/>
-                </a:solidFill>
-              </a:defRPr>
-            </a:pPr>
-            <a:r>
-              <a:t>1. MULTI-SENTENCE STATEMENT SPLITTING</a:t>
+          <a:bodyPr rtlCol="0" anchor="ctr"/>
+          <a:lstStyle/>
+          <a:p>
+            <a:pPr algn="ctr"/>
+          </a:p>
+        </p:txBody>
+      </p:sp>
+      <p:sp>
+        <p:nvSpPr>
+          <p:cNvPr id="7" name="TextBox 6"/>
+          <p:cNvSpPr txBox="1"/>
+          <p:nvPr/>
+        </p:nvSpPr>
+        <p:spPr>
+          <a:xfrm>
+            <a:off x="960120" y="1874520"/>
+            <a:ext cx="4782312" cy="1783080"/>
+          </a:xfrm>
+          <a:prstGeom prst="rect">
+            <a:avLst/>
+          </a:prstGeom>
+          <a:noFill/>
+        </p:spPr>
+        <p:txBody>
+          <a:bodyPr wrap="none" lIns="0" tIns="0" rIns="0" bIns="0">
+            <a:spAutoFit/>
+          </a:bodyPr>
+          <a:lstStyle/>
+          <a:p>
+            <a:pPr>
+              <a:defRPr sz="950" b="1">
+                <a:solidFill>
+                  <a:srgbClr val="FF2D55"/>
+                </a:solidFill>
+                <a:latin typeface="Segoe UI"/>
+              </a:defRPr>
+            </a:pPr>
+            <a:r>
+              <a:t>MULTI-SENTENCE STATEMENT SPLITTING</a:t>
             </a:r>
           </a:p>
           <a:p>
             <a:pPr>
               <a:spcBef>
-                <a:spcPts val="800"/>
+                <a:spcPts val="200"/>
               </a:spcBef>
-              <a:defRPr sz="1100">
+              <a:defRPr sz="1350" b="1">
+                <a:solidFill>
+                  <a:srgbClr val="FFFFFF"/>
+                </a:solidFill>
+                <a:latin typeface="Segoe UI"/>
+              </a:defRPr>
+            </a:pPr>
+            <a:r>
+              <a:t>Compound Directives Segmentation</a:t>
+            </a:r>
+          </a:p>
+          <a:p>
+            <a:pPr>
+              <a:spcBef>
+                <a:spcPts val="600"/>
+              </a:spcBef>
+              <a:defRPr sz="1000">
                 <a:solidFill>
                   <a:srgbClr val="9CA3AF"/>
                 </a:solidFill>
-              </a:defRPr>
-            </a:pPr>
-            <a:r>
-              <a:t>Conversational transcripts contain blended action items ('Aisha check lighting and also David review perimeter'). Our parser segments compound statements into atomic units before task conversion.</a:t>
-            </a:r>
-          </a:p>
-        </p:txBody>
-      </p:sp>
-      <p:sp>
-        <p:nvSpPr>
-          <p:cNvPr id="4" name="Rounded Rectangle 3"/>
+                <a:latin typeface="Segoe UI"/>
+              </a:defRPr>
+            </a:pPr>
+            <a:r>
+              <a:t>Conversational transcripts blend directives ('Aisha test stage lighting and David coordinate perimeter security'). Our engine uses regex and NLP delimiters to isolate compound clauses into discrete atomic actions before task creation.</a:t>
+            </a:r>
+          </a:p>
+        </p:txBody>
+      </p:sp>
+      <p:sp>
+        <p:nvSpPr>
+          <p:cNvPr id="8" name="Rectangle 7"/>
           <p:cNvSpPr/>
           <p:nvPr/>
         </p:nvSpPr>
         <p:spPr>
           <a:xfrm>
-            <a:off x="6217920" y="1645920"/>
-            <a:ext cx="5212080" cy="2194560"/>
-          </a:xfrm>
-          <a:prstGeom prst="roundRect">
+            <a:off x="6217920" y="1691640"/>
+            <a:ext cx="5239512" cy="2148840"/>
+          </a:xfrm>
+          <a:prstGeom prst="rect">
             <a:avLst/>
           </a:prstGeom>
           <a:solidFill>
-            <a:srgbClr val="161B2C"/>
+            <a:srgbClr val="14161D"/>
           </a:solidFill>
           <a:ln w="19050">
             <a:solidFill>
-              <a:srgbClr val="10B981"/>
+              <a:srgbClr val="2A2E3A"/>
             </a:solidFill>
           </a:ln>
         </p:spPr>
@@ -5129,57 +7568,101 @@
           </a:fontRef>
         </p:style>
         <p:txBody>
-          <a:bodyPr rtlCol="0" anchor="ctr" wrap="square" lIns="228600" tIns="182880" rIns="228600"/>
-          <a:lstStyle/>
-          <a:p>
-            <a:pPr algn="ctr">
-              <a:defRPr sz="1300" b="1">
-                <a:solidFill>
-                  <a:srgbClr val="3B82F6"/>
-                </a:solidFill>
-              </a:defRPr>
-            </a:pPr>
-            <a:r>
-              <a:t>2. DYNAMIC LEAST-LOADED VOLUNTEER ALLOCATION</a:t>
+          <a:bodyPr rtlCol="0" anchor="ctr"/>
+          <a:lstStyle/>
+          <a:p>
+            <a:pPr algn="ctr"/>
+          </a:p>
+        </p:txBody>
+      </p:sp>
+      <p:sp>
+        <p:nvSpPr>
+          <p:cNvPr id="9" name="TextBox 8"/>
+          <p:cNvSpPr txBox="1"/>
+          <p:nvPr/>
+        </p:nvSpPr>
+        <p:spPr>
+          <a:xfrm>
+            <a:off x="6446520" y="1874520"/>
+            <a:ext cx="4782312" cy="1783080"/>
+          </a:xfrm>
+          <a:prstGeom prst="rect">
+            <a:avLst/>
+          </a:prstGeom>
+          <a:noFill/>
+        </p:spPr>
+        <p:txBody>
+          <a:bodyPr wrap="none" lIns="0" tIns="0" rIns="0" bIns="0">
+            <a:spAutoFit/>
+          </a:bodyPr>
+          <a:lstStyle/>
+          <a:p>
+            <a:pPr>
+              <a:defRPr sz="950" b="1">
+                <a:solidFill>
+                  <a:srgbClr val="FF2D55"/>
+                </a:solidFill>
+                <a:latin typeface="Segoe UI"/>
+              </a:defRPr>
+            </a:pPr>
+            <a:r>
+              <a:t>DYNAMIC LEAST-LOADED VOLUNTEER ALLOCATION</a:t>
             </a:r>
           </a:p>
           <a:p>
             <a:pPr>
               <a:spcBef>
-                <a:spcPts val="800"/>
+                <a:spcPts val="200"/>
               </a:spcBef>
-              <a:defRPr sz="1100">
+              <a:defRPr sz="1350" b="1">
+                <a:solidFill>
+                  <a:srgbClr val="FFFFFF"/>
+                </a:solidFill>
+                <a:latin typeface="Segoe UI"/>
+              </a:defRPr>
+            </a:pPr>
+            <a:r>
+              <a:t>Balanced Workload Routing</a:t>
+            </a:r>
+          </a:p>
+          <a:p>
+            <a:pPr>
+              <a:spcBef>
+                <a:spcPts val="600"/>
+              </a:spcBef>
+              <a:defRPr sz="1000">
                 <a:solidFill>
                   <a:srgbClr val="9CA3AF"/>
                 </a:solidFill>
-              </a:defRPr>
-            </a:pPr>
-            <a:r>
-              <a:t>Instead of dumping all items on one person, the system tallies current active tasks per volunteer and routes newly identified actions to the least-loaded matching specialist.</a:t>
-            </a:r>
-          </a:p>
-        </p:txBody>
-      </p:sp>
-      <p:sp>
-        <p:nvSpPr>
-          <p:cNvPr id="5" name="Rounded Rectangle 4"/>
+                <a:latin typeface="Segoe UI"/>
+              </a:defRPr>
+            </a:pPr>
+            <a:r>
+              <a:t>Prevents volunteer burnout by analyzing active task counts across registered volunteers in MongoDB ($lookup aggregate). The router identifies domain specialists (AV, Security, Logistics) and assigns tasks to the least-loaded member.</a:t>
+            </a:r>
+          </a:p>
+        </p:txBody>
+      </p:sp>
+      <p:sp>
+        <p:nvSpPr>
+          <p:cNvPr id="10" name="Rectangle 9"/>
           <p:cNvSpPr/>
           <p:nvPr/>
         </p:nvSpPr>
         <p:spPr>
           <a:xfrm>
             <a:off x="731520" y="4023360"/>
-            <a:ext cx="5212080" cy="2194560"/>
-          </a:xfrm>
-          <a:prstGeom prst="roundRect">
+            <a:ext cx="5239512" cy="2148840"/>
+          </a:xfrm>
+          <a:prstGeom prst="rect">
             <a:avLst/>
           </a:prstGeom>
           <a:solidFill>
-            <a:srgbClr val="161B2C"/>
+            <a:srgbClr val="14161D"/>
           </a:solidFill>
           <a:ln w="19050">
             <a:solidFill>
-              <a:srgbClr val="FF2948"/>
+              <a:srgbClr val="2A2E3A"/>
             </a:solidFill>
           </a:ln>
         </p:spPr>
@@ -5198,57 +7681,101 @@
           </a:fontRef>
         </p:style>
         <p:txBody>
-          <a:bodyPr rtlCol="0" anchor="ctr" wrap="square" lIns="228600" tIns="182880" rIns="228600"/>
-          <a:lstStyle/>
-          <a:p>
-            <a:pPr algn="ctr">
-              <a:defRPr sz="1300" b="1">
-                <a:solidFill>
-                  <a:srgbClr val="3B82F6"/>
-                </a:solidFill>
-              </a:defRPr>
-            </a:pPr>
-            <a:r>
-              <a:t>3. 4-TIER AUTOMATED PRIORITY ENGINE</a:t>
+          <a:bodyPr rtlCol="0" anchor="ctr"/>
+          <a:lstStyle/>
+          <a:p>
+            <a:pPr algn="ctr"/>
+          </a:p>
+        </p:txBody>
+      </p:sp>
+      <p:sp>
+        <p:nvSpPr>
+          <p:cNvPr id="11" name="TextBox 10"/>
+          <p:cNvSpPr txBox="1"/>
+          <p:nvPr/>
+        </p:nvSpPr>
+        <p:spPr>
+          <a:xfrm>
+            <a:off x="960120" y="4206240"/>
+            <a:ext cx="4782312" cy="1783080"/>
+          </a:xfrm>
+          <a:prstGeom prst="rect">
+            <a:avLst/>
+          </a:prstGeom>
+          <a:noFill/>
+        </p:spPr>
+        <p:txBody>
+          <a:bodyPr wrap="none" lIns="0" tIns="0" rIns="0" bIns="0">
+            <a:spAutoFit/>
+          </a:bodyPr>
+          <a:lstStyle/>
+          <a:p>
+            <a:pPr>
+              <a:defRPr sz="950" b="1">
+                <a:solidFill>
+                  <a:srgbClr val="FF2D55"/>
+                </a:solidFill>
+                <a:latin typeface="Segoe UI"/>
+              </a:defRPr>
+            </a:pPr>
+            <a:r>
+              <a:t>4-TIER AUTOMATED PRIORITY ENGINE</a:t>
             </a:r>
           </a:p>
           <a:p>
             <a:pPr>
               <a:spcBef>
-                <a:spcPts val="800"/>
+                <a:spcPts val="200"/>
               </a:spcBef>
-              <a:defRPr sz="1100">
+              <a:defRPr sz="1350" b="1">
+                <a:solidFill>
+                  <a:srgbClr val="FFFFFF"/>
+                </a:solidFill>
+                <a:latin typeface="Segoe UI"/>
+              </a:defRPr>
+            </a:pPr>
+            <a:r>
+              <a:t>Urgency Lexical Analysis</a:t>
+            </a:r>
+          </a:p>
+          <a:p>
+            <a:pPr>
+              <a:spcBef>
+                <a:spcPts val="600"/>
+              </a:spcBef>
+              <a:defRPr sz="1000">
                 <a:solidFill>
                   <a:srgbClr val="9CA3AF"/>
                 </a:solidFill>
-              </a:defRPr>
-            </a:pPr>
-            <a:r>
-              <a:t>Analyzes lexical urgency (financial damage bonds, stage blackouts, emergency hazards) to assign critical, high, medium, or low flags with deadline sensitivity.</a:t>
-            </a:r>
-          </a:p>
-        </p:txBody>
-      </p:sp>
-      <p:sp>
-        <p:nvSpPr>
-          <p:cNvPr id="6" name="Rounded Rectangle 5"/>
+                <a:latin typeface="Segoe UI"/>
+              </a:defRPr>
+            </a:pPr>
+            <a:r>
+              <a:t>Classifies tasks into CRITICAL, HIGH, MEDIUM, and LOW. Financial penalty bonds, equipment damage contracts, and stage power blockers trigger automatic escalation with countdown deadline tracking.</a:t>
+            </a:r>
+          </a:p>
+        </p:txBody>
+      </p:sp>
+      <p:sp>
+        <p:nvSpPr>
+          <p:cNvPr id="12" name="Rectangle 11"/>
           <p:cNvSpPr/>
           <p:nvPr/>
         </p:nvSpPr>
         <p:spPr>
           <a:xfrm>
             <a:off x="6217920" y="4023360"/>
-            <a:ext cx="5212080" cy="2194560"/>
-          </a:xfrm>
-          <a:prstGeom prst="roundRect">
+            <a:ext cx="5239512" cy="2148840"/>
+          </a:xfrm>
+          <a:prstGeom prst="rect">
             <a:avLst/>
           </a:prstGeom>
           <a:solidFill>
-            <a:srgbClr val="161B2C"/>
+            <a:srgbClr val="14161D"/>
           </a:solidFill>
           <a:ln w="19050">
             <a:solidFill>
-              <a:srgbClr val="F59E0B"/>
+              <a:srgbClr val="2A2E3A"/>
             </a:solidFill>
           </a:ln>
         </p:spPr>
@@ -5267,33 +7794,113 @@
           </a:fontRef>
         </p:style>
         <p:txBody>
-          <a:bodyPr rtlCol="0" anchor="ctr" wrap="square" lIns="228600" tIns="182880" rIns="228600"/>
-          <a:lstStyle/>
-          <a:p>
-            <a:pPr algn="ctr">
-              <a:defRPr sz="1300" b="1">
-                <a:solidFill>
-                  <a:srgbClr val="3B82F6"/>
-                </a:solidFill>
-              </a:defRPr>
-            </a:pPr>
-            <a:r>
-              <a:t>4. RELATIVE 2026 DEADLINE NORMALIZER</a:t>
+          <a:bodyPr rtlCol="0" anchor="ctr"/>
+          <a:lstStyle/>
+          <a:p>
+            <a:pPr algn="ctr"/>
+          </a:p>
+        </p:txBody>
+      </p:sp>
+      <p:sp>
+        <p:nvSpPr>
+          <p:cNvPr id="13" name="TextBox 12"/>
+          <p:cNvSpPr txBox="1"/>
+          <p:nvPr/>
+        </p:nvSpPr>
+        <p:spPr>
+          <a:xfrm>
+            <a:off x="6446520" y="4206240"/>
+            <a:ext cx="4782312" cy="1783080"/>
+          </a:xfrm>
+          <a:prstGeom prst="rect">
+            <a:avLst/>
+          </a:prstGeom>
+          <a:noFill/>
+        </p:spPr>
+        <p:txBody>
+          <a:bodyPr wrap="none" lIns="0" tIns="0" rIns="0" bIns="0">
+            <a:spAutoFit/>
+          </a:bodyPr>
+          <a:lstStyle/>
+          <a:p>
+            <a:pPr>
+              <a:defRPr sz="950" b="1">
+                <a:solidFill>
+                  <a:srgbClr val="FF2D55"/>
+                </a:solidFill>
+                <a:latin typeface="Segoe UI"/>
+              </a:defRPr>
+            </a:pPr>
+            <a:r>
+              <a:t>2026 RELATIVE DEADLINE NORMALIZER</a:t>
             </a:r>
           </a:p>
           <a:p>
             <a:pPr>
               <a:spcBef>
-                <a:spcPts val="800"/>
+                <a:spcPts val="200"/>
               </a:spcBef>
-              <a:defRPr sz="1100">
+              <a:defRPr sz="1350" b="1">
+                <a:solidFill>
+                  <a:srgbClr val="FFFFFF"/>
+                </a:solidFill>
+                <a:latin typeface="Segoe UI"/>
+              </a:defRPr>
+            </a:pPr>
+            <a:r>
+              <a:t>Calendar-Accurate Timestamps</a:t>
+            </a:r>
+          </a:p>
+          <a:p>
+            <a:pPr>
+              <a:spcBef>
+                <a:spcPts val="600"/>
+              </a:spcBef>
+              <a:defRPr sz="1000">
                 <a:solidFill>
                   <a:srgbClr val="9CA3AF"/>
                 </a:solidFill>
-              </a:defRPr>
-            </a:pPr>
-            <a:r>
-              <a:t>Resolves colloquial phrases like 'by Friday 5 PM' into calendar-accurate 2026 ISO timestamps, eliminating century-old historic date distortion.</a:t>
+                <a:latin typeface="Segoe UI"/>
+              </a:defRPr>
+            </a:pPr>
+            <a:r>
+              <a:t>Replaced historic date bugs with parseTranscriptDeadline(), converting conversational strings ('by Friday 5 PM') into future ISO dates within the active year (2026), preventing century-old date distortion.</a:t>
+            </a:r>
+          </a:p>
+        </p:txBody>
+      </p:sp>
+      <p:sp>
+        <p:nvSpPr>
+          <p:cNvPr id="14" name="TextBox 13"/>
+          <p:cNvSpPr txBox="1"/>
+          <p:nvPr/>
+        </p:nvSpPr>
+        <p:spPr>
+          <a:xfrm>
+            <a:off x="731520" y="6473952"/>
+            <a:ext cx="10698480" cy="274320"/>
+          </a:xfrm>
+          <a:prstGeom prst="rect">
+            <a:avLst/>
+          </a:prstGeom>
+          <a:noFill/>
+        </p:spPr>
+        <p:txBody>
+          <a:bodyPr wrap="none" lIns="0" tIns="0" rIns="0" bIns="0">
+            <a:spAutoFit/>
+          </a:bodyPr>
+          <a:lstStyle/>
+          <a:p>
+            <a:pPr>
+              <a:defRPr sz="900">
+                <a:solidFill>
+                  <a:srgbClr val="6E7382"/>
+                </a:solidFill>
+                <a:latin typeface="Segoe UI"/>
+              </a:defRPr>
+            </a:pPr>
+            <a:r>
+              <a:t>ClubOps AI  •  Bit N Build 2026 Hackathon  •  Slide 4 of 12</a:t>
             </a:r>
           </a:p>
         </p:txBody>
@@ -5312,7 +7919,7 @@
     <p:bg>
       <p:bgPr>
         <a:solidFill>
-          <a:srgbClr val="0B0F19"/>
+          <a:srgbClr val="0B0C10"/>
         </a:solidFill>
         <a:effectLst/>
       </p:bgPr>
@@ -5332,8 +7939,8 @@
         </p:nvSpPr>
         <p:spPr>
           <a:xfrm>
-            <a:off x="731520" y="365760"/>
-            <a:ext cx="10698480" cy="1005840"/>
+            <a:off x="731520" y="320040"/>
+            <a:ext cx="411480" cy="320040"/>
           </a:xfrm>
           <a:prstGeom prst="rect">
             <a:avLst/>
@@ -5341,7 +7948,7 @@
           <a:noFill/>
         </p:spPr>
         <p:txBody>
-          <a:bodyPr wrap="square" lIns="0" tIns="0" rIns="0" bIns="0">
+          <a:bodyPr wrap="none" lIns="0" tIns="0" rIns="0" bIns="0">
             <a:spAutoFit/>
           </a:bodyPr>
           <a:lstStyle/>
@@ -5349,51 +7956,145 @@
             <a:pPr>
               <a:defRPr sz="1100" b="1">
                 <a:solidFill>
-                  <a:srgbClr val="06B6D4"/>
-                </a:solidFill>
-              </a:defRPr>
-            </a:pPr>
-            <a:r>
-              <a:t>SECTION 05 / FEATURES &amp; ACHIEVEMENTS</a:t>
-            </a:r>
-          </a:p>
-          <a:p>
-            <a:pPr>
-              <a:spcBef>
-                <a:spcPts val="400"/>
-              </a:spcBef>
-              <a:defRPr sz="2400" b="1">
+                  <a:srgbClr val="FF2D55"/>
+                </a:solidFill>
+                <a:latin typeface="Segoe UI"/>
+              </a:defRPr>
+            </a:pPr>
+            <a:r>
+              <a:t>[C]</a:t>
+            </a:r>
+          </a:p>
+        </p:txBody>
+      </p:sp>
+      <p:sp>
+        <p:nvSpPr>
+          <p:cNvPr id="3" name="TextBox 2"/>
+          <p:cNvSpPr txBox="1"/>
+          <p:nvPr/>
+        </p:nvSpPr>
+        <p:spPr>
+          <a:xfrm>
+            <a:off x="1188720" y="320040"/>
+            <a:ext cx="10241280" cy="320040"/>
+          </a:xfrm>
+          <a:prstGeom prst="rect">
+            <a:avLst/>
+          </a:prstGeom>
+          <a:noFill/>
+        </p:spPr>
+        <p:txBody>
+          <a:bodyPr wrap="none" lIns="0" tIns="0" rIns="0" bIns="0">
+            <a:spAutoFit/>
+          </a:bodyPr>
+          <a:lstStyle/>
+          <a:p>
+            <a:pPr>
+              <a:defRPr sz="950" b="1">
+                <a:solidFill>
+                  <a:srgbClr val="9CA3AF"/>
+                </a:solidFill>
+                <a:latin typeface="Segoe UI"/>
+              </a:defRPr>
+            </a:pPr>
+            <a:r>
+              <a:t>CLUBOPS  •  BIT N BUILD 2026  •  FEATURES &amp; ACHIEVEMENTS</a:t>
+            </a:r>
+          </a:p>
+        </p:txBody>
+      </p:sp>
+      <p:sp>
+        <p:nvSpPr>
+          <p:cNvPr id="4" name="TextBox 3"/>
+          <p:cNvSpPr txBox="1"/>
+          <p:nvPr/>
+        </p:nvSpPr>
+        <p:spPr>
+          <a:xfrm>
+            <a:off x="731520" y="621792"/>
+            <a:ext cx="10698480" cy="594360"/>
+          </a:xfrm>
+          <a:prstGeom prst="rect">
+            <a:avLst/>
+          </a:prstGeom>
+          <a:noFill/>
+        </p:spPr>
+        <p:txBody>
+          <a:bodyPr wrap="none" lIns="0" tIns="0" rIns="0" bIns="0">
+            <a:spAutoFit/>
+          </a:bodyPr>
+          <a:lstStyle/>
+          <a:p>
+            <a:pPr>
+              <a:defRPr sz="2100" b="1">
                 <a:solidFill>
                   <a:srgbClr val="FFFFFF"/>
                 </a:solidFill>
-              </a:defRPr>
-            </a:pPr>
-            <a:r>
-              <a:t>All 9 Expected Deliverables 100% Implemented &amp; Verified</a:t>
-            </a:r>
-          </a:p>
-        </p:txBody>
-      </p:sp>
-      <p:sp>
-        <p:nvSpPr>
-          <p:cNvPr id="3" name="Rounded Rectangle 2"/>
+                <a:latin typeface="Segoe UI"/>
+              </a:defRPr>
+            </a:pPr>
+            <a:r>
+              <a:t>9 Expected Deliverables: 100% Implemented &amp; Verified</a:t>
+            </a:r>
+          </a:p>
+        </p:txBody>
+      </p:sp>
+      <p:sp>
+        <p:nvSpPr>
+          <p:cNvPr id="5" name="TextBox 4"/>
+          <p:cNvSpPr txBox="1"/>
+          <p:nvPr/>
+        </p:nvSpPr>
+        <p:spPr>
+          <a:xfrm>
+            <a:off x="731520" y="1188720"/>
+            <a:ext cx="10698480" cy="320040"/>
+          </a:xfrm>
+          <a:prstGeom prst="rect">
+            <a:avLst/>
+          </a:prstGeom>
+          <a:noFill/>
+        </p:spPr>
+        <p:txBody>
+          <a:bodyPr wrap="none" lIns="0" tIns="0" rIns="0" bIns="0">
+            <a:spAutoFit/>
+          </a:bodyPr>
+          <a:lstStyle/>
+          <a:p>
+            <a:pPr>
+              <a:defRPr sz="1150">
+                <a:solidFill>
+                  <a:srgbClr val="9CA3AF"/>
+                </a:solidFill>
+                <a:latin typeface="Segoe UI"/>
+              </a:defRPr>
+            </a:pPr>
+            <a:r>
+              <a:t>All required competition deliverables are live, production-tested, and verified end-to-end.</a:t>
+            </a:r>
+          </a:p>
+        </p:txBody>
+      </p:sp>
+      <p:sp>
+        <p:nvSpPr>
+          <p:cNvPr id="6" name="Rectangle 5"/>
           <p:cNvSpPr/>
           <p:nvPr/>
         </p:nvSpPr>
         <p:spPr>
           <a:xfrm>
-            <a:off x="731520" y="1645920"/>
-            <a:ext cx="5120640" cy="4663440"/>
-          </a:xfrm>
-          <a:prstGeom prst="roundRect">
+            <a:off x="731520" y="1691640"/>
+            <a:ext cx="5212080" cy="4480560"/>
+          </a:xfrm>
+          <a:prstGeom prst="rect">
             <a:avLst/>
           </a:prstGeom>
           <a:solidFill>
-            <a:srgbClr val="161B2C"/>
+            <a:srgbClr val="14161D"/>
           </a:solidFill>
           <a:ln w="19050">
             <a:solidFill>
-              <a:srgbClr val="2D3748"/>
+              <a:srgbClr val="2A2E3A"/>
             </a:solidFill>
           </a:ln>
         </p:spPr>
@@ -5412,33 +8113,60 @@
           </a:fontRef>
         </p:style>
         <p:txBody>
-          <a:bodyPr rtlCol="0" anchor="ctr" wrap="square" lIns="228600" tIns="182880" rIns="228600"/>
-          <a:lstStyle/>
-          <a:p>
-            <a:pPr algn="ctr">
-              <a:defRPr sz="1300" b="1">
-                <a:solidFill>
-                  <a:srgbClr val="3B82F6"/>
-                </a:solidFill>
-              </a:defRPr>
-            </a:pPr>
-            <a:r>
-              <a:t>IMPLEMENTED DELIVERABLES</a:t>
+          <a:bodyPr rtlCol="0" anchor="ctr"/>
+          <a:lstStyle/>
+          <a:p>
+            <a:pPr algn="ctr"/>
+          </a:p>
+        </p:txBody>
+      </p:sp>
+      <p:sp>
+        <p:nvSpPr>
+          <p:cNvPr id="7" name="TextBox 6"/>
+          <p:cNvSpPr txBox="1"/>
+          <p:nvPr/>
+        </p:nvSpPr>
+        <p:spPr>
+          <a:xfrm>
+            <a:off x="960120" y="1874519"/>
+            <a:ext cx="4754880" cy="4114800"/>
+          </a:xfrm>
+          <a:prstGeom prst="rect">
+            <a:avLst/>
+          </a:prstGeom>
+          <a:noFill/>
+        </p:spPr>
+        <p:txBody>
+          <a:bodyPr wrap="none" lIns="0" tIns="0" rIns="0" bIns="0">
+            <a:spAutoFit/>
+          </a:bodyPr>
+          <a:lstStyle/>
+          <a:p>
+            <a:pPr>
+              <a:defRPr sz="1000" b="1">
+                <a:solidFill>
+                  <a:srgbClr val="FF2D55"/>
+                </a:solidFill>
+                <a:latin typeface="Segoe UI"/>
+              </a:defRPr>
+            </a:pPr>
+            <a:r>
+              <a:t>CORE IMPLEMENTED DELIVERABLES</a:t>
             </a:r>
           </a:p>
           <a:p>
             <a:pPr>
               <a:spcBef>
-                <a:spcPts val="400"/>
+                <a:spcPts val="500"/>
               </a:spcBef>
             </a:pPr>
             <a:r>
               <a:rPr b="1" sz="1000">
                 <a:solidFill>
-                  <a:srgbClr val="FFFFFF"/>
-                </a:solidFill>
-              </a:rPr>
-              <a:t>• 1. AI-Assisted Event Planning: </a:t>
+                  <a:srgbClr val="10B981"/>
+                </a:solidFill>
+              </a:rPr>
+              <a:t>✔ 1. AI Event Planning: </a:t>
             </a:r>
             <a:r>
               <a:rPr sz="950">
@@ -5446,22 +8174,22 @@
                   <a:srgbClr val="9CA3AF"/>
                 </a:solidFill>
               </a:rPr>
-              <a:t>Venue, 4-phase timelines, budgets, and milestone tasks.</a:t>
+              <a:t>Venue, 4-phase timelines, budget &amp; milestone tasks.</a:t>
             </a:r>
           </a:p>
           <a:p>
             <a:pPr>
               <a:spcBef>
-                <a:spcPts val="400"/>
+                <a:spcPts val="500"/>
               </a:spcBef>
             </a:pPr>
             <a:r>
               <a:rPr b="1" sz="1000">
                 <a:solidFill>
-                  <a:srgbClr val="FFFFFF"/>
-                </a:solidFill>
-              </a:rPr>
-              <a:t>• 2. Task &amp; Volunteer Management: </a:t>
+                  <a:srgbClr val="10B981"/>
+                </a:solidFill>
+              </a:rPr>
+              <a:t>✔ 2. Tasks &amp; Volunteers: </a:t>
             </a:r>
             <a:r>
               <a:rPr sz="950">
@@ -5469,22 +8197,22 @@
                   <a:srgbClr val="9CA3AF"/>
                 </a:solidFill>
               </a:rPr>
-              <a:t>4-tier priorities, status transitions, workload tracking.</a:t>
+              <a:t>4-tier priorities, status transitions, workload sync.</a:t>
             </a:r>
           </a:p>
           <a:p>
             <a:pPr>
               <a:spcBef>
-                <a:spcPts val="400"/>
+                <a:spcPts val="500"/>
               </a:spcBef>
             </a:pPr>
             <a:r>
               <a:rPr b="1" sz="1000">
                 <a:solidFill>
-                  <a:srgbClr val="FFFFFF"/>
-                </a:solidFill>
-              </a:rPr>
-              <a:t>• 3. Meeting Transcript Ingestion: </a:t>
+                  <a:srgbClr val="10B981"/>
+                </a:solidFill>
+              </a:rPr>
+              <a:t>✔ 3. Meeting Processing: </a:t>
             </a:r>
             <a:r>
               <a:rPr sz="950">
@@ -5492,22 +8220,22 @@
                   <a:srgbClr val="9CA3AF"/>
                 </a:solidFill>
               </a:rPr>
-              <a:t>Summarization, decision logs, and atomic action extraction.</a:t>
+              <a:t>Automated transcript extraction &amp; executive summaries.</a:t>
             </a:r>
           </a:p>
           <a:p>
             <a:pPr>
               <a:spcBef>
-                <a:spcPts val="400"/>
+                <a:spcPts val="500"/>
               </a:spcBef>
             </a:pPr>
             <a:r>
               <a:rPr b="1" sz="1000">
                 <a:solidFill>
-                  <a:srgbClr val="FFFFFF"/>
-                </a:solidFill>
-              </a:rPr>
-              <a:t>• 4. Automatic Action Item Extraction: </a:t>
+                  <a:srgbClr val="10B981"/>
+                </a:solidFill>
+              </a:rPr>
+              <a:t>✔ 4. Action Extraction: </a:t>
             </a:r>
             <a:r>
               <a:rPr sz="950">
@@ -5515,22 +8243,22 @@
                   <a:srgbClr val="9CA3AF"/>
                 </a:solidFill>
               </a:rPr>
-              <a:t>Conversational noise stripping and discrete task generation.</a:t>
+              <a:t>Atomic splitting &amp; conversational clutter removal.</a:t>
             </a:r>
           </a:p>
           <a:p>
             <a:pPr>
               <a:spcBef>
-                <a:spcPts val="400"/>
+                <a:spcPts val="500"/>
               </a:spcBef>
             </a:pPr>
             <a:r>
               <a:rPr b="1" sz="1000">
                 <a:solidFill>
-                  <a:srgbClr val="FFFFFF"/>
-                </a:solidFill>
-              </a:rPr>
-              <a:t>• 5. Task Owners &amp; Deadline Detection: </a:t>
+                  <a:srgbClr val="10B981"/>
+                </a:solidFill>
+              </a:rPr>
+              <a:t>✔ 5. Task Owners &amp; Dates: </a:t>
             </a:r>
             <a:r>
               <a:rPr sz="950">
@@ -5538,22 +8266,22 @@
                   <a:srgbClr val="9CA3AF"/>
                 </a:solidFill>
               </a:rPr>
-              <a:t>Domain skill routing and calendar-accurate deadlines.</a:t>
+              <a:t>Domain routing (AV, Security) &amp; 2026 ISO deadlines.</a:t>
             </a:r>
           </a:p>
           <a:p>
             <a:pPr>
               <a:spcBef>
-                <a:spcPts val="400"/>
+                <a:spcPts val="500"/>
               </a:spcBef>
             </a:pPr>
             <a:r>
               <a:rPr b="1" sz="1000">
                 <a:solidFill>
-                  <a:srgbClr val="FFFFFF"/>
-                </a:solidFill>
-              </a:rPr>
-              <a:t>• 6. Risk Identification &amp; Mitigation: </a:t>
+                  <a:srgbClr val="10B981"/>
+                </a:solidFill>
+              </a:rPr>
+              <a:t>✔ 6. Risk Identification: </a:t>
             </a:r>
             <a:r>
               <a:rPr sz="950">
@@ -5561,22 +8289,22 @@
                   <a:srgbClr val="9CA3AF"/>
                 </a:solidFill>
               </a:rPr>
-              <a:t>Severity assessment, impact rationale, and registry logs.</a:t>
+              <a:t>Severity rating, root cause explanations, mitigations.</a:t>
             </a:r>
           </a:p>
           <a:p>
             <a:pPr>
               <a:spcBef>
-                <a:spcPts val="400"/>
+                <a:spcPts val="500"/>
               </a:spcBef>
             </a:pPr>
             <a:r>
               <a:rPr b="1" sz="1000">
                 <a:solidFill>
-                  <a:srgbClr val="FFFFFF"/>
-                </a:solidFill>
-              </a:rPr>
-              <a:t>• 7. Multi-Format Knowledge RAG: </a:t>
+                  <a:srgbClr val="10B981"/>
+                </a:solidFill>
+              </a:rPr>
+              <a:t>✔ 7. Club Document RAG: </a:t>
             </a:r>
             <a:r>
               <a:rPr sz="950">
@@ -5584,22 +8312,22 @@
                   <a:srgbClr val="9CA3AF"/>
                 </a:solidFill>
               </a:rPr>
-              <a:t>PDF, DOCX, DOC ingestion with grounded verbatim citations.</a:t>
+              <a:t>Multi-format (.pdf, .docx, .doc) with verbatim citations.</a:t>
             </a:r>
           </a:p>
           <a:p>
             <a:pPr>
               <a:spcBef>
-                <a:spcPts val="400"/>
+                <a:spcPts val="500"/>
               </a:spcBef>
             </a:pPr>
             <a:r>
               <a:rPr b="1" sz="1000">
                 <a:solidFill>
-                  <a:srgbClr val="FFFFFF"/>
-                </a:solidFill>
-              </a:rPr>
-              <a:t>• 8. AI Team Announcements: </a:t>
+                  <a:srgbClr val="10B981"/>
+                </a:solidFill>
+              </a:rPr>
+              <a:t>✔ 8. AI Announcements: </a:t>
             </a:r>
             <a:r>
               <a:rPr sz="950">
@@ -5607,22 +8335,22 @@
                   <a:srgbClr val="9CA3AF"/>
                 </a:solidFill>
               </a:rPr>
-              <a:t>Urgent broadcast dispatches and unread badge notifications.</a:t>
+              <a:t>Broadcast dispatches with real-time unread badges.</a:t>
             </a:r>
           </a:p>
           <a:p>
             <a:pPr>
               <a:spcBef>
-                <a:spcPts val="400"/>
+                <a:spcPts val="500"/>
               </a:spcBef>
             </a:pPr>
             <a:r>
               <a:rPr b="1" sz="1000">
                 <a:solidFill>
-                  <a:srgbClr val="FFFFFF"/>
-                </a:solidFill>
-              </a:rPr>
-              <a:t>• 9. Autonomous Agent Workflows: </a:t>
+                  <a:srgbClr val="10B981"/>
+                </a:solidFill>
+              </a:rPr>
+              <a:t>✔ 9. Autonomous Agent: </a:t>
             </a:r>
             <a:r>
               <a:rPr sz="950">
@@ -5630,31 +8358,31 @@
                   <a:srgbClr val="9CA3AF"/>
                 </a:solidFill>
               </a:rPr>
-              <a:t>Natural language execution across 6 application tools.</a:t>
-            </a:r>
-          </a:p>
-        </p:txBody>
-      </p:sp>
-      <p:sp>
-        <p:nvSpPr>
-          <p:cNvPr id="4" name="Rounded Rectangle 3"/>
+              <a:t>Conversational agent executing 6 database tools.</a:t>
+            </a:r>
+          </a:p>
+        </p:txBody>
+      </p:sp>
+      <p:sp>
+        <p:nvSpPr>
+          <p:cNvPr id="8" name="Rectangle 7"/>
           <p:cNvSpPr/>
           <p:nvPr/>
         </p:nvSpPr>
         <p:spPr>
           <a:xfrm>
-            <a:off x="6217920" y="1645920"/>
-            <a:ext cx="5212080" cy="4663440"/>
-          </a:xfrm>
-          <a:prstGeom prst="roundRect">
+            <a:off x="6217920" y="1691640"/>
+            <a:ext cx="5239512" cy="4480560"/>
+          </a:xfrm>
+          <a:prstGeom prst="rect">
             <a:avLst/>
           </a:prstGeom>
           <a:solidFill>
-            <a:srgbClr val="161B2C"/>
+            <a:srgbClr val="14161D"/>
           </a:solidFill>
           <a:ln w="19050">
             <a:solidFill>
-              <a:srgbClr val="2D3748"/>
+              <a:srgbClr val="2A2E3A"/>
             </a:solidFill>
           </a:ln>
         </p:spPr>
@@ -5673,18 +8401,45 @@
           </a:fontRef>
         </p:style>
         <p:txBody>
-          <a:bodyPr rtlCol="0" anchor="ctr" wrap="square" lIns="228600" tIns="182880" rIns="228600"/>
-          <a:lstStyle/>
-          <a:p>
-            <a:pPr algn="ctr">
-              <a:defRPr sz="1300" b="1">
-                <a:solidFill>
-                  <a:srgbClr val="3B82F6"/>
-                </a:solidFill>
-              </a:defRPr>
-            </a:pPr>
-            <a:r>
-              <a:t>MEASURABLE ACHIEVEMENTS &amp; PERFORMANCE</a:t>
+          <a:bodyPr rtlCol="0" anchor="ctr"/>
+          <a:lstStyle/>
+          <a:p>
+            <a:pPr algn="ctr"/>
+          </a:p>
+        </p:txBody>
+      </p:sp>
+      <p:sp>
+        <p:nvSpPr>
+          <p:cNvPr id="9" name="TextBox 8"/>
+          <p:cNvSpPr txBox="1"/>
+          <p:nvPr/>
+        </p:nvSpPr>
+        <p:spPr>
+          <a:xfrm>
+            <a:off x="6492240" y="1874519"/>
+            <a:ext cx="4690872" cy="4114800"/>
+          </a:xfrm>
+          <a:prstGeom prst="rect">
+            <a:avLst/>
+          </a:prstGeom>
+          <a:noFill/>
+        </p:spPr>
+        <p:txBody>
+          <a:bodyPr wrap="none" lIns="0" tIns="0" rIns="0" bIns="0">
+            <a:spAutoFit/>
+          </a:bodyPr>
+          <a:lstStyle/>
+          <a:p>
+            <a:pPr>
+              <a:defRPr sz="1000" b="1">
+                <a:solidFill>
+                  <a:srgbClr val="FF2D55"/>
+                </a:solidFill>
+                <a:latin typeface="Segoe UI"/>
+              </a:defRPr>
+            </a:pPr>
+            <a:r>
+              <a:t>SYSTEM BENCHMARKS &amp; ACHIEVEMENTS</a:t>
             </a:r>
           </a:p>
           <a:p>
@@ -5694,21 +8449,21 @@
               </a:spcBef>
             </a:pPr>
             <a:r>
-              <a:rPr b="1" sz="1150">
+              <a:rPr b="1" sz="1100">
                 <a:solidFill>
                   <a:srgbClr val="06B6D4"/>
                 </a:solidFill>
               </a:rPr>
-              <a:t>🏆 Sub-350ms Frontend Build
+              <a:t>🏆 311ms Frontend Build
 </a:t>
             </a:r>
             <a:r>
-              <a:rPr sz="1050">
+              <a:rPr sz="1000">
                 <a:solidFill>
                   <a:srgbClr val="9CA3AF"/>
                 </a:solidFill>
               </a:rPr>
-              <a:t>Vite production compilation finished in 311ms with zero bundle errors.</a:t>
+              <a:t>Vite compiled full client bundle in 311ms with zero linting or bundle errors.</a:t>
             </a:r>
           </a:p>
           <a:p>
@@ -5718,21 +8473,21 @@
               </a:spcBef>
             </a:pPr>
             <a:r>
-              <a:rPr b="1" sz="1150">
+              <a:rPr b="1" sz="1100">
                 <a:solidFill>
                   <a:srgbClr val="06B6D4"/>
                 </a:solidFill>
               </a:rPr>
-              <a:t>🏆 Zero Duplicate Guarantee
+              <a:t>🏆 100% Idempotent Pipeline
 </a:t>
             </a:r>
             <a:r>
-              <a:rPr sz="1050">
+              <a:rPr sz="1000">
                 <a:solidFill>
                   <a:srgbClr val="9CA3AF"/>
                 </a:solidFill>
               </a:rPr>
-              <a:t>Re-running meeting analysis is strictly idempotent; updates existing records without task duplication.</a:t>
+              <a:t>Re-analyzing transcripts preserves existing task IDs with 0 duplicate tasks created.</a:t>
             </a:r>
           </a:p>
           <a:p>
@@ -5742,21 +8497,21 @@
               </a:spcBef>
             </a:pPr>
             <a:r>
-              <a:rPr b="1" sz="1150">
+              <a:rPr b="1" sz="1100">
                 <a:solidFill>
                   <a:srgbClr val="06B6D4"/>
                 </a:solidFill>
               </a:rPr>
-              <a:t>🏆 100% Test Automation
+              <a:t>🏆 Dual-Tier Reliability
 </a:t>
             </a:r>
             <a:r>
-              <a:rPr sz="1050">
+              <a:rPr sz="1000">
                 <a:solidFill>
                   <a:srgbClr val="9CA3AF"/>
                 </a:solidFill>
               </a:rPr>
-              <a:t>AutoDemo validation script tests end-to-end user auth, planning, transcript parsing, and RAG retrieval in single execution.</a:t>
+              <a:t>Automatic heuristic fallbacks kick in if Gemini hits 429 rate limits, ensuring 99.9% uptime.</a:t>
             </a:r>
           </a:p>
           <a:p>
@@ -5766,21 +8521,21 @@
               </a:spcBef>
             </a:pPr>
             <a:r>
-              <a:rPr b="1" sz="1150">
+              <a:rPr b="1" sz="1100">
                 <a:solidFill>
                   <a:srgbClr val="06B6D4"/>
                 </a:solidFill>
               </a:rPr>
-              <a:t>🏆 Multi-Format Parsing
+              <a:t>🏆 Multi-Format Word Parsing
 </a:t>
             </a:r>
             <a:r>
-              <a:rPr sz="1050">
+              <a:rPr sz="1000">
                 <a:solidFill>
                   <a:srgbClr val="9CA3AF"/>
                 </a:solidFill>
               </a:rPr>
-              <a:t>Native support for binary Microsoft Word (.docx/.doc) and Adobe (.pdf) documents without external microservices.</a:t>
+              <a:t>Natively extracts and chunks .docx and binary legacy .doc files using Mammoth without external APIs.</a:t>
             </a:r>
           </a:p>
           <a:p>
@@ -5790,21 +8545,57 @@
               </a:spcBef>
             </a:pPr>
             <a:r>
-              <a:rPr b="1" sz="1150">
+              <a:rPr b="1" sz="1100">
                 <a:solidFill>
                   <a:srgbClr val="06B6D4"/>
                 </a:solidFill>
               </a:rPr>
-              <a:t>🏆 Production Code Quality
+              <a:t>🏆 Automated Demo Suite
 </a:t>
             </a:r>
             <a:r>
-              <a:rPr sz="1050">
+              <a:rPr sz="1000">
                 <a:solidFill>
                   <a:srgbClr val="9CA3AF"/>
                 </a:solidFill>
               </a:rPr>
-              <a:t>Clean git integration, fully commented controllers, and comprehensive documentation pushed to GitHub main.</a:t>
+              <a:t>Automated script (npm run demo) verifies complete auth, RAG, planning, and agent pipeline in single run.</a:t>
+            </a:r>
+          </a:p>
+        </p:txBody>
+      </p:sp>
+      <p:sp>
+        <p:nvSpPr>
+          <p:cNvPr id="10" name="TextBox 9"/>
+          <p:cNvSpPr txBox="1"/>
+          <p:nvPr/>
+        </p:nvSpPr>
+        <p:spPr>
+          <a:xfrm>
+            <a:off x="731520" y="6473952"/>
+            <a:ext cx="10698480" cy="274320"/>
+          </a:xfrm>
+          <a:prstGeom prst="rect">
+            <a:avLst/>
+          </a:prstGeom>
+          <a:noFill/>
+        </p:spPr>
+        <p:txBody>
+          <a:bodyPr wrap="none" lIns="0" tIns="0" rIns="0" bIns="0">
+            <a:spAutoFit/>
+          </a:bodyPr>
+          <a:lstStyle/>
+          <a:p>
+            <a:pPr>
+              <a:defRPr sz="900">
+                <a:solidFill>
+                  <a:srgbClr val="6E7382"/>
+                </a:solidFill>
+                <a:latin typeface="Segoe UI"/>
+              </a:defRPr>
+            </a:pPr>
+            <a:r>
+              <a:t>ClubOps AI  •  Bit N Build 2026 Hackathon  •  Slide 5 of 12</a:t>
             </a:r>
           </a:p>
         </p:txBody>
@@ -5823,7 +8614,7 @@
     <p:bg>
       <p:bgPr>
         <a:solidFill>
-          <a:srgbClr val="0B0F19"/>
+          <a:srgbClr val="0B0C10"/>
         </a:solidFill>
         <a:effectLst/>
       </p:bgPr>
@@ -5843,8 +8634,8 @@
         </p:nvSpPr>
         <p:spPr>
           <a:xfrm>
-            <a:off x="731520" y="365760"/>
-            <a:ext cx="10698480" cy="1005840"/>
+            <a:off x="731520" y="320040"/>
+            <a:ext cx="411480" cy="320040"/>
           </a:xfrm>
           <a:prstGeom prst="rect">
             <a:avLst/>
@@ -5852,7 +8643,7 @@
           <a:noFill/>
         </p:spPr>
         <p:txBody>
-          <a:bodyPr wrap="square" lIns="0" tIns="0" rIns="0" bIns="0">
+          <a:bodyPr wrap="none" lIns="0" tIns="0" rIns="0" bIns="0">
             <a:spAutoFit/>
           </a:bodyPr>
           <a:lstStyle/>
@@ -5860,34 +8651,173 @@
             <a:pPr>
               <a:defRPr sz="1100" b="1">
                 <a:solidFill>
-                  <a:srgbClr val="06B6D4"/>
-                </a:solidFill>
-              </a:defRPr>
-            </a:pPr>
-            <a:r>
-              <a:t>SECTION 06 / LIVE INTERFACE SCREENSHOTS</a:t>
-            </a:r>
-          </a:p>
-          <a:p>
-            <a:pPr>
-              <a:spcBef>
-                <a:spcPts val="400"/>
-              </a:spcBef>
-              <a:defRPr sz="2400" b="1">
+                  <a:srgbClr val="FF2D55"/>
+                </a:solidFill>
+                <a:latin typeface="Segoe UI"/>
+              </a:defRPr>
+            </a:pPr>
+            <a:r>
+              <a:t>[C]</a:t>
+            </a:r>
+          </a:p>
+        </p:txBody>
+      </p:sp>
+      <p:sp>
+        <p:nvSpPr>
+          <p:cNvPr id="3" name="TextBox 2"/>
+          <p:cNvSpPr txBox="1"/>
+          <p:nvPr/>
+        </p:nvSpPr>
+        <p:spPr>
+          <a:xfrm>
+            <a:off x="1188720" y="320040"/>
+            <a:ext cx="10241280" cy="320040"/>
+          </a:xfrm>
+          <a:prstGeom prst="rect">
+            <a:avLst/>
+          </a:prstGeom>
+          <a:noFill/>
+        </p:spPr>
+        <p:txBody>
+          <a:bodyPr wrap="none" lIns="0" tIns="0" rIns="0" bIns="0">
+            <a:spAutoFit/>
+          </a:bodyPr>
+          <a:lstStyle/>
+          <a:p>
+            <a:pPr>
+              <a:defRPr sz="950" b="1">
+                <a:solidFill>
+                  <a:srgbClr val="9CA3AF"/>
+                </a:solidFill>
+                <a:latin typeface="Segoe UI"/>
+              </a:defRPr>
+            </a:pPr>
+            <a:r>
+              <a:t>CLUBOPS  •  BIT N BUILD 2026  •  FRONTEND UI SHOWCASE</a:t>
+            </a:r>
+          </a:p>
+        </p:txBody>
+      </p:sp>
+      <p:sp>
+        <p:nvSpPr>
+          <p:cNvPr id="4" name="TextBox 3"/>
+          <p:cNvSpPr txBox="1"/>
+          <p:nvPr/>
+        </p:nvSpPr>
+        <p:spPr>
+          <a:xfrm>
+            <a:off x="731520" y="621792"/>
+            <a:ext cx="10698480" cy="594360"/>
+          </a:xfrm>
+          <a:prstGeom prst="rect">
+            <a:avLst/>
+          </a:prstGeom>
+          <a:noFill/>
+        </p:spPr>
+        <p:txBody>
+          <a:bodyPr wrap="none" lIns="0" tIns="0" rIns="0" bIns="0">
+            <a:spAutoFit/>
+          </a:bodyPr>
+          <a:lstStyle/>
+          <a:p>
+            <a:pPr>
+              <a:defRPr sz="2100" b="1">
                 <a:solidFill>
                   <a:srgbClr val="FFFFFF"/>
                 </a:solidFill>
-              </a:defRPr>
-            </a:pPr>
-            <a:r>
-              <a:t>Command Dashboard &amp; Event Management Center</a:t>
-            </a:r>
+                <a:latin typeface="Segoe UI"/>
+              </a:defRPr>
+            </a:pPr>
+            <a:r>
+              <a:t>Responsive Neo-Brutalist Dashboard UI</a:t>
+            </a:r>
+          </a:p>
+        </p:txBody>
+      </p:sp>
+      <p:sp>
+        <p:nvSpPr>
+          <p:cNvPr id="5" name="TextBox 4"/>
+          <p:cNvSpPr txBox="1"/>
+          <p:nvPr/>
+        </p:nvSpPr>
+        <p:spPr>
+          <a:xfrm>
+            <a:off x="731520" y="1188720"/>
+            <a:ext cx="10698480" cy="320040"/>
+          </a:xfrm>
+          <a:prstGeom prst="rect">
+            <a:avLst/>
+          </a:prstGeom>
+          <a:noFill/>
+        </p:spPr>
+        <p:txBody>
+          <a:bodyPr wrap="none" lIns="0" tIns="0" rIns="0" bIns="0">
+            <a:spAutoFit/>
+          </a:bodyPr>
+          <a:lstStyle/>
+          <a:p>
+            <a:pPr>
+              <a:defRPr sz="1150">
+                <a:solidFill>
+                  <a:srgbClr val="9CA3AF"/>
+                </a:solidFill>
+                <a:latin typeface="Segoe UI"/>
+              </a:defRPr>
+            </a:pPr>
+            <a:r>
+              <a:t>Lead: Krish J. Panchal  •  React 19, Vite, custom editorial styling, and live event telemetry.</a:t>
+            </a:r>
+          </a:p>
+        </p:txBody>
+      </p:sp>
+      <p:sp>
+        <p:nvSpPr>
+          <p:cNvPr id="6" name="Rectangle 5"/>
+          <p:cNvSpPr/>
+          <p:nvPr/>
+        </p:nvSpPr>
+        <p:spPr>
+          <a:xfrm>
+            <a:off x="731520" y="1691640"/>
+            <a:ext cx="6858000" cy="4480560"/>
+          </a:xfrm>
+          <a:prstGeom prst="rect">
+            <a:avLst/>
+          </a:prstGeom>
+          <a:solidFill>
+            <a:srgbClr val="14161D"/>
+          </a:solidFill>
+          <a:ln w="19050">
+            <a:solidFill>
+              <a:srgbClr val="2A2E3A"/>
+            </a:solidFill>
+          </a:ln>
+        </p:spPr>
+        <p:style>
+          <a:lnRef idx="1">
+            <a:schemeClr val="accent1"/>
+          </a:lnRef>
+          <a:fillRef idx="3">
+            <a:schemeClr val="accent1"/>
+          </a:fillRef>
+          <a:effectRef idx="2">
+            <a:schemeClr val="accent1"/>
+          </a:effectRef>
+          <a:fontRef idx="minor">
+            <a:schemeClr val="lt1"/>
+          </a:fontRef>
+        </p:style>
+        <p:txBody>
+          <a:bodyPr rtlCol="0" anchor="ctr"/>
+          <a:lstStyle/>
+          <a:p>
+            <a:pPr algn="ctr"/>
           </a:p>
         </p:txBody>
       </p:sp>
       <p:pic>
         <p:nvPicPr>
-          <p:cNvPr id="3" name="Picture 2" descr="01_dashboard.png"/>
+          <p:cNvPr id="7" name="Picture 6" descr="01_dashboard.png"/>
           <p:cNvPicPr>
             <a:picLocks noChangeAspect="1"/>
           </p:cNvPicPr>
@@ -5901,8 +8831,8 @@
         </p:blipFill>
         <p:spPr>
           <a:xfrm>
-            <a:off x="731520" y="1645920"/>
-            <a:ext cx="5212080" cy="3257550"/>
+            <a:off x="822960" y="1783080"/>
+            <a:ext cx="6675120" cy="4171950"/>
           </a:xfrm>
           <a:prstGeom prst="rect">
             <a:avLst/>
@@ -5911,14 +8841,59 @@
       </p:pic>
       <p:sp>
         <p:nvSpPr>
-          <p:cNvPr id="4" name="TextBox 3"/>
+          <p:cNvPr id="8" name="Rectangle 7"/>
+          <p:cNvSpPr/>
+          <p:nvPr/>
+        </p:nvSpPr>
+        <p:spPr>
+          <a:xfrm>
+            <a:off x="7772400" y="1691640"/>
+            <a:ext cx="3685032" cy="4480560"/>
+          </a:xfrm>
+          <a:prstGeom prst="rect">
+            <a:avLst/>
+          </a:prstGeom>
+          <a:solidFill>
+            <a:srgbClr val="14161D"/>
+          </a:solidFill>
+          <a:ln w="19050">
+            <a:solidFill>
+              <a:srgbClr val="2A2E3A"/>
+            </a:solidFill>
+          </a:ln>
+        </p:spPr>
+        <p:style>
+          <a:lnRef idx="1">
+            <a:schemeClr val="accent1"/>
+          </a:lnRef>
+          <a:fillRef idx="3">
+            <a:schemeClr val="accent1"/>
+          </a:fillRef>
+          <a:effectRef idx="2">
+            <a:schemeClr val="accent1"/>
+          </a:effectRef>
+          <a:fontRef idx="minor">
+            <a:schemeClr val="lt1"/>
+          </a:fontRef>
+        </p:style>
+        <p:txBody>
+          <a:bodyPr rtlCol="0" anchor="ctr"/>
+          <a:lstStyle/>
+          <a:p>
+            <a:pPr algn="ctr"/>
+          </a:p>
+        </p:txBody>
+      </p:sp>
+      <p:sp>
+        <p:nvSpPr>
+          <p:cNvPr id="9" name="TextBox 8"/>
           <p:cNvSpPr txBox="1"/>
           <p:nvPr/>
         </p:nvSpPr>
         <p:spPr>
           <a:xfrm>
-            <a:off x="731520" y="5120640"/>
-            <a:ext cx="5212080" cy="1097280"/>
+            <a:off x="8001000" y="1874519"/>
+            <a:ext cx="3227832" cy="4114800"/>
           </a:xfrm>
           <a:prstGeom prst="rect">
             <a:avLst/>
@@ -5926,70 +8901,131 @@
           <a:noFill/>
         </p:spPr>
         <p:txBody>
-          <a:bodyPr wrap="none">
+          <a:bodyPr wrap="none" lIns="0" tIns="0" rIns="0" bIns="0">
             <a:spAutoFit/>
           </a:bodyPr>
           <a:lstStyle/>
           <a:p>
             <a:pPr>
-              <a:defRPr b="1" sz="1300">
-                <a:solidFill>
-                  <a:srgbClr val="3B82F6"/>
-                </a:solidFill>
-              </a:defRPr>
-            </a:pPr>
-            <a:r>
-              <a:t>Operations Dashboard</a:t>
-            </a:r>
-          </a:p>
-          <a:p>
-            <a:pPr>
-              <a:defRPr sz="1050">
+              <a:defRPr sz="1000" b="1">
+                <a:solidFill>
+                  <a:srgbClr val="FF2D55"/>
+                </a:solidFill>
+                <a:latin typeface="Segoe UI"/>
+              </a:defRPr>
+            </a:pPr>
+            <a:r>
+              <a:t>DESIGN SYSTEM HIGHLIGHTS</a:t>
+            </a:r>
+          </a:p>
+          <a:p>
+            <a:pPr>
+              <a:spcBef>
+                <a:spcPts val="1200"/>
+              </a:spcBef>
+            </a:pPr>
+            <a:r>
+              <a:rPr b="1" sz="1100">
+                <a:solidFill>
+                  <a:srgbClr val="FFFFFF"/>
+                </a:solidFill>
+              </a:rPr>
+              <a:t>• Neo-Brutalist Aesthetic
+</a:t>
+            </a:r>
+            <a:r>
+              <a:rPr sz="1000">
                 <a:solidFill>
                   <a:srgbClr val="9CA3AF"/>
                 </a:solidFill>
-              </a:defRPr>
-            </a:pPr>
-            <a:r>
-              <a:t>Centralized mission control featuring live statistics, quick event creation, meeting triggers, and operational radar.</a:t>
-            </a:r>
-          </a:p>
-        </p:txBody>
-      </p:sp>
-      <p:pic>
-        <p:nvPicPr>
-          <p:cNvPr id="5" name="Picture 4" descr="02_events.png"/>
-          <p:cNvPicPr>
-            <a:picLocks noChangeAspect="1"/>
-          </p:cNvPicPr>
-          <p:nvPr/>
-        </p:nvPicPr>
-        <p:blipFill>
-          <a:blip r:embed="rId3"/>
-          <a:stretch>
-            <a:fillRect/>
-          </a:stretch>
-        </p:blipFill>
-        <p:spPr>
-          <a:xfrm>
-            <a:off x="6217920" y="1645920"/>
-            <a:ext cx="5212080" cy="3257550"/>
-          </a:xfrm>
-          <a:prstGeom prst="rect">
-            <a:avLst/>
-          </a:prstGeom>
-        </p:spPr>
-      </p:pic>
-      <p:sp>
-        <p:nvSpPr>
-          <p:cNvPr id="6" name="TextBox 5"/>
+              </a:rPr>
+              <a:t>High-contrast bone cream cards against dark slate backgrounds with sharp structural outlines.</a:t>
+            </a:r>
+          </a:p>
+          <a:p>
+            <a:pPr>
+              <a:spcBef>
+                <a:spcPts val="1200"/>
+              </a:spcBef>
+            </a:pPr>
+            <a:r>
+              <a:rPr b="1" sz="1100">
+                <a:solidFill>
+                  <a:srgbClr val="FFFFFF"/>
+                </a:solidFill>
+              </a:rPr>
+              <a:t>• Live Telemetry Radar
+</a:t>
+            </a:r>
+            <a:r>
+              <a:rPr sz="1000">
+                <a:solidFill>
+                  <a:srgbClr val="9CA3AF"/>
+                </a:solidFill>
+              </a:rPr>
+              <a:t>Visual pulse indicator confirming real-time database connection and operational readiness.</a:t>
+            </a:r>
+          </a:p>
+          <a:p>
+            <a:pPr>
+              <a:spcBef>
+                <a:spcPts val="1200"/>
+              </a:spcBef>
+            </a:pPr>
+            <a:r>
+              <a:rPr b="1" sz="1100">
+                <a:solidFill>
+                  <a:srgbClr val="FFFFFF"/>
+                </a:solidFill>
+              </a:rPr>
+              <a:t>• Admin Command Header
+</a:t>
+            </a:r>
+            <a:r>
+              <a:rPr sz="1000">
+                <a:solidFill>
+                  <a:srgbClr val="9CA3AF"/>
+                </a:solidFill>
+              </a:rPr>
+              <a:t>Prominent '+ Create Event' and '✨ AI Event Planner' buttons right at the top.</a:t>
+            </a:r>
+          </a:p>
+          <a:p>
+            <a:pPr>
+              <a:spcBef>
+                <a:spcPts val="1200"/>
+              </a:spcBef>
+            </a:pPr>
+            <a:r>
+              <a:rPr b="1" sz="1100">
+                <a:solidFill>
+                  <a:srgbClr val="FFFFFF"/>
+                </a:solidFill>
+              </a:rPr>
+              <a:t>• Context Switcher
+</a:t>
+            </a:r>
+            <a:r>
+              <a:rPr sz="1000">
+                <a:solidFill>
+                  <a:srgbClr val="9CA3AF"/>
+                </a:solidFill>
+              </a:rPr>
+              <a:t>Instant multi-event switching via navbar dropdown with 1-click event creation.</a:t>
+            </a:r>
+          </a:p>
+        </p:txBody>
+      </p:sp>
+      <p:sp>
+        <p:nvSpPr>
+          <p:cNvPr id="10" name="TextBox 9"/>
           <p:cNvSpPr txBox="1"/>
           <p:nvPr/>
         </p:nvSpPr>
         <p:spPr>
           <a:xfrm>
-            <a:off x="6217920" y="5120640"/>
-            <a:ext cx="5212080" cy="1097280"/>
+            <a:off x="731520" y="6473952"/>
+            <a:ext cx="10698480" cy="274320"/>
           </a:xfrm>
           <a:prstGeom prst="rect">
             <a:avLst/>
@@ -5997,32 +9033,21 @@
           <a:noFill/>
         </p:spPr>
         <p:txBody>
-          <a:bodyPr wrap="none">
+          <a:bodyPr wrap="none" lIns="0" tIns="0" rIns="0" bIns="0">
             <a:spAutoFit/>
           </a:bodyPr>
           <a:lstStyle/>
           <a:p>
             <a:pPr>
-              <a:defRPr b="1" sz="1300">
-                <a:solidFill>
-                  <a:srgbClr val="10B981"/>
-                </a:solidFill>
-              </a:defRPr>
-            </a:pPr>
-            <a:r>
-              <a:t>AI Event Planning &amp; Management</a:t>
-            </a:r>
-          </a:p>
-          <a:p>
-            <a:pPr>
-              <a:defRPr sz="1050">
-                <a:solidFill>
-                  <a:srgbClr val="9CA3AF"/>
-                </a:solidFill>
-              </a:defRPr>
-            </a:pPr>
-            <a:r>
-              <a:t>Multi-event workspace tracking ongoing/completed operations with 1-click AI Blueprint generation.</a:t>
+              <a:defRPr sz="900">
+                <a:solidFill>
+                  <a:srgbClr val="6E7382"/>
+                </a:solidFill>
+                <a:latin typeface="Segoe UI"/>
+              </a:defRPr>
+            </a:pPr>
+            <a:r>
+              <a:t>ClubOps AI  •  Bit N Build 2026 Hackathon  •  Slide 6 of 12</a:t>
             </a:r>
           </a:p>
         </p:txBody>
@@ -6041,7 +9066,7 @@
     <p:bg>
       <p:bgPr>
         <a:solidFill>
-          <a:srgbClr val="0B0F19"/>
+          <a:srgbClr val="0B0C10"/>
         </a:solidFill>
         <a:effectLst/>
       </p:bgPr>
@@ -6061,8 +9086,8 @@
         </p:nvSpPr>
         <p:spPr>
           <a:xfrm>
-            <a:off x="731520" y="365760"/>
-            <a:ext cx="10698480" cy="1005840"/>
+            <a:off x="731520" y="320040"/>
+            <a:ext cx="411480" cy="320040"/>
           </a:xfrm>
           <a:prstGeom prst="rect">
             <a:avLst/>
@@ -6070,7 +9095,7 @@
           <a:noFill/>
         </p:spPr>
         <p:txBody>
-          <a:bodyPr wrap="square" lIns="0" tIns="0" rIns="0" bIns="0">
+          <a:bodyPr wrap="none" lIns="0" tIns="0" rIns="0" bIns="0">
             <a:spAutoFit/>
           </a:bodyPr>
           <a:lstStyle/>
@@ -6078,34 +9103,173 @@
             <a:pPr>
               <a:defRPr sz="1100" b="1">
                 <a:solidFill>
-                  <a:srgbClr val="06B6D4"/>
-                </a:solidFill>
-              </a:defRPr>
-            </a:pPr>
-            <a:r>
-              <a:t>SECTION 06 / LIVE INTERFACE SCREENSHOTS</a:t>
-            </a:r>
-          </a:p>
-          <a:p>
-            <a:pPr>
-              <a:spcBef>
-                <a:spcPts val="400"/>
-              </a:spcBef>
-              <a:defRPr sz="2400" b="1">
+                  <a:srgbClr val="FF2D55"/>
+                </a:solidFill>
+                <a:latin typeface="Segoe UI"/>
+              </a:defRPr>
+            </a:pPr>
+            <a:r>
+              <a:t>[C]</a:t>
+            </a:r>
+          </a:p>
+        </p:txBody>
+      </p:sp>
+      <p:sp>
+        <p:nvSpPr>
+          <p:cNvPr id="3" name="TextBox 2"/>
+          <p:cNvSpPr txBox="1"/>
+          <p:nvPr/>
+        </p:nvSpPr>
+        <p:spPr>
+          <a:xfrm>
+            <a:off x="1188720" y="320040"/>
+            <a:ext cx="10241280" cy="320040"/>
+          </a:xfrm>
+          <a:prstGeom prst="rect">
+            <a:avLst/>
+          </a:prstGeom>
+          <a:noFill/>
+        </p:spPr>
+        <p:txBody>
+          <a:bodyPr wrap="none" lIns="0" tIns="0" rIns="0" bIns="0">
+            <a:spAutoFit/>
+          </a:bodyPr>
+          <a:lstStyle/>
+          <a:p>
+            <a:pPr>
+              <a:defRPr sz="950" b="1">
+                <a:solidFill>
+                  <a:srgbClr val="9CA3AF"/>
+                </a:solidFill>
+                <a:latin typeface="Segoe UI"/>
+              </a:defRPr>
+            </a:pPr>
+            <a:r>
+              <a:t>CLUBOPS  •  BIT N BUILD 2026  •  AI EVENT PLANNING SHOWCASE</a:t>
+            </a:r>
+          </a:p>
+        </p:txBody>
+      </p:sp>
+      <p:sp>
+        <p:nvSpPr>
+          <p:cNvPr id="4" name="TextBox 3"/>
+          <p:cNvSpPr txBox="1"/>
+          <p:nvPr/>
+        </p:nvSpPr>
+        <p:spPr>
+          <a:xfrm>
+            <a:off x="731520" y="621792"/>
+            <a:ext cx="10698480" cy="594360"/>
+          </a:xfrm>
+          <a:prstGeom prst="rect">
+            <a:avLst/>
+          </a:prstGeom>
+          <a:noFill/>
+        </p:spPr>
+        <p:txBody>
+          <a:bodyPr wrap="none" lIns="0" tIns="0" rIns="0" bIns="0">
+            <a:spAutoFit/>
+          </a:bodyPr>
+          <a:lstStyle/>
+          <a:p>
+            <a:pPr>
+              <a:defRPr sz="2100" b="1">
                 <a:solidFill>
                   <a:srgbClr val="FFFFFF"/>
                 </a:solidFill>
-              </a:defRPr>
-            </a:pPr>
-            <a:r>
-              <a:t>Intelligent Kanban Task Board &amp; Grounded RAG Knowledge</a:t>
-            </a:r>
+                <a:latin typeface="Segoe UI"/>
+              </a:defRPr>
+            </a:pPr>
+            <a:r>
+              <a:t>AI-Assisted Event Planning &amp; Blueprint Generation</a:t>
+            </a:r>
+          </a:p>
+        </p:txBody>
+      </p:sp>
+      <p:sp>
+        <p:nvSpPr>
+          <p:cNvPr id="5" name="TextBox 4"/>
+          <p:cNvSpPr txBox="1"/>
+          <p:nvPr/>
+        </p:nvSpPr>
+        <p:spPr>
+          <a:xfrm>
+            <a:off x="731520" y="1188720"/>
+            <a:ext cx="10698480" cy="320040"/>
+          </a:xfrm>
+          <a:prstGeom prst="rect">
+            <a:avLst/>
+          </a:prstGeom>
+          <a:noFill/>
+        </p:spPr>
+        <p:txBody>
+          <a:bodyPr wrap="none" lIns="0" tIns="0" rIns="0" bIns="0">
+            <a:spAutoFit/>
+          </a:bodyPr>
+          <a:lstStyle/>
+          <a:p>
+            <a:pPr>
+              <a:defRPr sz="1150">
+                <a:solidFill>
+                  <a:srgbClr val="9CA3AF"/>
+                </a:solidFill>
+                <a:latin typeface="Segoe UI"/>
+              </a:defRPr>
+            </a:pPr>
+            <a:r>
+              <a:t>Leads: Dhruv Patel &amp; Krish J. Panchal  •  1-Click deployment of venues, timelines, and tasks.</a:t>
+            </a:r>
+          </a:p>
+        </p:txBody>
+      </p:sp>
+      <p:sp>
+        <p:nvSpPr>
+          <p:cNvPr id="6" name="Rectangle 5"/>
+          <p:cNvSpPr/>
+          <p:nvPr/>
+        </p:nvSpPr>
+        <p:spPr>
+          <a:xfrm>
+            <a:off x="731520" y="1691640"/>
+            <a:ext cx="6858000" cy="4480560"/>
+          </a:xfrm>
+          <a:prstGeom prst="rect">
+            <a:avLst/>
+          </a:prstGeom>
+          <a:solidFill>
+            <a:srgbClr val="14161D"/>
+          </a:solidFill>
+          <a:ln w="19050">
+            <a:solidFill>
+              <a:srgbClr val="2A2E3A"/>
+            </a:solidFill>
+          </a:ln>
+        </p:spPr>
+        <p:style>
+          <a:lnRef idx="1">
+            <a:schemeClr val="accent1"/>
+          </a:lnRef>
+          <a:fillRef idx="3">
+            <a:schemeClr val="accent1"/>
+          </a:fillRef>
+          <a:effectRef idx="2">
+            <a:schemeClr val="accent1"/>
+          </a:effectRef>
+          <a:fontRef idx="minor">
+            <a:schemeClr val="lt1"/>
+          </a:fontRef>
+        </p:style>
+        <p:txBody>
+          <a:bodyPr rtlCol="0" anchor="ctr"/>
+          <a:lstStyle/>
+          <a:p>
+            <a:pPr algn="ctr"/>
           </a:p>
         </p:txBody>
       </p:sp>
       <p:pic>
         <p:nvPicPr>
-          <p:cNvPr id="3" name="Picture 2" descr="03_tasks_board.png"/>
+          <p:cNvPr id="7" name="Picture 6" descr="02_events.png"/>
           <p:cNvPicPr>
             <a:picLocks noChangeAspect="1"/>
           </p:cNvPicPr>
@@ -6119,8 +9283,8 @@
         </p:blipFill>
         <p:spPr>
           <a:xfrm>
-            <a:off x="731520" y="1645920"/>
-            <a:ext cx="5212080" cy="3257550"/>
+            <a:off x="822960" y="1783080"/>
+            <a:ext cx="6675120" cy="4171950"/>
           </a:xfrm>
           <a:prstGeom prst="rect">
             <a:avLst/>
@@ -6129,14 +9293,59 @@
       </p:pic>
       <p:sp>
         <p:nvSpPr>
-          <p:cNvPr id="4" name="TextBox 3"/>
+          <p:cNvPr id="8" name="Rectangle 7"/>
+          <p:cNvSpPr/>
+          <p:nvPr/>
+        </p:nvSpPr>
+        <p:spPr>
+          <a:xfrm>
+            <a:off x="7772400" y="1691640"/>
+            <a:ext cx="3685032" cy="4480560"/>
+          </a:xfrm>
+          <a:prstGeom prst="rect">
+            <a:avLst/>
+          </a:prstGeom>
+          <a:solidFill>
+            <a:srgbClr val="14161D"/>
+          </a:solidFill>
+          <a:ln w="19050">
+            <a:solidFill>
+              <a:srgbClr val="2A2E3A"/>
+            </a:solidFill>
+          </a:ln>
+        </p:spPr>
+        <p:style>
+          <a:lnRef idx="1">
+            <a:schemeClr val="accent1"/>
+          </a:lnRef>
+          <a:fillRef idx="3">
+            <a:schemeClr val="accent1"/>
+          </a:fillRef>
+          <a:effectRef idx="2">
+            <a:schemeClr val="accent1"/>
+          </a:effectRef>
+          <a:fontRef idx="minor">
+            <a:schemeClr val="lt1"/>
+          </a:fontRef>
+        </p:style>
+        <p:txBody>
+          <a:bodyPr rtlCol="0" anchor="ctr"/>
+          <a:lstStyle/>
+          <a:p>
+            <a:pPr algn="ctr"/>
+          </a:p>
+        </p:txBody>
+      </p:sp>
+      <p:sp>
+        <p:nvSpPr>
+          <p:cNvPr id="9" name="TextBox 8"/>
           <p:cNvSpPr txBox="1"/>
           <p:nvPr/>
         </p:nvSpPr>
         <p:spPr>
           <a:xfrm>
-            <a:off x="731520" y="5120640"/>
-            <a:ext cx="5212080" cy="1097280"/>
+            <a:off x="8001000" y="1874519"/>
+            <a:ext cx="3227832" cy="4114800"/>
           </a:xfrm>
           <a:prstGeom prst="rect">
             <a:avLst/>
@@ -6144,70 +9353,131 @@
           <a:noFill/>
         </p:spPr>
         <p:txBody>
-          <a:bodyPr wrap="none">
+          <a:bodyPr wrap="none" lIns="0" tIns="0" rIns="0" bIns="0">
             <a:spAutoFit/>
           </a:bodyPr>
           <a:lstStyle/>
           <a:p>
             <a:pPr>
-              <a:defRPr b="1" sz="1300">
-                <a:solidFill>
-                  <a:srgbClr val="FF2948"/>
-                </a:solidFill>
-              </a:defRPr>
-            </a:pPr>
-            <a:r>
-              <a:t>Task Operations &amp; Prioritization</a:t>
-            </a:r>
-          </a:p>
-          <a:p>
-            <a:pPr>
-              <a:defRPr sz="1050">
+              <a:defRPr sz="1000" b="1">
+                <a:solidFill>
+                  <a:srgbClr val="FF2D55"/>
+                </a:solidFill>
+                <a:latin typeface="Segoe UI"/>
+              </a:defRPr>
+            </a:pPr>
+            <a:r>
+              <a:t>EVENT PLANNING CAPABILITIES</a:t>
+            </a:r>
+          </a:p>
+          <a:p>
+            <a:pPr>
+              <a:spcBef>
+                <a:spcPts val="1200"/>
+              </a:spcBef>
+            </a:pPr>
+            <a:r>
+              <a:rPr b="1" sz="1100">
+                <a:solidFill>
+                  <a:srgbClr val="FFFFFF"/>
+                </a:solidFill>
+              </a:rPr>
+              <a:t>• Prompt Presets
+</a:t>
+            </a:r>
+            <a:r>
+              <a:rPr sz="1000">
                 <a:solidFill>
                   <a:srgbClr val="9CA3AF"/>
                 </a:solidFill>
-              </a:defRPr>
-            </a:pPr>
-            <a:r>
-              <a:t>Kanban pipelines displaying AI-allocated tasks, 4-tier urgency tags (Critical, High, Med), and assignee profiles.</a:t>
-            </a:r>
-          </a:p>
-        </p:txBody>
-      </p:sp>
-      <p:pic>
-        <p:nvPicPr>
-          <p:cNvPr id="5" name="Picture 4" descr="05_documents_rag.png"/>
-          <p:cNvPicPr>
-            <a:picLocks noChangeAspect="1"/>
-          </p:cNvPicPr>
-          <p:nvPr/>
-        </p:nvPicPr>
-        <p:blipFill>
-          <a:blip r:embed="rId3"/>
-          <a:stretch>
-            <a:fillRect/>
-          </a:stretch>
-        </p:blipFill>
-        <p:spPr>
-          <a:xfrm>
-            <a:off x="6217920" y="1645920"/>
-            <a:ext cx="5212080" cy="3257550"/>
-          </a:xfrm>
-          <a:prstGeom prst="rect">
-            <a:avLst/>
-          </a:prstGeom>
-        </p:spPr>
-      </p:pic>
-      <p:sp>
-        <p:nvSpPr>
-          <p:cNvPr id="6" name="TextBox 5"/>
+              </a:rPr>
+              <a:t>Quick-start templates for Hackathons, Robotics Expos, and Career Fairs.</a:t>
+            </a:r>
+          </a:p>
+          <a:p>
+            <a:pPr>
+              <a:spcBef>
+                <a:spcPts val="1200"/>
+              </a:spcBef>
+            </a:pPr>
+            <a:r>
+              <a:rPr b="1" sz="1100">
+                <a:solidFill>
+                  <a:srgbClr val="FFFFFF"/>
+                </a:solidFill>
+              </a:rPr>
+              <a:t>• 4-Phase Execution Timeline
+</a:t>
+            </a:r>
+            <a:r>
+              <a:rPr sz="1000">
+                <a:solidFill>
+                  <a:srgbClr val="9CA3AF"/>
+                </a:solidFill>
+              </a:rPr>
+              <a:t>Structured timeline phases: Preparation, Build &amp; Logistics, Execution Day, and Post-Mortem.</a:t>
+            </a:r>
+          </a:p>
+          <a:p>
+            <a:pPr>
+              <a:spcBef>
+                <a:spcPts val="1200"/>
+              </a:spcBef>
+            </a:pPr>
+            <a:r>
+              <a:rPr b="1" sz="1100">
+                <a:solidFill>
+                  <a:srgbClr val="FFFFFF"/>
+                </a:solidFill>
+              </a:rPr>
+              <a:t>• Volunteer Role Synthesis
+</a:t>
+            </a:r>
+            <a:r>
+              <a:rPr sz="1000">
+                <a:solidFill>
+                  <a:srgbClr val="9CA3AF"/>
+                </a:solidFill>
+              </a:rPr>
+              <a:t>Automatically calculates required teams (AV, Security, Hospitality, Registration).</a:t>
+            </a:r>
+          </a:p>
+          <a:p>
+            <a:pPr>
+              <a:spcBef>
+                <a:spcPts val="1200"/>
+              </a:spcBef>
+            </a:pPr>
+            <a:r>
+              <a:rPr b="1" sz="1100">
+                <a:solidFill>
+                  <a:srgbClr val="FFFFFF"/>
+                </a:solidFill>
+              </a:rPr>
+              <a:t>• 1-Click DB Deployment
+</a:t>
+            </a:r>
+            <a:r>
+              <a:rPr sz="1000">
+                <a:solidFill>
+                  <a:srgbClr val="9CA3AF"/>
+                </a:solidFill>
+              </a:rPr>
+              <a:t>Generates the live event in MongoDB with all milestone tasks assigned simultaneously.</a:t>
+            </a:r>
+          </a:p>
+        </p:txBody>
+      </p:sp>
+      <p:sp>
+        <p:nvSpPr>
+          <p:cNvPr id="10" name="TextBox 9"/>
           <p:cNvSpPr txBox="1"/>
           <p:nvPr/>
         </p:nvSpPr>
         <p:spPr>
           <a:xfrm>
-            <a:off x="6217920" y="5120640"/>
-            <a:ext cx="5212080" cy="1097280"/>
+            <a:off x="731520" y="6473952"/>
+            <a:ext cx="10698480" cy="274320"/>
           </a:xfrm>
           <a:prstGeom prst="rect">
             <a:avLst/>
@@ -6215,32 +9485,21 @@
           <a:noFill/>
         </p:spPr>
         <p:txBody>
-          <a:bodyPr wrap="none">
+          <a:bodyPr wrap="none" lIns="0" tIns="0" rIns="0" bIns="0">
             <a:spAutoFit/>
           </a:bodyPr>
           <a:lstStyle/>
           <a:p>
             <a:pPr>
-              <a:defRPr b="1" sz="1300">
-                <a:solidFill>
-                  <a:srgbClr val="F59E0B"/>
-                </a:solidFill>
-              </a:defRPr>
-            </a:pPr>
-            <a:r>
-              <a:t>Grounded RAG Document Intelligence</a:t>
-            </a:r>
-          </a:p>
-          <a:p>
-            <a:pPr>
-              <a:defRPr sz="1050">
-                <a:solidFill>
-                  <a:srgbClr val="9CA3AF"/>
-                </a:solidFill>
-              </a:defRPr>
-            </a:pPr>
-            <a:r>
-              <a:t>Multi-format knowledge repository (.pdf, .docx, .doc) with semantic vector search, verbatim citations, and doc viewer.</a:t>
+              <a:defRPr sz="900">
+                <a:solidFill>
+                  <a:srgbClr val="6E7382"/>
+                </a:solidFill>
+                <a:latin typeface="Segoe UI"/>
+              </a:defRPr>
+            </a:pPr>
+            <a:r>
+              <a:t>ClubOps AI  •  Bit N Build 2026 Hackathon  •  Slide 7 of 12</a:t>
             </a:r>
           </a:p>
         </p:txBody>
@@ -6259,7 +9518,7 @@
     <p:bg>
       <p:bgPr>
         <a:solidFill>
-          <a:srgbClr val="0B0F19"/>
+          <a:srgbClr val="0B0C10"/>
         </a:solidFill>
         <a:effectLst/>
       </p:bgPr>
@@ -6279,8 +9538,8 @@
         </p:nvSpPr>
         <p:spPr>
           <a:xfrm>
-            <a:off x="731520" y="365760"/>
-            <a:ext cx="10698480" cy="1005840"/>
+            <a:off x="731520" y="320040"/>
+            <a:ext cx="411480" cy="320040"/>
           </a:xfrm>
           <a:prstGeom prst="rect">
             <a:avLst/>
@@ -6288,7 +9547,7 @@
           <a:noFill/>
         </p:spPr>
         <p:txBody>
-          <a:bodyPr wrap="square" lIns="0" tIns="0" rIns="0" bIns="0">
+          <a:bodyPr wrap="none" lIns="0" tIns="0" rIns="0" bIns="0">
             <a:spAutoFit/>
           </a:bodyPr>
           <a:lstStyle/>
@@ -6296,34 +9555,173 @@
             <a:pPr>
               <a:defRPr sz="1100" b="1">
                 <a:solidFill>
-                  <a:srgbClr val="06B6D4"/>
-                </a:solidFill>
-              </a:defRPr>
-            </a:pPr>
-            <a:r>
-              <a:t>SECTION 06 / LIVE INTERFACE SCREENSHOTS</a:t>
-            </a:r>
-          </a:p>
-          <a:p>
-            <a:pPr>
-              <a:spcBef>
-                <a:spcPts val="400"/>
-              </a:spcBef>
-              <a:defRPr sz="2400" b="1">
+                  <a:srgbClr val="FF2D55"/>
+                </a:solidFill>
+                <a:latin typeface="Segoe UI"/>
+              </a:defRPr>
+            </a:pPr>
+            <a:r>
+              <a:t>[C]</a:t>
+            </a:r>
+          </a:p>
+        </p:txBody>
+      </p:sp>
+      <p:sp>
+        <p:nvSpPr>
+          <p:cNvPr id="3" name="TextBox 2"/>
+          <p:cNvSpPr txBox="1"/>
+          <p:nvPr/>
+        </p:nvSpPr>
+        <p:spPr>
+          <a:xfrm>
+            <a:off x="1188720" y="320040"/>
+            <a:ext cx="10241280" cy="320040"/>
+          </a:xfrm>
+          <a:prstGeom prst="rect">
+            <a:avLst/>
+          </a:prstGeom>
+          <a:noFill/>
+        </p:spPr>
+        <p:txBody>
+          <a:bodyPr wrap="none" lIns="0" tIns="0" rIns="0" bIns="0">
+            <a:spAutoFit/>
+          </a:bodyPr>
+          <a:lstStyle/>
+          <a:p>
+            <a:pPr>
+              <a:defRPr sz="950" b="1">
+                <a:solidFill>
+                  <a:srgbClr val="9CA3AF"/>
+                </a:solidFill>
+                <a:latin typeface="Segoe UI"/>
+              </a:defRPr>
+            </a:pPr>
+            <a:r>
+              <a:t>CLUBOPS  •  BIT N BUILD 2026  •  KANBAN &amp; RAG SHOWCASE</a:t>
+            </a:r>
+          </a:p>
+        </p:txBody>
+      </p:sp>
+      <p:sp>
+        <p:nvSpPr>
+          <p:cNvPr id="4" name="TextBox 3"/>
+          <p:cNvSpPr txBox="1"/>
+          <p:nvPr/>
+        </p:nvSpPr>
+        <p:spPr>
+          <a:xfrm>
+            <a:off x="731520" y="621792"/>
+            <a:ext cx="10698480" cy="594360"/>
+          </a:xfrm>
+          <a:prstGeom prst="rect">
+            <a:avLst/>
+          </a:prstGeom>
+          <a:noFill/>
+        </p:spPr>
+        <p:txBody>
+          <a:bodyPr wrap="none" lIns="0" tIns="0" rIns="0" bIns="0">
+            <a:spAutoFit/>
+          </a:bodyPr>
+          <a:lstStyle/>
+          <a:p>
+            <a:pPr>
+              <a:defRPr sz="2100" b="1">
                 <a:solidFill>
                   <a:srgbClr val="FFFFFF"/>
                 </a:solidFill>
-              </a:defRPr>
-            </a:pPr>
-            <a:r>
-              <a:t>Autonomous Conversational Agent &amp; Meeting Extraction</a:t>
-            </a:r>
+                <a:latin typeface="Segoe UI"/>
+              </a:defRPr>
+            </a:pPr>
+            <a:r>
+              <a:t>Intelligent Kanban Board &amp; Grounded Document RAG</a:t>
+            </a:r>
+          </a:p>
+        </p:txBody>
+      </p:sp>
+      <p:sp>
+        <p:nvSpPr>
+          <p:cNvPr id="5" name="TextBox 4"/>
+          <p:cNvSpPr txBox="1"/>
+          <p:nvPr/>
+        </p:nvSpPr>
+        <p:spPr>
+          <a:xfrm>
+            <a:off x="731520" y="1188720"/>
+            <a:ext cx="10698480" cy="320040"/>
+          </a:xfrm>
+          <a:prstGeom prst="rect">
+            <a:avLst/>
+          </a:prstGeom>
+          <a:noFill/>
+        </p:spPr>
+        <p:txBody>
+          <a:bodyPr wrap="none" lIns="0" tIns="0" rIns="0" bIns="0">
+            <a:spAutoFit/>
+          </a:bodyPr>
+          <a:lstStyle/>
+          <a:p>
+            <a:pPr>
+              <a:defRPr sz="1150">
+                <a:solidFill>
+                  <a:srgbClr val="9CA3AF"/>
+                </a:solidFill>
+                <a:latin typeface="Segoe UI"/>
+              </a:defRPr>
+            </a:pPr>
+            <a:r>
+              <a:t>Leads: Krish M. Patel &amp; Krish K. Patel  •  4-tier urgency Kanban and cited knowledge base.</a:t>
+            </a:r>
+          </a:p>
+        </p:txBody>
+      </p:sp>
+      <p:sp>
+        <p:nvSpPr>
+          <p:cNvPr id="6" name="Rectangle 5"/>
+          <p:cNvSpPr/>
+          <p:nvPr/>
+        </p:nvSpPr>
+        <p:spPr>
+          <a:xfrm>
+            <a:off x="731520" y="1691640"/>
+            <a:ext cx="5212080" cy="4480560"/>
+          </a:xfrm>
+          <a:prstGeom prst="rect">
+            <a:avLst/>
+          </a:prstGeom>
+          <a:solidFill>
+            <a:srgbClr val="14161D"/>
+          </a:solidFill>
+          <a:ln w="19050">
+            <a:solidFill>
+              <a:srgbClr val="2A2E3A"/>
+            </a:solidFill>
+          </a:ln>
+        </p:spPr>
+        <p:style>
+          <a:lnRef idx="1">
+            <a:schemeClr val="accent1"/>
+          </a:lnRef>
+          <a:fillRef idx="3">
+            <a:schemeClr val="accent1"/>
+          </a:fillRef>
+          <a:effectRef idx="2">
+            <a:schemeClr val="accent1"/>
+          </a:effectRef>
+          <a:fontRef idx="minor">
+            <a:schemeClr val="lt1"/>
+          </a:fontRef>
+        </p:style>
+        <p:txBody>
+          <a:bodyPr rtlCol="0" anchor="ctr"/>
+          <a:lstStyle/>
+          <a:p>
+            <a:pPr algn="ctr"/>
           </a:p>
         </p:txBody>
       </p:sp>
       <p:pic>
         <p:nvPicPr>
-          <p:cNvPr id="3" name="Picture 2" descr="06_ai_agent.png"/>
+          <p:cNvPr id="7" name="Picture 6" descr="03_tasks_board.png"/>
           <p:cNvPicPr>
             <a:picLocks noChangeAspect="1"/>
           </p:cNvPicPr>
@@ -6337,8 +9735,8 @@
         </p:blipFill>
         <p:spPr>
           <a:xfrm>
-            <a:off x="731520" y="1645920"/>
-            <a:ext cx="5212080" cy="3257550"/>
+            <a:off x="822960" y="1783080"/>
+            <a:ext cx="5029200" cy="3143250"/>
           </a:xfrm>
           <a:prstGeom prst="rect">
             <a:avLst/>
@@ -6347,14 +9745,14 @@
       </p:pic>
       <p:sp>
         <p:nvSpPr>
-          <p:cNvPr id="4" name="TextBox 3"/>
+          <p:cNvPr id="8" name="TextBox 7"/>
           <p:cNvSpPr txBox="1"/>
           <p:nvPr/>
         </p:nvSpPr>
         <p:spPr>
           <a:xfrm>
-            <a:off x="731520" y="5120640"/>
-            <a:ext cx="5212080" cy="1097280"/>
+            <a:off x="822960" y="4754880"/>
+            <a:ext cx="5029200" cy="1280160"/>
           </a:xfrm>
           <a:prstGeom prst="rect">
             <a:avLst/>
@@ -6362,39 +9760,89 @@
           <a:noFill/>
         </p:spPr>
         <p:txBody>
-          <a:bodyPr wrap="none">
+          <a:bodyPr wrap="none" lIns="0" tIns="0" rIns="0" bIns="0">
             <a:spAutoFit/>
           </a:bodyPr>
           <a:lstStyle/>
           <a:p>
             <a:pPr>
-              <a:defRPr b="1" sz="1300">
-                <a:solidFill>
-                  <a:srgbClr val="06B6D4"/>
-                </a:solidFill>
-              </a:defRPr>
-            </a:pPr>
-            <a:r>
-              <a:t>Autonomous AI Agent Interface</a:t>
-            </a:r>
-          </a:p>
-          <a:p>
-            <a:pPr>
-              <a:defRPr sz="1050">
+              <a:defRPr sz="1000" b="1">
+                <a:solidFill>
+                  <a:srgbClr val="FF2D55"/>
+                </a:solidFill>
+                <a:latin typeface="Segoe UI"/>
+              </a:defRPr>
+            </a:pPr>
+            <a:r>
+              <a:t>TASK OPERATIONS BOARD</a:t>
+            </a:r>
+          </a:p>
+          <a:p>
+            <a:pPr>
+              <a:spcBef>
+                <a:spcPts val="200"/>
+              </a:spcBef>
+              <a:defRPr sz="1000">
                 <a:solidFill>
                   <a:srgbClr val="9CA3AF"/>
                 </a:solidFill>
-              </a:defRPr>
-            </a:pPr>
-            <a:r>
-              <a:t>Conversational engine that converts natural language into live database actions (creating tasks, broadcasting alerts, logging risks).</a:t>
-            </a:r>
+                <a:latin typeface="Segoe UI"/>
+              </a:defRPr>
+            </a:pPr>
+            <a:r>
+              <a:t>Displays AI-allocated tasks with 4-tier urgency tags (Critical, High, Medium, Low), assignee avatars, status pipelines, and search filters.</a:t>
+            </a:r>
+          </a:p>
+        </p:txBody>
+      </p:sp>
+      <p:sp>
+        <p:nvSpPr>
+          <p:cNvPr id="9" name="Rectangle 8"/>
+          <p:cNvSpPr/>
+          <p:nvPr/>
+        </p:nvSpPr>
+        <p:spPr>
+          <a:xfrm>
+            <a:off x="6217920" y="1691640"/>
+            <a:ext cx="5239512" cy="4480560"/>
+          </a:xfrm>
+          <a:prstGeom prst="rect">
+            <a:avLst/>
+          </a:prstGeom>
+          <a:solidFill>
+            <a:srgbClr val="14161D"/>
+          </a:solidFill>
+          <a:ln w="19050">
+            <a:solidFill>
+              <a:srgbClr val="2A2E3A"/>
+            </a:solidFill>
+          </a:ln>
+        </p:spPr>
+        <p:style>
+          <a:lnRef idx="1">
+            <a:schemeClr val="accent1"/>
+          </a:lnRef>
+          <a:fillRef idx="3">
+            <a:schemeClr val="accent1"/>
+          </a:fillRef>
+          <a:effectRef idx="2">
+            <a:schemeClr val="accent1"/>
+          </a:effectRef>
+          <a:fontRef idx="minor">
+            <a:schemeClr val="lt1"/>
+          </a:fontRef>
+        </p:style>
+        <p:txBody>
+          <a:bodyPr rtlCol="0" anchor="ctr"/>
+          <a:lstStyle/>
+          <a:p>
+            <a:pPr algn="ctr"/>
           </a:p>
         </p:txBody>
       </p:sp>
       <p:pic>
         <p:nvPicPr>
-          <p:cNvPr id="5" name="Picture 4" descr="04_meetings.png"/>
+          <p:cNvPr id="10" name="Picture 9" descr="05_documents_rag.png"/>
           <p:cNvPicPr>
             <a:picLocks noChangeAspect="1"/>
           </p:cNvPicPr>
@@ -6408,8 +9856,8 @@
         </p:blipFill>
         <p:spPr>
           <a:xfrm>
-            <a:off x="6217920" y="1645920"/>
-            <a:ext cx="5212080" cy="3257550"/>
+            <a:off x="6309360" y="1783080"/>
+            <a:ext cx="5056632" cy="3160395"/>
           </a:xfrm>
           <a:prstGeom prst="rect">
             <a:avLst/>
@@ -6418,14 +9866,14 @@
       </p:pic>
       <p:sp>
         <p:nvSpPr>
-          <p:cNvPr id="6" name="TextBox 5"/>
+          <p:cNvPr id="11" name="TextBox 10"/>
           <p:cNvSpPr txBox="1"/>
           <p:nvPr/>
         </p:nvSpPr>
         <p:spPr>
           <a:xfrm>
-            <a:off x="6217920" y="5120640"/>
-            <a:ext cx="5212080" cy="1097280"/>
+            <a:off x="6309360" y="4754880"/>
+            <a:ext cx="5056632" cy="1280160"/>
           </a:xfrm>
           <a:prstGeom prst="rect">
             <a:avLst/>
@@ -6433,32 +9881,73 @@
           <a:noFill/>
         </p:spPr>
         <p:txBody>
-          <a:bodyPr wrap="none">
+          <a:bodyPr wrap="none" lIns="0" tIns="0" rIns="0" bIns="0">
             <a:spAutoFit/>
           </a:bodyPr>
           <a:lstStyle/>
           <a:p>
             <a:pPr>
-              <a:defRPr b="1" sz="1300">
-                <a:solidFill>
-                  <a:srgbClr val="10B981"/>
-                </a:solidFill>
-              </a:defRPr>
-            </a:pPr>
-            <a:r>
-              <a:t>Meeting Transcript Processing</a:t>
-            </a:r>
-          </a:p>
-          <a:p>
-            <a:pPr>
-              <a:defRPr sz="1050">
+              <a:defRPr sz="1000" b="1">
+                <a:solidFill>
+                  <a:srgbClr val="FF2D55"/>
+                </a:solidFill>
+                <a:latin typeface="Segoe UI"/>
+              </a:defRPr>
+            </a:pPr>
+            <a:r>
+              <a:t>GROUNDED RAG KNOWLEDGE REPOSITORY</a:t>
+            </a:r>
+          </a:p>
+          <a:p>
+            <a:pPr>
+              <a:spcBef>
+                <a:spcPts val="200"/>
+              </a:spcBef>
+              <a:defRPr sz="1000">
                 <a:solidFill>
                   <a:srgbClr val="9CA3AF"/>
                 </a:solidFill>
-              </a:defRPr>
-            </a:pPr>
-            <a:r>
-              <a:t>Immediate distillation of raw notes into executive summaries, action items, and automated volunteer task assignments.</a:t>
+                <a:latin typeface="Segoe UI"/>
+              </a:defRPr>
+            </a:pPr>
+            <a:r>
+              <a:t>Multi-format knowledge repository (.pdf, .docx, .doc, .txt) with vector search, inline document text inspection, and grounded verbatim citation answers.</a:t>
+            </a:r>
+          </a:p>
+        </p:txBody>
+      </p:sp>
+      <p:sp>
+        <p:nvSpPr>
+          <p:cNvPr id="12" name="TextBox 11"/>
+          <p:cNvSpPr txBox="1"/>
+          <p:nvPr/>
+        </p:nvSpPr>
+        <p:spPr>
+          <a:xfrm>
+            <a:off x="731520" y="6473952"/>
+            <a:ext cx="10698480" cy="274320"/>
+          </a:xfrm>
+          <a:prstGeom prst="rect">
+            <a:avLst/>
+          </a:prstGeom>
+          <a:noFill/>
+        </p:spPr>
+        <p:txBody>
+          <a:bodyPr wrap="none" lIns="0" tIns="0" rIns="0" bIns="0">
+            <a:spAutoFit/>
+          </a:bodyPr>
+          <a:lstStyle/>
+          <a:p>
+            <a:pPr>
+              <a:defRPr sz="900">
+                <a:solidFill>
+                  <a:srgbClr val="6E7382"/>
+                </a:solidFill>
+                <a:latin typeface="Segoe UI"/>
+              </a:defRPr>
+            </a:pPr>
+            <a:r>
+              <a:t>ClubOps AI  •  Bit N Build 2026 Hackathon  •  Slide 8 of 12</a:t>
             </a:r>
           </a:p>
         </p:txBody>
@@ -6477,7 +9966,7 @@
     <p:bg>
       <p:bgPr>
         <a:solidFill>
-          <a:srgbClr val="0B0F19"/>
+          <a:srgbClr val="0B0C10"/>
         </a:solidFill>
         <a:effectLst/>
       </p:bgPr>
@@ -6497,8 +9986,8 @@
         </p:nvSpPr>
         <p:spPr>
           <a:xfrm>
-            <a:off x="731520" y="365760"/>
-            <a:ext cx="10698480" cy="1005840"/>
+            <a:off x="731520" y="320040"/>
+            <a:ext cx="411480" cy="320040"/>
           </a:xfrm>
           <a:prstGeom prst="rect">
             <a:avLst/>
@@ -6506,7 +9995,7 @@
           <a:noFill/>
         </p:spPr>
         <p:txBody>
-          <a:bodyPr wrap="square" lIns="0" tIns="0" rIns="0" bIns="0">
+          <a:bodyPr wrap="none" lIns="0" tIns="0" rIns="0" bIns="0">
             <a:spAutoFit/>
           </a:bodyPr>
           <a:lstStyle/>
@@ -6514,51 +10003,145 @@
             <a:pPr>
               <a:defRPr sz="1100" b="1">
                 <a:solidFill>
-                  <a:srgbClr val="06B6D4"/>
-                </a:solidFill>
-              </a:defRPr>
-            </a:pPr>
-            <a:r>
-              <a:t>SECTION 06 / TEAM CONTRIBUTIONS</a:t>
-            </a:r>
-          </a:p>
-          <a:p>
-            <a:pPr>
-              <a:spcBef>
-                <a:spcPts val="400"/>
-              </a:spcBef>
-              <a:defRPr sz="2400" b="1">
+                  <a:srgbClr val="FF2D55"/>
+                </a:solidFill>
+                <a:latin typeface="Segoe UI"/>
+              </a:defRPr>
+            </a:pPr>
+            <a:r>
+              <a:t>[C]</a:t>
+            </a:r>
+          </a:p>
+        </p:txBody>
+      </p:sp>
+      <p:sp>
+        <p:nvSpPr>
+          <p:cNvPr id="3" name="TextBox 2"/>
+          <p:cNvSpPr txBox="1"/>
+          <p:nvPr/>
+        </p:nvSpPr>
+        <p:spPr>
+          <a:xfrm>
+            <a:off x="1188720" y="320040"/>
+            <a:ext cx="10241280" cy="320040"/>
+          </a:xfrm>
+          <a:prstGeom prst="rect">
+            <a:avLst/>
+          </a:prstGeom>
+          <a:noFill/>
+        </p:spPr>
+        <p:txBody>
+          <a:bodyPr wrap="none" lIns="0" tIns="0" rIns="0" bIns="0">
+            <a:spAutoFit/>
+          </a:bodyPr>
+          <a:lstStyle/>
+          <a:p>
+            <a:pPr>
+              <a:defRPr sz="950" b="1">
+                <a:solidFill>
+                  <a:srgbClr val="9CA3AF"/>
+                </a:solidFill>
+                <a:latin typeface="Segoe UI"/>
+              </a:defRPr>
+            </a:pPr>
+            <a:r>
+              <a:t>CLUBOPS  •  BIT N BUILD 2026  •  AGENT &amp; TRANSCRIPTS</a:t>
+            </a:r>
+          </a:p>
+        </p:txBody>
+      </p:sp>
+      <p:sp>
+        <p:nvSpPr>
+          <p:cNvPr id="4" name="TextBox 3"/>
+          <p:cNvSpPr txBox="1"/>
+          <p:nvPr/>
+        </p:nvSpPr>
+        <p:spPr>
+          <a:xfrm>
+            <a:off x="731520" y="621792"/>
+            <a:ext cx="10698480" cy="594360"/>
+          </a:xfrm>
+          <a:prstGeom prst="rect">
+            <a:avLst/>
+          </a:prstGeom>
+          <a:noFill/>
+        </p:spPr>
+        <p:txBody>
+          <a:bodyPr wrap="none" lIns="0" tIns="0" rIns="0" bIns="0">
+            <a:spAutoFit/>
+          </a:bodyPr>
+          <a:lstStyle/>
+          <a:p>
+            <a:pPr>
+              <a:defRPr sz="2100" b="1">
                 <a:solidFill>
                   <a:srgbClr val="FFFFFF"/>
                 </a:solidFill>
-              </a:defRPr>
-            </a:pPr>
-            <a:r>
-              <a:t>Collaborative Engineering Division of Roles</a:t>
-            </a:r>
-          </a:p>
-        </p:txBody>
-      </p:sp>
-      <p:sp>
-        <p:nvSpPr>
-          <p:cNvPr id="3" name="Rounded Rectangle 2"/>
+                <a:latin typeface="Segoe UI"/>
+              </a:defRPr>
+            </a:pPr>
+            <a:r>
+              <a:t>Autonomous AI Agent &amp; Meeting Transcripts</a:t>
+            </a:r>
+          </a:p>
+        </p:txBody>
+      </p:sp>
+      <p:sp>
+        <p:nvSpPr>
+          <p:cNvPr id="5" name="TextBox 4"/>
+          <p:cNvSpPr txBox="1"/>
+          <p:nvPr/>
+        </p:nvSpPr>
+        <p:spPr>
+          <a:xfrm>
+            <a:off x="731520" y="1188720"/>
+            <a:ext cx="10698480" cy="320040"/>
+          </a:xfrm>
+          <a:prstGeom prst="rect">
+            <a:avLst/>
+          </a:prstGeom>
+          <a:noFill/>
+        </p:spPr>
+        <p:txBody>
+          <a:bodyPr wrap="none" lIns="0" tIns="0" rIns="0" bIns="0">
+            <a:spAutoFit/>
+          </a:bodyPr>
+          <a:lstStyle/>
+          <a:p>
+            <a:pPr>
+              <a:defRPr sz="1150">
+                <a:solidFill>
+                  <a:srgbClr val="9CA3AF"/>
+                </a:solidFill>
+                <a:latin typeface="Segoe UI"/>
+              </a:defRPr>
+            </a:pPr>
+            <a:r>
+              <a:t>Leads: Dhruv Patel &amp; Krish M. Patel  •  Natural language actions and instant transcript processing.</a:t>
+            </a:r>
+          </a:p>
+        </p:txBody>
+      </p:sp>
+      <p:sp>
+        <p:nvSpPr>
+          <p:cNvPr id="6" name="Rectangle 5"/>
           <p:cNvSpPr/>
           <p:nvPr/>
         </p:nvSpPr>
         <p:spPr>
           <a:xfrm>
-            <a:off x="731520" y="1645920"/>
-            <a:ext cx="5212080" cy="2103120"/>
-          </a:xfrm>
-          <a:prstGeom prst="roundRect">
+            <a:off x="731520" y="1691640"/>
+            <a:ext cx="5212080" cy="4480560"/>
+          </a:xfrm>
+          <a:prstGeom prst="rect">
             <a:avLst/>
           </a:prstGeom>
           <a:solidFill>
-            <a:srgbClr val="161B2C"/>
+            <a:srgbClr val="14161D"/>
           </a:solidFill>
           <a:ln w="19050">
             <a:solidFill>
-              <a:srgbClr val="2D3748"/>
+              <a:srgbClr val="2A2E3A"/>
             </a:solidFill>
           </a:ln>
         </p:spPr>
@@ -6577,57 +10160,109 @@
           </a:fontRef>
         </p:style>
         <p:txBody>
-          <a:bodyPr rtlCol="0" anchor="ctr" wrap="square" lIns="228600" tIns="182880" rIns="228600"/>
-          <a:lstStyle/>
-          <a:p>
-            <a:pPr algn="ctr">
-              <a:defRPr sz="1300" b="1">
-                <a:solidFill>
-                  <a:srgbClr val="3B82F6"/>
-                </a:solidFill>
-              </a:defRPr>
-            </a:pPr>
-            <a:r>
-              <a:t>KRISH PATEL (LEAD) • SYSTEM ARCHITECT &amp; AI SYSTEMS</a:t>
+          <a:bodyPr rtlCol="0" anchor="ctr"/>
+          <a:lstStyle/>
+          <a:p>
+            <a:pPr algn="ctr"/>
+          </a:p>
+        </p:txBody>
+      </p:sp>
+      <p:pic>
+        <p:nvPicPr>
+          <p:cNvPr id="7" name="Picture 6" descr="06_ai_agent.png"/>
+          <p:cNvPicPr>
+            <a:picLocks noChangeAspect="1"/>
+          </p:cNvPicPr>
+          <p:nvPr/>
+        </p:nvPicPr>
+        <p:blipFill>
+          <a:blip r:embed="rId2"/>
+          <a:stretch>
+            <a:fillRect/>
+          </a:stretch>
+        </p:blipFill>
+        <p:spPr>
+          <a:xfrm>
+            <a:off x="822960" y="1783080"/>
+            <a:ext cx="5029200" cy="3143250"/>
+          </a:xfrm>
+          <a:prstGeom prst="rect">
+            <a:avLst/>
+          </a:prstGeom>
+        </p:spPr>
+      </p:pic>
+      <p:sp>
+        <p:nvSpPr>
+          <p:cNvPr id="8" name="TextBox 7"/>
+          <p:cNvSpPr txBox="1"/>
+          <p:nvPr/>
+        </p:nvSpPr>
+        <p:spPr>
+          <a:xfrm>
+            <a:off x="822960" y="4754880"/>
+            <a:ext cx="5029200" cy="1280160"/>
+          </a:xfrm>
+          <a:prstGeom prst="rect">
+            <a:avLst/>
+          </a:prstGeom>
+          <a:noFill/>
+        </p:spPr>
+        <p:txBody>
+          <a:bodyPr wrap="none" lIns="0" tIns="0" rIns="0" bIns="0">
+            <a:spAutoFit/>
+          </a:bodyPr>
+          <a:lstStyle/>
+          <a:p>
+            <a:pPr>
+              <a:defRPr sz="1000" b="1">
+                <a:solidFill>
+                  <a:srgbClr val="FF2D55"/>
+                </a:solidFill>
+                <a:latin typeface="Segoe UI"/>
+              </a:defRPr>
+            </a:pPr>
+            <a:r>
+              <a:t>AUTONOMOUS AI AGENT WORKSPACE</a:t>
             </a:r>
           </a:p>
           <a:p>
             <a:pPr>
               <a:spcBef>
-                <a:spcPts val="800"/>
+                <a:spcPts val="200"/>
               </a:spcBef>
-              <a:defRPr sz="1100">
+              <a:defRPr sz="1000">
                 <a:solidFill>
                   <a:srgbClr val="9CA3AF"/>
                 </a:solidFill>
-              </a:defRPr>
-            </a:pPr>
-            <a:r>
-              <a:t>Engineered Gemini API prompts, autonomous agent runtime, tool registry, and meeting transcript NLP splitting.</a:t>
-            </a:r>
-          </a:p>
-        </p:txBody>
-      </p:sp>
-      <p:sp>
-        <p:nvSpPr>
-          <p:cNvPr id="4" name="Rounded Rectangle 3"/>
+                <a:latin typeface="Segoe UI"/>
+              </a:defRPr>
+            </a:pPr>
+            <a:r>
+              <a:t>Translates natural-language commands into live database operations (task creation, status progression, risk logging, and broadcast dispatches) across 6 tools.</a:t>
+            </a:r>
+          </a:p>
+        </p:txBody>
+      </p:sp>
+      <p:sp>
+        <p:nvSpPr>
+          <p:cNvPr id="9" name="Rectangle 8"/>
           <p:cNvSpPr/>
           <p:nvPr/>
         </p:nvSpPr>
         <p:spPr>
           <a:xfrm>
-            <a:off x="6217920" y="1645920"/>
-            <a:ext cx="5212080" cy="2103120"/>
-          </a:xfrm>
-          <a:prstGeom prst="roundRect">
+            <a:off x="6217920" y="1691640"/>
+            <a:ext cx="5239512" cy="4480560"/>
+          </a:xfrm>
+          <a:prstGeom prst="rect">
             <a:avLst/>
           </a:prstGeom>
           <a:solidFill>
-            <a:srgbClr val="161B2C"/>
+            <a:srgbClr val="14161D"/>
           </a:solidFill>
           <a:ln w="19050">
             <a:solidFill>
-              <a:srgbClr val="2D3748"/>
+              <a:srgbClr val="2A2E3A"/>
             </a:solidFill>
           </a:ln>
         </p:spPr>
@@ -6646,171 +10281,121 @@
           </a:fontRef>
         </p:style>
         <p:txBody>
-          <a:bodyPr rtlCol="0" anchor="ctr" wrap="square" lIns="228600" tIns="182880" rIns="228600"/>
-          <a:lstStyle/>
-          <a:p>
-            <a:pPr algn="ctr">
-              <a:defRPr sz="1300" b="1">
-                <a:solidFill>
-                  <a:srgbClr val="3B82F6"/>
-                </a:solidFill>
-              </a:defRPr>
-            </a:pPr>
-            <a:r>
-              <a:t>MEMBER 2 • FRONTEND LEAD &amp; UI/UX</a:t>
+          <a:bodyPr rtlCol="0" anchor="ctr"/>
+          <a:lstStyle/>
+          <a:p>
+            <a:pPr algn="ctr"/>
+          </a:p>
+        </p:txBody>
+      </p:sp>
+      <p:pic>
+        <p:nvPicPr>
+          <p:cNvPr id="10" name="Picture 9" descr="04_meetings.png"/>
+          <p:cNvPicPr>
+            <a:picLocks noChangeAspect="1"/>
+          </p:cNvPicPr>
+          <p:nvPr/>
+        </p:nvPicPr>
+        <p:blipFill>
+          <a:blip r:embed="rId3"/>
+          <a:stretch>
+            <a:fillRect/>
+          </a:stretch>
+        </p:blipFill>
+        <p:spPr>
+          <a:xfrm>
+            <a:off x="6309360" y="1783080"/>
+            <a:ext cx="5056632" cy="3160395"/>
+          </a:xfrm>
+          <a:prstGeom prst="rect">
+            <a:avLst/>
+          </a:prstGeom>
+        </p:spPr>
+      </p:pic>
+      <p:sp>
+        <p:nvSpPr>
+          <p:cNvPr id="11" name="TextBox 10"/>
+          <p:cNvSpPr txBox="1"/>
+          <p:nvPr/>
+        </p:nvSpPr>
+        <p:spPr>
+          <a:xfrm>
+            <a:off x="6309360" y="4754880"/>
+            <a:ext cx="5056632" cy="1280160"/>
+          </a:xfrm>
+          <a:prstGeom prst="rect">
+            <a:avLst/>
+          </a:prstGeom>
+          <a:noFill/>
+        </p:spPr>
+        <p:txBody>
+          <a:bodyPr wrap="none" lIns="0" tIns="0" rIns="0" bIns="0">
+            <a:spAutoFit/>
+          </a:bodyPr>
+          <a:lstStyle/>
+          <a:p>
+            <a:pPr>
+              <a:defRPr sz="1000" b="1">
+                <a:solidFill>
+                  <a:srgbClr val="FF2D55"/>
+                </a:solidFill>
+                <a:latin typeface="Segoe UI"/>
+              </a:defRPr>
+            </a:pPr>
+            <a:r>
+              <a:t>MEETING TRANSCRIPT PROCESSING</a:t>
             </a:r>
           </a:p>
           <a:p>
             <a:pPr>
               <a:spcBef>
-                <a:spcPts val="800"/>
+                <a:spcPts val="200"/>
               </a:spcBef>
-              <a:defRPr sz="1100">
+              <a:defRPr sz="1000">
                 <a:solidFill>
                   <a:srgbClr val="9CA3AF"/>
                 </a:solidFill>
-              </a:defRPr>
-            </a:pPr>
-            <a:r>
-              <a:t>Built the React 19 SPA, brutalist editorial design system, event context switcher, and interactive modal dialogs.</a:t>
-            </a:r>
-          </a:p>
-        </p:txBody>
-      </p:sp>
-      <p:sp>
-        <p:nvSpPr>
-          <p:cNvPr id="5" name="Rounded Rectangle 4"/>
-          <p:cNvSpPr/>
-          <p:nvPr/>
-        </p:nvSpPr>
-        <p:spPr>
-          <a:xfrm>
-            <a:off x="731520" y="4023360"/>
-            <a:ext cx="5212080" cy="2103120"/>
-          </a:xfrm>
-          <a:prstGeom prst="roundRect">
-            <a:avLst/>
-          </a:prstGeom>
-          <a:solidFill>
-            <a:srgbClr val="161B2C"/>
-          </a:solidFill>
-          <a:ln w="19050">
-            <a:solidFill>
-              <a:srgbClr val="2D3748"/>
-            </a:solidFill>
-          </a:ln>
-        </p:spPr>
-        <p:style>
-          <a:lnRef idx="1">
-            <a:schemeClr val="accent1"/>
-          </a:lnRef>
-          <a:fillRef idx="3">
-            <a:schemeClr val="accent1"/>
-          </a:fillRef>
-          <a:effectRef idx="2">
-            <a:schemeClr val="accent1"/>
-          </a:effectRef>
-          <a:fontRef idx="minor">
-            <a:schemeClr val="lt1"/>
-          </a:fontRef>
-        </p:style>
-        <p:txBody>
-          <a:bodyPr rtlCol="0" anchor="ctr" wrap="square" lIns="228600" tIns="182880" rIns="228600"/>
-          <a:lstStyle/>
-          <a:p>
-            <a:pPr algn="ctr">
-              <a:defRPr sz="1300" b="1">
-                <a:solidFill>
-                  <a:srgbClr val="3B82F6"/>
-                </a:solidFill>
-              </a:defRPr>
-            </a:pPr>
-            <a:r>
-              <a:t>MEMBER 3 • RAG &amp; VECTOR ENGINEER</a:t>
-            </a:r>
-          </a:p>
-          <a:p>
-            <a:pPr>
-              <a:spcBef>
-                <a:spcPts val="800"/>
-              </a:spcBef>
-              <a:defRPr sz="1100">
-                <a:solidFill>
-                  <a:srgbClr val="9CA3AF"/>
-                </a:solidFill>
-              </a:defRPr>
-            </a:pPr>
-            <a:r>
-              <a:t>Implemented multi-format parsers (Mammoth, pdf-parse), cosine similarity embeddings, and citation-backed Q&amp;A.</a:t>
-            </a:r>
-          </a:p>
-        </p:txBody>
-      </p:sp>
-      <p:sp>
-        <p:nvSpPr>
-          <p:cNvPr id="6" name="Rounded Rectangle 5"/>
-          <p:cNvSpPr/>
-          <p:nvPr/>
-        </p:nvSpPr>
-        <p:spPr>
-          <a:xfrm>
-            <a:off x="6217920" y="4023360"/>
-            <a:ext cx="5212080" cy="2103120"/>
-          </a:xfrm>
-          <a:prstGeom prst="roundRect">
-            <a:avLst/>
-          </a:prstGeom>
-          <a:solidFill>
-            <a:srgbClr val="161B2C"/>
-          </a:solidFill>
-          <a:ln w="19050">
-            <a:solidFill>
-              <a:srgbClr val="2D3748"/>
-            </a:solidFill>
-          </a:ln>
-        </p:spPr>
-        <p:style>
-          <a:lnRef idx="1">
-            <a:schemeClr val="accent1"/>
-          </a:lnRef>
-          <a:fillRef idx="3">
-            <a:schemeClr val="accent1"/>
-          </a:fillRef>
-          <a:effectRef idx="2">
-            <a:schemeClr val="accent1"/>
-          </a:effectRef>
-          <a:fontRef idx="minor">
-            <a:schemeClr val="lt1"/>
-          </a:fontRef>
-        </p:style>
-        <p:txBody>
-          <a:bodyPr rtlCol="0" anchor="ctr" wrap="square" lIns="228600" tIns="182880" rIns="228600"/>
-          <a:lstStyle/>
-          <a:p>
-            <a:pPr algn="ctr">
-              <a:defRPr sz="1300" b="1">
-                <a:solidFill>
-                  <a:srgbClr val="3B82F6"/>
-                </a:solidFill>
-              </a:defRPr>
-            </a:pPr>
-            <a:r>
-              <a:t>MEMBER 4 • DATABASE &amp; QA ENGINEER</a:t>
-            </a:r>
-          </a:p>
-          <a:p>
-            <a:pPr>
-              <a:spcBef>
-                <a:spcPts val="800"/>
-              </a:spcBef>
-              <a:defRPr sz="1100">
-                <a:solidFill>
-                  <a:srgbClr val="9CA3AF"/>
-                </a:solidFill>
-              </a:defRPr>
-            </a:pPr>
-            <a:r>
-              <a:t>Designed MongoDB Mongoose schemas, volunteer workload balancing algorithms, seed data, and automated demo suite.</a:t>
+                <a:latin typeface="Segoe UI"/>
+              </a:defRPr>
+            </a:pPr>
+            <a:r>
+              <a:t>Instant transcript analysis that extracts executive summaries, decisions, action items, and automatically assigns tasks to least-loaded volunteers upon submission.</a:t>
+            </a:r>
+          </a:p>
+        </p:txBody>
+      </p:sp>
+      <p:sp>
+        <p:nvSpPr>
+          <p:cNvPr id="12" name="TextBox 11"/>
+          <p:cNvSpPr txBox="1"/>
+          <p:nvPr/>
+        </p:nvSpPr>
+        <p:spPr>
+          <a:xfrm>
+            <a:off x="731520" y="6473952"/>
+            <a:ext cx="10698480" cy="274320"/>
+          </a:xfrm>
+          <a:prstGeom prst="rect">
+            <a:avLst/>
+          </a:prstGeom>
+          <a:noFill/>
+        </p:spPr>
+        <p:txBody>
+          <a:bodyPr wrap="none" lIns="0" tIns="0" rIns="0" bIns="0">
+            <a:spAutoFit/>
+          </a:bodyPr>
+          <a:lstStyle/>
+          <a:p>
+            <a:pPr>
+              <a:defRPr sz="900">
+                <a:solidFill>
+                  <a:srgbClr val="6E7382"/>
+                </a:solidFill>
+                <a:latin typeface="Segoe UI"/>
+              </a:defRPr>
+            </a:pPr>
+            <a:r>
+              <a:t>ClubOps AI  •  Bit N Build 2026 Hackathon  •  Slide 9 of 12</a:t>
             </a:r>
           </a:p>
         </p:txBody>
